--- a/docs/papers/thesis/thesis_presentation_zh_30min.pptx
+++ b/docs/papers/thesis/thesis_presentation_zh_30min.pptx
@@ -4971,7 +4971,7 @@
                 </a:solidFill>
                 <a:latin typeface="PingFang TC"/>
               </a:rPr>
-              <a:t>標準情境共 8 組</a:t>
+              <a:t>E1-E3：truth-adjusted simulation、IDW、synthetic ablation</a:t>
             </a:r>
           </a:p>
           <a:p>
@@ -4993,7 +4993,7 @@
                 </a:solidFill>
                 <a:latin typeface="PingFang TC"/>
               </a:rPr>
-              <a:t>窗戶矩陣共 48 組</a:t>
+              <a:t>E4-E6：裝置影響學習、48 組 window matrix、hybrid no-Fourier/LOO</a:t>
             </a:r>
           </a:p>
           <a:p>
@@ -5015,7 +5015,7 @@
                 </a:solidFill>
                 <a:latin typeface="PingFang TC"/>
               </a:rPr>
-              <a:t>比較 corrected estimate 與 IDW baseline</a:t>
+              <a:t>E7：bedroom_01 28 筆快照與 pillow 位置比較</a:t>
             </a:r>
           </a:p>
           <a:p>
@@ -5037,7 +5037,7 @@
                 </a:solidFill>
                 <a:latin typeface="PingFang TC"/>
               </a:rPr>
-              <a:t>證據層級拆分 synthetic full-field、real sparse calibration、public task-aligned</a:t>
+              <a:t>E8：推薦動作 before/after intervention protocol</a:t>
             </a:r>
           </a:p>
           <a:p>
@@ -5059,7 +5059,7 @@
                 </a:solidFill>
                 <a:latin typeface="PingFang TC"/>
               </a:rPr>
-              <a:t>真實 bedroom_01 快照共 28 筆</a:t>
+              <a:t>E9：public datasets 僅作 task-aligned benchmark</a:t>
             </a:r>
           </a:p>
           <a:p>
@@ -5081,29 +5081,7 @@
                 </a:solidFill>
                 <a:latin typeface="PingFang TC"/>
               </a:rPr>
-              <a:t>公開資料集僅作 task-aligned benchmark，不直接當 full-field 基準</a:t>
-            </a:r>
-          </a:p>
-          <a:p>
-            <a:pPr>
-              <a:spcAft>
-                <a:spcPts val="800"/>
-              </a:spcAft>
-              <a:defRPr sz="1600">
-                <a:solidFill>
-                  <a:srgbClr val="192028"/>
-                </a:solidFill>
-                <a:latin typeface="PingFang TC"/>
-              </a:defRPr>
-            </a:pPr>
-            <a:r>
-              <a:rPr sz="1600" b="0">
-                <a:solidFill>
-                  <a:srgbClr val="192028"/>
-                </a:solidFill>
-                <a:latin typeface="PingFang TC"/>
-              </a:rPr>
-              <a:t>推薦排序為 counterfactual simulation；實際效果需 before/after intervention</a:t>
+              <a:t>Web demo 與 3D 展示是呈現層，不列為量化實驗</a:t>
             </a:r>
           </a:p>
         </p:txBody>

--- a/docs/papers/thesis/thesis_presentation_zh_30min.pptx
+++ b/docs/papers/thesis/thesis_presentation_zh_30min.pptx
@@ -4414,73 +4414,139 @@
                 </a:solidFill>
                 <a:latin typeface="PingFang TC"/>
               </a:rPr>
-              <a:t>MCP</a:t>
-            </a:r>
-          </a:p>
-          <a:p>
-            <a:pPr>
-              <a:spcAft>
-                <a:spcPts val="300"/>
-              </a:spcAft>
-              <a:defRPr sz="1200">
-                <a:solidFill>
-                  <a:srgbClr val="192028"/>
-                </a:solidFill>
-                <a:latin typeface="PingFang TC"/>
-              </a:defRPr>
-            </a:pPr>
-            <a:r>
-              <a:rPr sz="1200" b="0">
-                <a:solidFill>
-                  <a:srgbClr val="192028"/>
-                </a:solidFill>
-                <a:latin typeface="PingFang TC"/>
-              </a:rPr>
-              <a:t>本地 stdio server</a:t>
-            </a:r>
-          </a:p>
-          <a:p>
-            <a:pPr>
-              <a:spcAft>
-                <a:spcPts val="300"/>
-              </a:spcAft>
-              <a:defRPr sz="1200">
-                <a:solidFill>
-                  <a:srgbClr val="192028"/>
-                </a:solidFill>
-                <a:latin typeface="PingFang TC"/>
-              </a:defRPr>
-            </a:pPr>
-            <a:r>
-              <a:rPr sz="1200" b="0">
-                <a:solidFill>
-                  <a:srgbClr val="192028"/>
-                </a:solidFill>
-                <a:latin typeface="PingFang TC"/>
-              </a:rPr>
-              <a:t>scenario / ranking / baseline / point sample / window tools</a:t>
-            </a:r>
-          </a:p>
-          <a:p>
-            <a:pPr>
-              <a:spcAft>
-                <a:spcPts val="300"/>
-              </a:spcAft>
-              <a:defRPr sz="1200">
-                <a:solidFill>
-                  <a:srgbClr val="192028"/>
-                </a:solidFill>
-                <a:latin typeface="PingFang TC"/>
-              </a:defRPr>
-            </a:pPr>
-            <a:r>
-              <a:rPr sz="1200" b="0">
-                <a:solidFill>
-                  <a:srgbClr val="192028"/>
-                </a:solidFill>
-                <a:latin typeface="PingFang TC"/>
-              </a:rPr>
-              <a:t>可被 VS Code 或其他 MCP client 連接</a:t>
+              <a:t>MCP：工具化介面</a:t>
+            </a:r>
+          </a:p>
+          <a:p>
+            <a:pPr>
+              <a:spcAft>
+                <a:spcPts val="300"/>
+              </a:spcAft>
+              <a:defRPr sz="1200">
+                <a:solidFill>
+                  <a:srgbClr val="192028"/>
+                </a:solidFill>
+                <a:latin typeface="PingFang TC"/>
+              </a:defRPr>
+            </a:pPr>
+            <a:r>
+              <a:rPr sz="1200" b="0">
+                <a:solidFill>
+                  <a:srgbClr val="192028"/>
+                </a:solidFill>
+                <a:latin typeface="PingFang TC"/>
+              </a:rPr>
+              <a:t>MCP 不做預測；核心模型負責場估計、校正與排序</a:t>
+            </a:r>
+          </a:p>
+          <a:p>
+            <a:pPr>
+              <a:spcAft>
+                <a:spcPts val="300"/>
+              </a:spcAft>
+              <a:defRPr sz="1200">
+                <a:solidFill>
+                  <a:srgbClr val="192028"/>
+                </a:solidFill>
+                <a:latin typeface="PingFang TC"/>
+              </a:defRPr>
+            </a:pPr>
+            <a:r>
+              <a:rPr sz="1200" b="0">
+                <a:solidFill>
+                  <a:srgbClr val="192028"/>
+                </a:solidFill>
+                <a:latin typeface="PingFang TC"/>
+              </a:rPr>
+              <a:t>initialize：先註冊 runtime 環境與 baseline</a:t>
+            </a:r>
+          </a:p>
+          <a:p>
+            <a:pPr>
+              <a:spcAft>
+                <a:spcPts val="300"/>
+              </a:spcAft>
+              <a:defRPr sz="1200">
+                <a:solidFill>
+                  <a:srgbClr val="192028"/>
+                </a:solidFill>
+                <a:latin typeface="PingFang TC"/>
+              </a:defRPr>
+            </a:pPr>
+            <a:r>
+              <a:rPr sz="1200" b="0">
+                <a:solidFill>
+                  <a:srgbClr val="192028"/>
+                </a:solidFill>
+                <a:latin typeface="PingFang TC"/>
+              </a:rPr>
+              <a:t>sample point：補足非感測點、可指定 elapsed/steady state</a:t>
+            </a:r>
+          </a:p>
+          <a:p>
+            <a:pPr>
+              <a:spcAft>
+                <a:spcPts val="300"/>
+              </a:spcAft>
+              <a:defRPr sz="1200">
+                <a:solidFill>
+                  <a:srgbClr val="192028"/>
+                </a:solidFill>
+                <a:latin typeface="PingFang TC"/>
+              </a:defRPr>
+            </a:pPr>
+            <a:r>
+              <a:rPr sz="1200" b="0">
+                <a:solidFill>
+                  <a:srgbClr val="192028"/>
+                </a:solidFill>
+                <a:latin typeface="PingFang TC"/>
+              </a:rPr>
+              <a:t>learn impacts：start/finish before-after record</a:t>
+            </a:r>
+          </a:p>
+          <a:p>
+            <a:pPr>
+              <a:spcAft>
+                <a:spcPts val="300"/>
+              </a:spcAft>
+              <a:defRPr sz="1200">
+                <a:solidFill>
+                  <a:srgbClr val="192028"/>
+                </a:solidFill>
+                <a:latin typeface="PingFang TC"/>
+              </a:defRPr>
+            </a:pPr>
+            <a:r>
+              <a:rPr sz="1200" b="0">
+                <a:solidFill>
+                  <a:srgbClr val="192028"/>
+                </a:solidFill>
+                <a:latin typeface="PingFang TC"/>
+              </a:rPr>
+              <a:t>window direct：輸入外部資料，不走 48 組 preset</a:t>
+            </a:r>
+          </a:p>
+          <a:p>
+            <a:pPr>
+              <a:spcAft>
+                <a:spcPts val="300"/>
+              </a:spcAft>
+              <a:defRPr sz="1200">
+                <a:solidFill>
+                  <a:srgbClr val="192028"/>
+                </a:solidFill>
+                <a:latin typeface="PingFang TC"/>
+              </a:defRPr>
+            </a:pPr>
+            <a:r>
+              <a:rPr sz="1200" b="0">
+                <a:solidFill>
+                  <a:srgbClr val="192028"/>
+                </a:solidFill>
+                <a:latin typeface="PingFang TC"/>
+              </a:rPr>
+              <a:t>rank actions：以指定座標目標評估註冊設備操作</a:t>
             </a:r>
           </a:p>
         </p:txBody>
@@ -21939,7 +22005,7 @@
                 </a:solidFill>
                 <a:latin typeface="PingFang TC"/>
               </a:rPr>
-              <a:t>溫度/濕度可做 Fourier low-pass；照度保留快速跳變</a:t>
+              <a:t>溫濕度響應較平滑可低通；照度因光源/遮蔽需保留快速跳變</a:t>
             </a:r>
           </a:p>
         </p:txBody>

--- a/docs/papers/thesis/thesis_presentation_zh_30min.pptx
+++ b/docs/papers/thesis/thesis_presentation_zh_30min.pptx
@@ -4056,14 +4056,14 @@
                 </a:solidFill>
                 <a:latin typeface="PingFang TC"/>
               </a:rPr>
-              <a:t>感測器校正與裝置影響學習</a:t>
+              <a:t>模型學習、推論與推薦資料流</a:t>
             </a:r>
           </a:p>
         </p:txBody>
       </p:sp>
       <p:pic>
         <p:nvPicPr>
-          <p:cNvPr id="4" name="Picture 3" descr="感測器校正與學習流程.png"/>
+          <p:cNvPr id="4" name="Picture 3" descr="模型學習推論與推薦資料流.png"/>
           <p:cNvPicPr>
             <a:picLocks noChangeAspect="1"/>
           </p:cNvPicPr>
@@ -4077,8 +4077,8 @@
         </p:blipFill>
         <p:spPr>
           <a:xfrm>
-            <a:off x="640080" y="1188720"/>
-            <a:ext cx="5669280" cy="4846320"/>
+            <a:off x="411480" y="1005840"/>
+            <a:ext cx="11384280" cy="5257800"/>
           </a:xfrm>
           <a:prstGeom prst="rect">
             <a:avLst/>
@@ -4087,137 +4087,7 @@
       </p:pic>
       <p:sp>
         <p:nvSpPr>
-          <p:cNvPr id="5" name="Rectangle 4"/>
-          <p:cNvSpPr/>
-          <p:nvPr/>
-        </p:nvSpPr>
-        <p:spPr>
-          <a:xfrm>
-            <a:off x="6492240" y="1325880"/>
-            <a:ext cx="4572000" cy="4572000"/>
-          </a:xfrm>
-          <a:prstGeom prst="rect">
-            <a:avLst/>
-          </a:prstGeom>
-          <a:solidFill>
-            <a:srgbClr val="FFFFFF"/>
-          </a:solidFill>
-          <a:ln w="15240">
-            <a:solidFill>
-              <a:srgbClr val="7C8FA5"/>
-            </a:solidFill>
-          </a:ln>
-        </p:spPr>
-        <p:style>
-          <a:lnRef idx="1">
-            <a:schemeClr val="accent1"/>
-          </a:lnRef>
-          <a:fillRef idx="3">
-            <a:schemeClr val="accent1"/>
-          </a:fillRef>
-          <a:effectRef idx="2">
-            <a:schemeClr val="accent1"/>
-          </a:effectRef>
-          <a:fontRef idx="minor">
-            <a:schemeClr val="lt1"/>
-          </a:fontRef>
-        </p:style>
-        <p:txBody>
-          <a:bodyPr rtlCol="0" anchor="t"/>
-          <a:lstStyle/>
-          <a:p>
-            <a:pPr algn="ctr">
-              <a:spcAft>
-                <a:spcPts val="800"/>
-              </a:spcAft>
-              <a:defRPr sz="1600" b="1">
-                <a:solidFill>
-                  <a:srgbClr val="005382"/>
-                </a:solidFill>
-                <a:latin typeface="PingFang TC"/>
-              </a:defRPr>
-            </a:pPr>
-            <a:r>
-              <a:rPr sz="1600" b="1">
-                <a:solidFill>
-                  <a:srgbClr val="005382"/>
-                </a:solidFill>
-                <a:latin typeface="PingFang TC"/>
-              </a:rPr>
-              <a:t>兩條核心流程</a:t>
-            </a:r>
-          </a:p>
-          <a:p>
-            <a:pPr>
-              <a:spcAft>
-                <a:spcPts val="300"/>
-              </a:spcAft>
-              <a:defRPr sz="1200">
-                <a:solidFill>
-                  <a:srgbClr val="192028"/>
-                </a:solidFill>
-                <a:latin typeface="PingFang TC"/>
-              </a:defRPr>
-            </a:pPr>
-            <a:r>
-              <a:rPr sz="1200" b="0">
-                <a:solidFill>
-                  <a:srgbClr val="192028"/>
-                </a:solidFill>
-                <a:latin typeface="PingFang TC"/>
-              </a:rPr>
-              <a:t>1. 角落觀測殘差 → power calibration → trilinear correction</a:t>
-            </a:r>
-          </a:p>
-          <a:p>
-            <a:pPr>
-              <a:spcAft>
-                <a:spcPts val="300"/>
-              </a:spcAft>
-              <a:defRPr sz="1200">
-                <a:solidFill>
-                  <a:srgbClr val="192028"/>
-                </a:solidFill>
-                <a:latin typeface="PingFang TC"/>
-              </a:defRPr>
-            </a:pPr>
-            <a:r>
-              <a:rPr sz="1200" b="0">
-                <a:solidFill>
-                  <a:srgbClr val="192028"/>
-                </a:solidFill>
-                <a:latin typeface="PingFang TC"/>
-              </a:rPr>
-              <a:t>2. before/after 觀測差值 → least-squares impact learning</a:t>
-            </a:r>
-          </a:p>
-          <a:p>
-            <a:pPr>
-              <a:spcAft>
-                <a:spcPts val="300"/>
-              </a:spcAft>
-              <a:defRPr sz="1200">
-                <a:solidFill>
-                  <a:srgbClr val="192028"/>
-                </a:solidFill>
-                <a:latin typeface="PingFang TC"/>
-              </a:defRPr>
-            </a:pPr>
-            <a:r>
-              <a:rPr sz="1200" b="0">
-                <a:solidFill>
-                  <a:srgbClr val="192028"/>
-                </a:solidFill>
-                <a:latin typeface="PingFang TC"/>
-              </a:rPr>
-              <a:t>目標是讓模型可校正，也可學習非連網裝置影響</a:t>
-            </a:r>
-          </a:p>
-        </p:txBody>
-      </p:sp>
-      <p:sp>
-        <p:nvSpPr>
-          <p:cNvPr id="6" name="TextBox 5"/>
+          <p:cNvPr id="5" name="TextBox 4"/>
           <p:cNvSpPr txBox="1"/>
           <p:nvPr/>
         </p:nvSpPr>
@@ -4458,7 +4328,7 @@
                 </a:solidFill>
                 <a:latin typeface="PingFang TC"/>
               </a:rPr>
-              <a:t>initialize：先註冊 runtime 環境與 baseline</a:t>
+              <a:t>initialize：註冊 scenario、baseline、外部邊界、設備/家具、時間與 estimator</a:t>
             </a:r>
           </a:p>
           <a:p>

--- a/docs/papers/thesis/thesis_presentation_zh_30min.pptx
+++ b/docs/papers/thesis/thesis_presentation_zh_30min.pptx
@@ -4416,7 +4416,7 @@
                 </a:solidFill>
                 <a:latin typeface="PingFang TC"/>
               </a:rPr>
-              <a:t>rank actions：以指定座標目標評估註冊設備操作</a:t>
+              <a:t>rank actions：以指定座標 sample 與 T/H/L 目標評估註冊設備操作</a:t>
             </a:r>
           </a:p>
         </p:txBody>
@@ -14079,7 +14079,7 @@
                 </a:solidFill>
                 <a:latin typeface="PingFang TC"/>
               </a:rPr>
-              <a:t>支援控制推薦與 AI 查詢</a:t>
+              <a:t>在 sample/cluster + 三因子目標下支援推薦</a:t>
             </a:r>
           </a:p>
         </p:txBody>
@@ -19569,7 +19569,7 @@
                 </a:solidFill>
                 <a:latin typeface="PingFang TC"/>
               </a:rPr>
-              <a:t>RQ3：學習後能否改善控制推薦？</a:t>
+              <a:t>RQ3：sample/cluster 與三因子目標下能否排序控制動作？</a:t>
             </a:r>
           </a:p>
           <a:p>

--- a/docs/papers/thesis/thesis_presentation_zh_30min.pptx
+++ b/docs/papers/thesis/thesis_presentation_zh_30min.pptx
@@ -3302,7 +3302,7 @@
                 </a:solidFill>
                 <a:latin typeface="Noto Sans TC"/>
               </a:rPr>
-              <a:t>論文口試簡報</a:t>
+              <a:t>碩士論文簡報</a:t>
             </a:r>
           </a:p>
         </p:txBody>
@@ -8797,7 +8797,7 @@
                 </a:solidFill>
                 <a:latin typeface="Noto Sans TC"/>
               </a:rPr>
-              <a:t>證據鏈與 Claim Boundary</a:t>
+              <a:t>證據鏈與驗證範圍</a:t>
             </a:r>
           </a:p>
         </p:txBody>
@@ -11417,7 +11417,7 @@
                 </a:solidFill>
                 <a:latin typeface="Noto Sans TC"/>
               </a:rPr>
-              <a:t>• Illuminance: 2.0835</a:t>
+              <a:t>• Illuminance: 2.0269</a:t>
             </a:r>
           </a:p>
         </p:txBody>
@@ -11594,7 +11594,7 @@
                 </a:solidFill>
                 <a:latin typeface="Noto Sans TC"/>
               </a:rPr>
-              <a:t>IDW 比較</a:t>
+              <a:t>圖表資料</a:t>
             </a:r>
           </a:p>
         </p:txBody>
@@ -11623,6 +11623,81 @@
           <a:p>
             <a:pPr>
               <a:lnSpc>
+                <a:spcPct val="114000"/>
+              </a:lnSpc>
+              <a:spcAft>
+                <a:spcPts val="400"/>
+              </a:spcAft>
+              <a:defRPr sz="1100">
+                <a:solidFill>
+                  <a:srgbClr val="1E2733"/>
+                </a:solidFill>
+                <a:latin typeface="Noto Sans TC"/>
+              </a:defRPr>
+            </a:pPr>
+            <a:r>
+              <a:rPr sz="1100" b="0">
+                <a:solidFill>
+                  <a:srgbClr val="1E2733"/>
+                </a:solidFill>
+                <a:latin typeface="Noto Sans TC"/>
+              </a:rPr>
+              <a:t>• 8 scenarios, full 3D grid</a:t>
+            </a:r>
+          </a:p>
+          <a:p>
+            <a:pPr>
+              <a:lnSpc>
+                <a:spcPct val="114000"/>
+              </a:lnSpc>
+              <a:spcAft>
+                <a:spcPts val="400"/>
+              </a:spcAft>
+              <a:defRPr sz="1100">
+                <a:solidFill>
+                  <a:srgbClr val="1E2733"/>
+                </a:solidFill>
+                <a:latin typeface="Noto Sans TC"/>
+              </a:defRPr>
+            </a:pPr>
+            <a:r>
+              <a:rPr sz="1100" b="0">
+                <a:solidFill>
+                  <a:srgbClr val="1E2733"/>
+                </a:solidFill>
+                <a:latin typeface="Noto Sans TC"/>
+              </a:rPr>
+              <a:t>• Y axis: log-scale Field MAE</a:t>
+            </a:r>
+          </a:p>
+          <a:p>
+            <a:pPr>
+              <a:lnSpc>
+                <a:spcPct val="114000"/>
+              </a:lnSpc>
+              <a:spcAft>
+                <a:spcPts val="400"/>
+              </a:spcAft>
+              <a:defRPr sz="1100">
+                <a:solidFill>
+                  <a:srgbClr val="1E2733"/>
+                </a:solidFill>
+                <a:latin typeface="Noto Sans TC"/>
+              </a:defRPr>
+            </a:pPr>
+            <a:r>
+              <a:rPr sz="1100" b="0">
+                <a:solidFill>
+                  <a:srgbClr val="1E2733"/>
+                </a:solidFill>
+                <a:latin typeface="Noto Sans TC"/>
+              </a:rPr>
+              <a:t>• Bars: IDW / Base / LOO Hybrid</a:t>
+            </a:r>
+          </a:p>
+          <a:p>
+            <a:pPr>
+              <a:lnSpc>
                 <a:spcPct val="108000"/>
               </a:lnSpc>
               <a:spcAft>
@@ -11642,57 +11717,7 @@
                 </a:solidFill>
                 <a:latin typeface="Cambria Math"/>
               </a:rPr>
-              <a:t>IDW 可做 baseline</a:t>
-            </a:r>
-          </a:p>
-          <a:p>
-            <a:pPr>
-              <a:lnSpc>
-                <a:spcPct val="114000"/>
-              </a:lnSpc>
-              <a:spcAft>
-                <a:spcPts val="400"/>
-              </a:spcAft>
-              <a:defRPr sz="1200">
-                <a:solidFill>
-                  <a:srgbClr val="1E2733"/>
-                </a:solidFill>
-                <a:latin typeface="Noto Sans TC"/>
-              </a:defRPr>
-            </a:pPr>
-            <a:r>
-              <a:rPr sz="1200" b="0">
-                <a:solidFill>
-                  <a:srgbClr val="1E2733"/>
-                </a:solidFill>
-                <a:latin typeface="Noto Sans TC"/>
-              </a:rPr>
-              <a:t>• 但缺設備位置與方向資訊</a:t>
-            </a:r>
-          </a:p>
-          <a:p>
-            <a:pPr>
-              <a:lnSpc>
-                <a:spcPct val="114000"/>
-              </a:lnSpc>
-              <a:spcAft>
-                <a:spcPts val="400"/>
-              </a:spcAft>
-              <a:defRPr sz="1200">
-                <a:solidFill>
-                  <a:srgbClr val="1E2733"/>
-                </a:solidFill>
-                <a:latin typeface="Noto Sans TC"/>
-              </a:defRPr>
-            </a:pPr>
-            <a:r>
-              <a:rPr sz="1200" b="0">
-                <a:solidFill>
-                  <a:srgbClr val="1E2733"/>
-                </a:solidFill>
-                <a:latin typeface="Noto Sans TC"/>
-              </a:rPr>
-              <a:t>• 照度與局部熱區重建效果明顯較差</a:t>
+              <a:t>IDW uses same 8 corner readings</a:t>
             </a:r>
           </a:p>
         </p:txBody>
@@ -11927,21 +11952,46 @@
               <a:spcAft>
                 <a:spcPts val="400"/>
               </a:spcAft>
-              <a:defRPr sz="1000">
-                <a:solidFill>
-                  <a:srgbClr val="1E2733"/>
-                </a:solidFill>
-                <a:latin typeface="Noto Sans TC"/>
-              </a:defRPr>
-            </a:pPr>
-            <a:r>
-              <a:rPr sz="1000" b="0">
-                <a:solidFill>
-                  <a:srgbClr val="1E2733"/>
-                </a:solidFill>
-                <a:latin typeface="Noto Sans TC"/>
-              </a:rPr>
-              <a:t>• Raw pillow MAE: T=0.8967, H=4.1286, L=358.6392</a:t>
+              <a:defRPr sz="1100">
+                <a:solidFill>
+                  <a:srgbClr val="1E2733"/>
+                </a:solidFill>
+                <a:latin typeface="Noto Sans TC"/>
+              </a:defRPr>
+            </a:pPr>
+            <a:r>
+              <a:rPr sz="1100" b="0">
+                <a:solidFill>
+                  <a:srgbClr val="1E2733"/>
+                </a:solidFill>
+                <a:latin typeface="Noto Sans TC"/>
+              </a:rPr>
+              <a:t>• Raw pillow MAE: T=0.8967, H=4.1286, L=309.0142</a:t>
+            </a:r>
+          </a:p>
+          <a:p>
+            <a:pPr>
+              <a:lnSpc>
+                <a:spcPct val="108000"/>
+              </a:lnSpc>
+              <a:spcAft>
+                <a:spcPts val="200"/>
+              </a:spcAft>
+              <a:defRPr sz="1400">
+                <a:solidFill>
+                  <a:srgbClr val="1E2733"/>
+                </a:solidFill>
+                <a:latin typeface="Cambria Math"/>
+              </a:defRPr>
+            </a:pPr>
+            <a:r>
+              <a:rPr sz="1400" b="0">
+                <a:solidFill>
+                  <a:srgbClr val="1E2733"/>
+                </a:solidFill>
+                <a:latin typeface="Cambria Math"/>
+              </a:rPr>
+              <a:t>Corrected pillow MAE: T=0.1676, H=0.3939, L=16.6450</a:t>
             </a:r>
           </a:p>
           <a:p>
@@ -11952,40 +12002,15 @@
               <a:spcAft>
                 <a:spcPts val="400"/>
               </a:spcAft>
-              <a:defRPr sz="1000">
-                <a:solidFill>
-                  <a:srgbClr val="1E2733"/>
-                </a:solidFill>
-                <a:latin typeface="Noto Sans TC"/>
-              </a:defRPr>
-            </a:pPr>
-            <a:r>
-              <a:rPr sz="1000" b="0">
-                <a:solidFill>
-                  <a:srgbClr val="1E2733"/>
-                </a:solidFill>
-                <a:latin typeface="Noto Sans TC"/>
-              </a:rPr>
-              <a:t>• Corrected pillow MAE: T=0.1676, H=0.3939, L=21.3753</a:t>
-            </a:r>
-          </a:p>
-          <a:p>
-            <a:pPr>
-              <a:lnSpc>
-                <a:spcPct val="114000"/>
-              </a:lnSpc>
-              <a:spcAft>
-                <a:spcPts val="400"/>
-              </a:spcAft>
-              <a:defRPr sz="1000">
-                <a:solidFill>
-                  <a:srgbClr val="1E2733"/>
-                </a:solidFill>
-                <a:latin typeface="Noto Sans TC"/>
-              </a:defRPr>
-            </a:pPr>
-            <a:r>
-              <a:rPr sz="1000" b="0">
+              <a:defRPr sz="1100">
+                <a:solidFill>
+                  <a:srgbClr val="1E2733"/>
+                </a:solidFill>
+                <a:latin typeface="Noto Sans TC"/>
+              </a:defRPr>
+            </a:pPr>
+            <a:r>
+              <a:rPr sz="1100" b="0">
                 <a:solidFill>
                   <a:srgbClr val="1E2733"/>
                 </a:solidFill>
@@ -12745,15 +12770,15 @@
               <a:spcAft>
                 <a:spcPts val="400"/>
               </a:spcAft>
-              <a:defRPr sz="1100">
-                <a:solidFill>
-                  <a:srgbClr val="1E2733"/>
-                </a:solidFill>
-                <a:latin typeface="Noto Sans TC"/>
-              </a:defRPr>
-            </a:pPr>
-            <a:r>
-              <a:rPr sz="1100" b="0">
+              <a:defRPr sz="1200">
+                <a:solidFill>
+                  <a:srgbClr val="1E2733"/>
+                </a:solidFill>
+                <a:latin typeface="Noto Sans TC"/>
+              </a:defRPr>
+            </a:pPr>
+            <a:r>
+              <a:rPr sz="1200" b="0">
                 <a:solidFill>
                   <a:srgbClr val="1E2733"/>
                 </a:solidFill>
@@ -12770,15 +12795,15 @@
               <a:spcAft>
                 <a:spcPts val="400"/>
               </a:spcAft>
-              <a:defRPr sz="1100">
-                <a:solidFill>
-                  <a:srgbClr val="1E2733"/>
-                </a:solidFill>
-                <a:latin typeface="Noto Sans TC"/>
-              </a:defRPr>
-            </a:pPr>
-            <a:r>
-              <a:rPr sz="1100" b="0">
+              <a:defRPr sz="1200">
+                <a:solidFill>
+                  <a:srgbClr val="1E2733"/>
+                </a:solidFill>
+                <a:latin typeface="Noto Sans TC"/>
+              </a:defRPr>
+            </a:pPr>
+            <a:r>
+              <a:rPr sz="1200" b="0">
                 <a:solidFill>
                   <a:srgbClr val="1E2733"/>
                 </a:solidFill>
@@ -12795,21 +12820,46 @@
               <a:spcAft>
                 <a:spcPts val="400"/>
               </a:spcAft>
-              <a:defRPr sz="1100">
-                <a:solidFill>
-                  <a:srgbClr val="1E2733"/>
-                </a:solidFill>
-                <a:latin typeface="Noto Sans TC"/>
-              </a:defRPr>
-            </a:pPr>
-            <a:r>
-              <a:rPr sz="1100" b="0">
-                <a:solidFill>
-                  <a:srgbClr val="1E2733"/>
-                </a:solidFill>
-                <a:latin typeface="Noto Sans TC"/>
-              </a:rPr>
-              <a:t>• Raw pillow MAE: T=0.8967, H=4.1286, L=358.6392</a:t>
+              <a:defRPr sz="1200">
+                <a:solidFill>
+                  <a:srgbClr val="1E2733"/>
+                </a:solidFill>
+                <a:latin typeface="Noto Sans TC"/>
+              </a:defRPr>
+            </a:pPr>
+            <a:r>
+              <a:rPr sz="1200" b="0">
+                <a:solidFill>
+                  <a:srgbClr val="1E2733"/>
+                </a:solidFill>
+                <a:latin typeface="Noto Sans TC"/>
+              </a:rPr>
+              <a:t>• Raw pillow MAE: T=0.8967, H=4.1286, L=309.0142</a:t>
+            </a:r>
+          </a:p>
+          <a:p>
+            <a:pPr>
+              <a:lnSpc>
+                <a:spcPct val="108000"/>
+              </a:lnSpc>
+              <a:spcAft>
+                <a:spcPts val="200"/>
+              </a:spcAft>
+              <a:defRPr sz="1400">
+                <a:solidFill>
+                  <a:srgbClr val="1E2733"/>
+                </a:solidFill>
+                <a:latin typeface="Cambria Math"/>
+              </a:defRPr>
+            </a:pPr>
+            <a:r>
+              <a:rPr sz="1400" b="0">
+                <a:solidFill>
+                  <a:srgbClr val="1E2733"/>
+                </a:solidFill>
+                <a:latin typeface="Cambria Math"/>
+              </a:rPr>
+              <a:t>Corrected pillow MAE: T=0.1676, H=0.3939, L=16.6450</a:t>
             </a:r>
           </a:p>
           <a:p>
@@ -12820,21 +12870,21 @@
               <a:spcAft>
                 <a:spcPts val="400"/>
               </a:spcAft>
-              <a:defRPr sz="1100">
-                <a:solidFill>
-                  <a:srgbClr val="1E2733"/>
-                </a:solidFill>
-                <a:latin typeface="Noto Sans TC"/>
-              </a:defRPr>
-            </a:pPr>
-            <a:r>
-              <a:rPr sz="1100" b="0">
-                <a:solidFill>
-                  <a:srgbClr val="1E2733"/>
-                </a:solidFill>
-                <a:latin typeface="Noto Sans TC"/>
-              </a:rPr>
-              <a:t>• Corrected pillow MAE: T=0.1676, H=0.3939, L=21.3753</a:t>
+              <a:defRPr sz="1200">
+                <a:solidFill>
+                  <a:srgbClr val="1E2733"/>
+                </a:solidFill>
+                <a:latin typeface="Noto Sans TC"/>
+              </a:defRPr>
+            </a:pPr>
+            <a:r>
+              <a:rPr sz="1200" b="0">
+                <a:solidFill>
+                  <a:srgbClr val="1E2733"/>
+                </a:solidFill>
+                <a:latin typeface="Noto Sans TC"/>
+              </a:rPr>
+              <a:t>• 支援範圍：此快照設定下的 held-out pillow 改善</a:t>
             </a:r>
           </a:p>
           <a:p>
@@ -12845,46 +12895,21 @@
               <a:spcAft>
                 <a:spcPts val="400"/>
               </a:spcAft>
-              <a:defRPr sz="1100">
-                <a:solidFill>
-                  <a:srgbClr val="1E2733"/>
-                </a:solidFill>
-                <a:latin typeface="Noto Sans TC"/>
-              </a:defRPr>
-            </a:pPr>
-            <a:r>
-              <a:rPr sz="1100" b="0">
-                <a:solidFill>
-                  <a:srgbClr val="1E2733"/>
-                </a:solidFill>
-                <a:latin typeface="Noto Sans TC"/>
-              </a:rPr>
-              <a:t>• 可主張：稀疏校正在此真實快照設定下能改善 held-out pillow 點</a:t>
-            </a:r>
-          </a:p>
-          <a:p>
-            <a:pPr>
-              <a:lnSpc>
-                <a:spcPct val="114000"/>
-              </a:lnSpc>
-              <a:spcAft>
-                <a:spcPts val="400"/>
-              </a:spcAft>
-              <a:defRPr sz="1100">
-                <a:solidFill>
-                  <a:srgbClr val="1E2733"/>
-                </a:solidFill>
-                <a:latin typeface="Noto Sans TC"/>
-              </a:defRPr>
-            </a:pPr>
-            <a:r>
-              <a:rPr sz="1100" b="0">
-                <a:solidFill>
-                  <a:srgbClr val="1E2733"/>
-                </a:solidFill>
-                <a:latin typeface="Noto Sans TC"/>
-              </a:rPr>
-              <a:t>• 不可主張：已完成全室 dense real-room truth 驗證</a:t>
+              <a:defRPr sz="1200">
+                <a:solidFill>
+                  <a:srgbClr val="1E2733"/>
+                </a:solidFill>
+                <a:latin typeface="Noto Sans TC"/>
+              </a:defRPr>
+            </a:pPr>
+            <a:r>
+              <a:rPr sz="1200" b="0">
+                <a:solidFill>
+                  <a:srgbClr val="1E2733"/>
+                </a:solidFill>
+                <a:latin typeface="Noto Sans TC"/>
+              </a:rPr>
+              <a:t>• 尚未完成：全室 dense real-room truth 驗證</a:t>
             </a:r>
           </a:p>
         </p:txBody>
@@ -13209,7 +13234,7 @@
                 </a:solidFill>
                 <a:latin typeface="Noto Sans TC"/>
               </a:rPr>
-              <a:t>• 這一點是未來工作，也是目前 claim boundary 的重點</a:t>
+              <a:t>• 此項列為未來工作與驗證限制</a:t>
             </a:r>
           </a:p>
         </p:txBody>
@@ -13415,8 +13440,8 @@
         </p:blipFill>
         <p:spPr>
           <a:xfrm>
-            <a:off x="594360" y="1737360"/>
-            <a:ext cx="3657600" cy="3657600"/>
+            <a:off x="594360" y="1751584"/>
+            <a:ext cx="3657600" cy="3629152"/>
           </a:xfrm>
           <a:prstGeom prst="rect">
             <a:avLst/>
@@ -13439,8 +13464,8 @@
         </p:blipFill>
         <p:spPr>
           <a:xfrm>
-            <a:off x="4279392" y="1737360"/>
-            <a:ext cx="3657600" cy="3657600"/>
+            <a:off x="4279392" y="1751584"/>
+            <a:ext cx="3657600" cy="3629152"/>
           </a:xfrm>
           <a:prstGeom prst="rect">
             <a:avLst/>
@@ -13463,8 +13488,8 @@
         </p:blipFill>
         <p:spPr>
           <a:xfrm>
-            <a:off x="7955279" y="1737360"/>
-            <a:ext cx="3657600" cy="3657600"/>
+            <a:off x="7955279" y="1751584"/>
+            <a:ext cx="3657600" cy="3629152"/>
           </a:xfrm>
           <a:prstGeom prst="rect">
             <a:avLst/>
@@ -13901,7 +13926,7 @@
                 </a:solidFill>
                 <a:latin typeface="Noto Sans TC"/>
               </a:rPr>
-              <a:t>• Default MAE: T=0.0023, H=0.0041, L=0.1675</a:t>
+              <a:t>• Default MAE: T=0.0020, H=0.0051, L=0.1370</a:t>
             </a:r>
           </a:p>
           <a:p>
@@ -13926,7 +13951,7 @@
                 </a:solidFill>
                 <a:latin typeface="Noto Sans TC"/>
               </a:rPr>
-              <a:t>• No-Fourier MAE: T=0.0022, H=0.0045, L=0.1675</a:t>
+              <a:t>• No-Fourier MAE: T=0.0021, H=0.0057, L=0.1370</a:t>
             </a:r>
           </a:p>
           <a:p>
@@ -13951,7 +13976,7 @@
                 </a:solidFill>
                 <a:latin typeface="Noto Sans TC"/>
               </a:rPr>
-              <a:t>• LOO avg MAE: T=0.0017, H=0.0055, L=0.1581</a:t>
+              <a:t>• LOO avg MAE: T=0.0017, H=0.0059, L=0.1407</a:t>
             </a:r>
           </a:p>
           <a:p>
@@ -13976,7 +14001,7 @@
                 </a:solidFill>
                 <a:latin typeface="Noto Sans TC"/>
               </a:rPr>
-              <a:t>• LOO reduction: T 96.41%, H 96.88%, L 92.41%</a:t>
+              <a:t>• LOO reduction: T 96.41%, H 96.66%, L 93.06%</a:t>
             </a:r>
           </a:p>
         </p:txBody>
@@ -17730,7 +17755,7 @@
                 </a:solidFill>
                 <a:latin typeface="Noto Sans TC"/>
               </a:rPr>
-              <a:t>公式、符號意義、限制與可主張範圍</a:t>
+              <a:t>公式、符號意義、假設與限制</a:t>
             </a:r>
           </a:p>
         </p:txBody>
@@ -18232,7 +18257,7 @@
                 </a:solidFill>
                 <a:latin typeface="Noto Sans TC"/>
               </a:rPr>
-              <a:t>主張邊界</a:t>
+              <a:t>適用範圍</a:t>
             </a:r>
           </a:p>
         </p:txBody>
@@ -18266,15 +18291,15 @@
               <a:spcAft>
                 <a:spcPts val="400"/>
               </a:spcAft>
-              <a:defRPr sz="1200">
-                <a:solidFill>
-                  <a:srgbClr val="1E2733"/>
-                </a:solidFill>
-                <a:latin typeface="Noto Sans TC"/>
-              </a:defRPr>
-            </a:pPr>
-            <a:r>
-              <a:rPr sz="1200" b="0">
+              <a:defRPr sz="1100">
+                <a:solidFill>
+                  <a:srgbClr val="1E2733"/>
+                </a:solidFill>
+                <a:latin typeface="Noto Sans TC"/>
+              </a:defRPr>
+            </a:pPr>
+            <a:r>
+              <a:rPr sz="1100" b="0">
                 <a:solidFill>
                   <a:srgbClr val="1E2733"/>
                 </a:solidFill>
@@ -18291,15 +18316,15 @@
               <a:spcAft>
                 <a:spcPts val="400"/>
               </a:spcAft>
-              <a:defRPr sz="1200">
-                <a:solidFill>
-                  <a:srgbClr val="1E2733"/>
-                </a:solidFill>
-                <a:latin typeface="Noto Sans TC"/>
-              </a:defRPr>
-            </a:pPr>
-            <a:r>
-              <a:rPr sz="1200" b="0">
+              <a:defRPr sz="1100">
+                <a:solidFill>
+                  <a:srgbClr val="1E2733"/>
+                </a:solidFill>
+                <a:latin typeface="Noto Sans TC"/>
+              </a:defRPr>
+            </a:pPr>
+            <a:r>
+              <a:rPr sz="1100" b="0">
                 <a:solidFill>
                   <a:srgbClr val="1E2733"/>
                 </a:solidFill>
@@ -18316,15 +18341,15 @@
               <a:spcAft>
                 <a:spcPts val="400"/>
               </a:spcAft>
-              <a:defRPr sz="1200">
-                <a:solidFill>
-                  <a:srgbClr val="1E2733"/>
-                </a:solidFill>
-                <a:latin typeface="Noto Sans TC"/>
-              </a:defRPr>
-            </a:pPr>
-            <a:r>
-              <a:rPr sz="1200" b="0">
+              <a:defRPr sz="1100">
+                <a:solidFill>
+                  <a:srgbClr val="1E2733"/>
+                </a:solidFill>
+                <a:latin typeface="Noto Sans TC"/>
+              </a:defRPr>
+            </a:pPr>
+            <a:r>
+              <a:rPr sz="1100" b="0">
                 <a:solidFill>
                   <a:srgbClr val="1E2733"/>
                 </a:solidFill>
@@ -18341,15 +18366,15 @@
               <a:spcAft>
                 <a:spcPts val="400"/>
               </a:spcAft>
-              <a:defRPr sz="1200">
-                <a:solidFill>
-                  <a:srgbClr val="1E2733"/>
-                </a:solidFill>
-                <a:latin typeface="Noto Sans TC"/>
-              </a:defRPr>
-            </a:pPr>
-            <a:r>
-              <a:rPr sz="1200" b="0">
+              <a:defRPr sz="1100">
+                <a:solidFill>
+                  <a:srgbClr val="1E2733"/>
+                </a:solidFill>
+                <a:latin typeface="Noto Sans TC"/>
+              </a:defRPr>
+            </a:pPr>
+            <a:r>
+              <a:rPr sz="1100" b="0">
                 <a:solidFill>
                   <a:srgbClr val="1E2733"/>
                 </a:solidFill>
@@ -18366,21 +18391,46 @@
               <a:spcAft>
                 <a:spcPts val="400"/>
               </a:spcAft>
-              <a:defRPr sz="1200">
-                <a:solidFill>
-                  <a:srgbClr val="1E2733"/>
-                </a:solidFill>
-                <a:latin typeface="Noto Sans TC"/>
-              </a:defRPr>
-            </a:pPr>
-            <a:r>
-              <a:rPr sz="1200" b="0">
-                <a:solidFill>
-                  <a:srgbClr val="1E2733"/>
-                </a:solidFill>
-                <a:latin typeface="Noto Sans TC"/>
-              </a:rPr>
-              <a:t>• 所以報告時要用「估計／推估」，不要說「量測到」</a:t>
+              <a:defRPr sz="1100">
+                <a:solidFill>
+                  <a:srgbClr val="1E2733"/>
+                </a:solidFill>
+                <a:latin typeface="Noto Sans TC"/>
+              </a:defRPr>
+            </a:pPr>
+            <a:r>
+              <a:rPr sz="1100" b="0">
+                <a:solidFill>
+                  <a:srgbClr val="1E2733"/>
+                </a:solidFill>
+                <a:latin typeface="Noto Sans TC"/>
+              </a:rPr>
+              <a:t>• 其他採樣點為模型估計值，非直接量測值</a:t>
+            </a:r>
+          </a:p>
+          <a:p>
+            <a:pPr>
+              <a:lnSpc>
+                <a:spcPct val="114000"/>
+              </a:lnSpc>
+              <a:spcAft>
+                <a:spcPts val="400"/>
+              </a:spcAft>
+              <a:defRPr sz="1100">
+                <a:solidFill>
+                  <a:srgbClr val="1E2733"/>
+                </a:solidFill>
+                <a:latin typeface="Noto Sans TC"/>
+              </a:defRPr>
+            </a:pPr>
+            <a:r>
+              <a:rPr sz="1100" b="0">
+                <a:solidFill>
+                  <a:srgbClr val="1E2733"/>
+                </a:solidFill>
+                <a:latin typeface="Noto Sans TC"/>
+              </a:rPr>
+              <a:t>• 數值例：p=(2,1,1.2), t=10 min → (T,H,L)=(27.4°C,60%,280 lux)</a:t>
             </a:r>
           </a:p>
         </p:txBody>
@@ -18599,7 +18649,7 @@
                 </a:solidFill>
                 <a:latin typeface="Noto Sans TC"/>
               </a:rPr>
-              <a:t>公式、符號意義、限制與可主張範圍</a:t>
+              <a:t>公式、符號意義、假設與限制</a:t>
             </a:r>
           </a:p>
         </p:txBody>
@@ -19224,7 +19274,61 @@
                 </a:solidFill>
                 <a:latin typeface="Noto Sans TC"/>
               </a:rPr>
-              <a:t>• 但 N_T、N_H、N_L 的物理項目分開設計</a:t>
+              <a:t>• 但 N</a:t>
+            </a:r>
+            <a:r>
+              <a:rPr sz="800" baseline="-25000">
+                <a:solidFill>
+                  <a:srgbClr val="1E2733"/>
+                </a:solidFill>
+                <a:latin typeface="Noto Sans TC"/>
+              </a:rPr>
+              <a:t>T</a:t>
+            </a:r>
+            <a:r>
+              <a:rPr sz="1200" b="0">
+                <a:solidFill>
+                  <a:srgbClr val="1E2733"/>
+                </a:solidFill>
+                <a:latin typeface="Noto Sans TC"/>
+              </a:rPr>
+              <a:t>、N</a:t>
+            </a:r>
+            <a:r>
+              <a:rPr sz="800" baseline="-25000">
+                <a:solidFill>
+                  <a:srgbClr val="1E2733"/>
+                </a:solidFill>
+                <a:latin typeface="Noto Sans TC"/>
+              </a:rPr>
+              <a:t>H</a:t>
+            </a:r>
+            <a:r>
+              <a:rPr sz="1200" b="0">
+                <a:solidFill>
+                  <a:srgbClr val="1E2733"/>
+                </a:solidFill>
+                <a:latin typeface="Noto Sans TC"/>
+              </a:rPr>
+              <a:t>、N</a:t>
+            </a:r>
+            <a:r>
+              <a:rPr sz="800" baseline="-25000">
+                <a:solidFill>
+                  <a:srgbClr val="1E2733"/>
+                </a:solidFill>
+                <a:latin typeface="Noto Sans TC"/>
+              </a:rPr>
+              <a:t>L</a:t>
+            </a:r>
+            <a:r>
+              <a:rPr sz="1200" b="0">
+                <a:solidFill>
+                  <a:srgbClr val="1E2733"/>
+                </a:solidFill>
+                <a:latin typeface="Noto Sans TC"/>
+              </a:rPr>
+              <a:t> 的物理項目分開設計</a:t>
             </a:r>
           </a:p>
           <a:p>
@@ -19250,6 +19354,85 @@
                 <a:latin typeface="Noto Sans TC"/>
               </a:rPr>
               <a:t>• 這能回應「不能把同一套 bulk/local 硬套三種物理量」</a:t>
+            </a:r>
+          </a:p>
+          <a:p>
+            <a:pPr>
+              <a:lnSpc>
+                <a:spcPct val="114000"/>
+              </a:lnSpc>
+              <a:spcAft>
+                <a:spcPts val="400"/>
+              </a:spcAft>
+              <a:defRPr sz="1200">
+                <a:solidFill>
+                  <a:srgbClr val="1E2733"/>
+                </a:solidFill>
+                <a:latin typeface="Noto Sans TC"/>
+              </a:defRPr>
+            </a:pPr>
+            <a:r>
+              <a:rPr sz="1200" b="0">
+                <a:solidFill>
+                  <a:srgbClr val="1E2733"/>
+                </a:solidFill>
+                <a:latin typeface="Noto Sans TC"/>
+              </a:rPr>
+              <a:t>• 數值例：N</a:t>
+            </a:r>
+            <a:r>
+              <a:rPr sz="800" baseline="-25000">
+                <a:solidFill>
+                  <a:srgbClr val="1E2733"/>
+                </a:solidFill>
+                <a:latin typeface="Noto Sans TC"/>
+              </a:rPr>
+              <a:t>T</a:t>
+            </a:r>
+            <a:r>
+              <a:rPr sz="1200" b="0">
+                <a:solidFill>
+                  <a:srgbClr val="1E2733"/>
+                </a:solidFill>
+                <a:latin typeface="Noto Sans TC"/>
+              </a:rPr>
+              <a:t>=27.0, C</a:t>
+            </a:r>
+            <a:r>
+              <a:rPr sz="800" baseline="-25000">
+                <a:solidFill>
+                  <a:srgbClr val="1E2733"/>
+                </a:solidFill>
+                <a:latin typeface="Noto Sans TC"/>
+              </a:rPr>
+              <a:t>T</a:t>
+            </a:r>
+            <a:r>
+              <a:rPr sz="1200" b="0">
+                <a:solidFill>
+                  <a:srgbClr val="1E2733"/>
+                </a:solidFill>
+                <a:latin typeface="Noto Sans TC"/>
+              </a:rPr>
+              <a:t>=-0.4 → F̂</a:t>
+            </a:r>
+            <a:r>
+              <a:rPr sz="800" baseline="-25000">
+                <a:solidFill>
+                  <a:srgbClr val="1E2733"/>
+                </a:solidFill>
+                <a:latin typeface="Noto Sans TC"/>
+              </a:rPr>
+              <a:t>T</a:t>
+            </a:r>
+            <a:r>
+              <a:rPr sz="1200" b="0">
+                <a:solidFill>
+                  <a:srgbClr val="1E2733"/>
+                </a:solidFill>
+                <a:latin typeface="Noto Sans TC"/>
+              </a:rPr>
+              <a:t>=26.6°C</a:t>
             </a:r>
           </a:p>
         </p:txBody>
@@ -19468,7 +19651,7 @@
                 </a:solidFill>
                 <a:latin typeface="Noto Sans TC"/>
               </a:rPr>
-              <a:t>公式、符號意義、限制與可主張範圍</a:t>
+              <a:t>公式、符號意義、假設與限制</a:t>
             </a:r>
           </a:p>
         </p:txBody>
@@ -20119,6 +20302,31 @@
                 <a:latin typeface="Noto Sans TC"/>
               </a:rPr>
               <a:t>• 所有設備影響都是在 b₀ 上加減偏移</a:t>
+            </a:r>
+          </a:p>
+          <a:p>
+            <a:pPr>
+              <a:lnSpc>
+                <a:spcPct val="114000"/>
+              </a:lnSpc>
+              <a:spcAft>
+                <a:spcPts val="400"/>
+              </a:spcAft>
+              <a:defRPr sz="1200">
+                <a:solidFill>
+                  <a:srgbClr val="1E2733"/>
+                </a:solidFill>
+                <a:latin typeface="Noto Sans TC"/>
+              </a:defRPr>
+            </a:pPr>
+            <a:r>
+              <a:rPr sz="1200" b="0">
+                <a:solidFill>
+                  <a:srgbClr val="1E2733"/>
+                </a:solidFill>
+                <a:latin typeface="Noto Sans TC"/>
+              </a:rPr>
+              <a:t>• 數值例：b₀=(29°C,67%,90 lux)</a:t>
             </a:r>
           </a:p>
         </p:txBody>
@@ -21647,7 +21855,7 @@
                 </a:solidFill>
                 <a:latin typeface="Noto Sans TC"/>
               </a:rPr>
-              <a:t>公式、符號意義、限制與可主張範圍</a:t>
+              <a:t>公式、符號意義、假設與限制</a:t>
             </a:r>
           </a:p>
         </p:txBody>
@@ -21872,7 +22080,7 @@
                 </a:solidFill>
                 <a:latin typeface="Cambria Math"/>
               </a:rPr>
-              <a:t>T₀ = (1/|S|) ∑ₛ∈S Oₜ(pₛ, t</a:t>
+              <a:t>T₀ = (1/|S|) ∑ₛ∈S O</a:t>
             </a:r>
             <a:r>
               <a:rPr sz="1000" baseline="-25000">
@@ -21881,6 +22089,24 @@
                 </a:solidFill>
                 <a:latin typeface="Cambria Math"/>
               </a:rPr>
+              <a:t>T</a:t>
+            </a:r>
+            <a:r>
+              <a:rPr sz="1400" b="0">
+                <a:solidFill>
+                  <a:srgbClr val="1E2733"/>
+                </a:solidFill>
+                <a:latin typeface="Cambria Math"/>
+              </a:rPr>
+              <a:t>(pₛ, t</a:t>
+            </a:r>
+            <a:r>
+              <a:rPr sz="1000" baseline="-25000">
+                <a:solidFill>
+                  <a:srgbClr val="1E2733"/>
+                </a:solidFill>
+                <a:latin typeface="Cambria Math"/>
+              </a:rPr>
               <a:t>ref</a:t>
             </a:r>
             <a:r>
@@ -21915,7 +22141,7 @@
                 </a:solidFill>
                 <a:latin typeface="Cambria Math"/>
               </a:rPr>
-              <a:t>H₀ = (1/|S|) ∑ₛ∈S Oₕ(pₛ, t</a:t>
+              <a:t>H₀ = (1/|S|) ∑ₛ∈S O</a:t>
             </a:r>
             <a:r>
               <a:rPr sz="1000" baseline="-25000">
@@ -21924,6 +22150,24 @@
                 </a:solidFill>
                 <a:latin typeface="Cambria Math"/>
               </a:rPr>
+              <a:t>H</a:t>
+            </a:r>
+            <a:r>
+              <a:rPr sz="1400" b="0">
+                <a:solidFill>
+                  <a:srgbClr val="1E2733"/>
+                </a:solidFill>
+                <a:latin typeface="Cambria Math"/>
+              </a:rPr>
+              <a:t>(pₛ, t</a:t>
+            </a:r>
+            <a:r>
+              <a:rPr sz="1000" baseline="-25000">
+                <a:solidFill>
+                  <a:srgbClr val="1E2733"/>
+                </a:solidFill>
+                <a:latin typeface="Cambria Math"/>
+              </a:rPr>
               <a:t>ref</a:t>
             </a:r>
             <a:r>
@@ -21958,7 +22202,25 @@
                 </a:solidFill>
                 <a:latin typeface="Cambria Math"/>
               </a:rPr>
-              <a:t>L₀ = (1/|S|) ∑ₛ∈S Oₗ(pₛ, t</a:t>
+              <a:t>L₀ = (1/|S|) ∑ₛ∈S O</a:t>
+            </a:r>
+            <a:r>
+              <a:rPr sz="1000" baseline="-25000">
+                <a:solidFill>
+                  <a:srgbClr val="1E2733"/>
+                </a:solidFill>
+                <a:latin typeface="Cambria Math"/>
+              </a:rPr>
+              <a:t>L</a:t>
+            </a:r>
+            <a:r>
+              <a:rPr sz="1400" b="0">
+                <a:solidFill>
+                  <a:srgbClr val="1E2733"/>
+                </a:solidFill>
+                <a:latin typeface="Cambria Math"/>
+              </a:rPr>
+              <a:t>(pₛ, t</a:t>
             </a:r>
             <a:r>
               <a:rPr sz="1000" baseline="-25000">
@@ -22369,7 +22631,32 @@
                 </a:solidFill>
                 <a:latin typeface="Noto Sans TC"/>
               </a:rPr>
-              <a:t>• 報告時要明確說出資料來源是哪一種</a:t>
+              <a:t>• baseline 資料來源需在情境設定中明確標示</a:t>
+            </a:r>
+          </a:p>
+          <a:p>
+            <a:pPr>
+              <a:lnSpc>
+                <a:spcPct val="114000"/>
+              </a:lnSpc>
+              <a:spcAft>
+                <a:spcPts val="400"/>
+              </a:spcAft>
+              <a:defRPr sz="1200">
+                <a:solidFill>
+                  <a:srgbClr val="1E2733"/>
+                </a:solidFill>
+                <a:latin typeface="Noto Sans TC"/>
+              </a:defRPr>
+            </a:pPr>
+            <a:r>
+              <a:rPr sz="1200" b="0">
+                <a:solidFill>
+                  <a:srgbClr val="1E2733"/>
+                </a:solidFill>
+                <a:latin typeface="Noto Sans TC"/>
+              </a:rPr>
+              <a:t>• 數值例：ΣT=232°C, |S|=8 → T₀=29°C</a:t>
             </a:r>
           </a:p>
         </p:txBody>
@@ -22588,7 +22875,7 @@
                 </a:solidFill>
                 <a:latin typeface="Noto Sans TC"/>
               </a:rPr>
-              <a:t>公式、符號意義、限制與可主張範圍</a:t>
+              <a:t>公式、符號意義、假設與限制</a:t>
             </a:r>
           </a:p>
         </p:txBody>
@@ -23239,6 +23526,31 @@
                 <a:latin typeface="Noto Sans TC"/>
               </a:rPr>
               <a:t>• 所以高度不是三種變數完全相同地使用</a:t>
+            </a:r>
+          </a:p>
+          <a:p>
+            <a:pPr>
+              <a:lnSpc>
+                <a:spcPct val="114000"/>
+              </a:lnSpc>
+              <a:spcAft>
+                <a:spcPts val="400"/>
+              </a:spcAft>
+              <a:defRPr sz="1200">
+                <a:solidFill>
+                  <a:srgbClr val="1E2733"/>
+                </a:solidFill>
+                <a:latin typeface="Noto Sans TC"/>
+              </a:defRPr>
+            </a:pPr>
+            <a:r>
+              <a:rPr sz="1200" b="0">
+                <a:solidFill>
+                  <a:srgbClr val="1E2733"/>
+                </a:solidFill>
+                <a:latin typeface="Noto Sans TC"/>
+              </a:rPr>
+              <a:t>• 數值例：z=1.2 m, Hᵣ=3 m → ζ=-0.1</a:t>
             </a:r>
           </a:p>
         </p:txBody>
@@ -23457,7 +23769,7 @@
                 </a:solidFill>
                 <a:latin typeface="Noto Sans TC"/>
               </a:rPr>
-              <a:t>公式、符號意義、限制與可主張範圍</a:t>
+              <a:t>公式、符號意義、假設與限制</a:t>
             </a:r>
           </a:p>
         </p:txBody>
@@ -24108,6 +24420,31 @@
                 <a:latin typeface="Noto Sans TC"/>
               </a:rPr>
               <a:t>• 目標是表達主要時間趨勢</a:t>
+            </a:r>
+          </a:p>
+          <a:p>
+            <a:pPr>
+              <a:lnSpc>
+                <a:spcPct val="114000"/>
+              </a:lnSpc>
+              <a:spcAft>
+                <a:spcPts val="400"/>
+              </a:spcAft>
+              <a:defRPr sz="1200">
+                <a:solidFill>
+                  <a:srgbClr val="1E2733"/>
+                </a:solidFill>
+                <a:latin typeface="Noto Sans TC"/>
+              </a:defRPr>
+            </a:pPr>
+            <a:r>
+              <a:rPr sz="1200" b="0">
+                <a:solidFill>
+                  <a:srgbClr val="1E2733"/>
+                </a:solidFill>
+                <a:latin typeface="Noto Sans TC"/>
+              </a:rPr>
+              <a:t>• 數值例：a=1, t=10, τ=10 → A=1-e^-1=0.632</a:t>
             </a:r>
           </a:p>
         </p:txBody>
@@ -24326,7 +24663,7 @@
                 </a:solidFill>
                 <a:latin typeface="Noto Sans TC"/>
               </a:rPr>
-              <a:t>公式、符號意義、限制與可主張範圍</a:t>
+              <a:t>公式、符號意義、假設與限制</a:t>
             </a:r>
           </a:p>
         </p:txBody>
@@ -24977,6 +25314,31 @@
                 <a:latin typeface="Noto Sans TC"/>
               </a:rPr>
               <a:t>• 但全室平均項仍由各變數自己的 B 項處理</a:t>
+            </a:r>
+          </a:p>
+          <a:p>
+            <a:pPr>
+              <a:lnSpc>
+                <a:spcPct val="114000"/>
+              </a:lnSpc>
+              <a:spcAft>
+                <a:spcPts val="400"/>
+              </a:spcAft>
+              <a:defRPr sz="1200">
+                <a:solidFill>
+                  <a:srgbClr val="1E2733"/>
+                </a:solidFill>
+                <a:latin typeface="Noto Sans TC"/>
+              </a:defRPr>
+            </a:pPr>
+            <a:r>
+              <a:rPr sz="1200" b="0">
+                <a:solidFill>
+                  <a:srgbClr val="1E2733"/>
+                </a:solidFill>
+                <a:latin typeface="Noto Sans TC"/>
+              </a:rPr>
+              <a:t>• 數值例：A=0.8,R=0.5,D=0.9,V=1 → E=0.36</a:t>
             </a:r>
           </a:p>
         </p:txBody>
@@ -25195,7 +25557,7 @@
                 </a:solidFill>
                 <a:latin typeface="Noto Sans TC"/>
               </a:rPr>
-              <a:t>公式、符號意義、限制與可主張範圍</a:t>
+              <a:t>公式、符號意義、假設與限制</a:t>
             </a:r>
           </a:p>
         </p:txBody>
@@ -25420,7 +25782,79 @@
                 </a:solidFill>
                 <a:latin typeface="Cambria Math"/>
               </a:rPr>
-              <a:t>N_T(p,t) = T₀ + B_T(t) + S_T(p,t) + γ_T M(t) ζ</a:t>
+              <a:t>N</a:t>
+            </a:r>
+            <a:r>
+              <a:rPr sz="1000" baseline="-25000">
+                <a:solidFill>
+                  <a:srgbClr val="1E2733"/>
+                </a:solidFill>
+                <a:latin typeface="Cambria Math"/>
+              </a:rPr>
+              <a:t>T</a:t>
+            </a:r>
+            <a:r>
+              <a:rPr sz="1400" b="0">
+                <a:solidFill>
+                  <a:srgbClr val="1E2733"/>
+                </a:solidFill>
+                <a:latin typeface="Cambria Math"/>
+              </a:rPr>
+              <a:t>(p,t) = T₀ + B</a:t>
+            </a:r>
+            <a:r>
+              <a:rPr sz="1000" baseline="-25000">
+                <a:solidFill>
+                  <a:srgbClr val="1E2733"/>
+                </a:solidFill>
+                <a:latin typeface="Cambria Math"/>
+              </a:rPr>
+              <a:t>T</a:t>
+            </a:r>
+            <a:r>
+              <a:rPr sz="1400" b="0">
+                <a:solidFill>
+                  <a:srgbClr val="1E2733"/>
+                </a:solidFill>
+                <a:latin typeface="Cambria Math"/>
+              </a:rPr>
+              <a:t>(t) + S</a:t>
+            </a:r>
+            <a:r>
+              <a:rPr sz="1000" baseline="-25000">
+                <a:solidFill>
+                  <a:srgbClr val="1E2733"/>
+                </a:solidFill>
+                <a:latin typeface="Cambria Math"/>
+              </a:rPr>
+              <a:t>T</a:t>
+            </a:r>
+            <a:r>
+              <a:rPr sz="1400" b="0">
+                <a:solidFill>
+                  <a:srgbClr val="1E2733"/>
+                </a:solidFill>
+                <a:latin typeface="Cambria Math"/>
+              </a:rPr>
+              <a:t>(p,t) + γ</a:t>
+            </a:r>
+            <a:r>
+              <a:rPr sz="1000" baseline="-25000">
+                <a:solidFill>
+                  <a:srgbClr val="1E2733"/>
+                </a:solidFill>
+                <a:latin typeface="Cambria Math"/>
+              </a:rPr>
+              <a:t>T</a:t>
+            </a:r>
+            <a:r>
+              <a:rPr sz="1400" b="0">
+                <a:solidFill>
+                  <a:srgbClr val="1E2733"/>
+                </a:solidFill>
+                <a:latin typeface="Cambria Math"/>
+              </a:rPr>
+              <a:t> M(t) ζ</a:t>
             </a:r>
           </a:p>
           <a:p>
@@ -25470,7 +25904,25 @@
                 </a:solidFill>
                 <a:latin typeface="Cambria Math"/>
               </a:rPr>
-              <a:t>B_T(t)：全室平均熱響應</a:t>
+              <a:t>B</a:t>
+            </a:r>
+            <a:r>
+              <a:rPr sz="1000" baseline="-25000">
+                <a:solidFill>
+                  <a:srgbClr val="1E2733"/>
+                </a:solidFill>
+                <a:latin typeface="Cambria Math"/>
+              </a:rPr>
+              <a:t>T</a:t>
+            </a:r>
+            <a:r>
+              <a:rPr sz="1400" b="0">
+                <a:solidFill>
+                  <a:srgbClr val="1E2733"/>
+                </a:solidFill>
+                <a:latin typeface="Cambria Math"/>
+              </a:rPr>
+              <a:t>(t)：全室平均熱響應</a:t>
             </a:r>
           </a:p>
           <a:p>
@@ -25495,7 +25947,25 @@
                 </a:solidFill>
                 <a:latin typeface="Cambria Math"/>
               </a:rPr>
-              <a:t>S_T(p,t)：局部空間熱響應</a:t>
+              <a:t>S</a:t>
+            </a:r>
+            <a:r>
+              <a:rPr sz="1000" baseline="-25000">
+                <a:solidFill>
+                  <a:srgbClr val="1E2733"/>
+                </a:solidFill>
+                <a:latin typeface="Cambria Math"/>
+              </a:rPr>
+              <a:t>T</a:t>
+            </a:r>
+            <a:r>
+              <a:rPr sz="1400" b="0">
+                <a:solidFill>
+                  <a:srgbClr val="1E2733"/>
+                </a:solidFill>
+                <a:latin typeface="Cambria Math"/>
+              </a:rPr>
+              <a:t>(p,t)：局部空間熱響應</a:t>
             </a:r>
           </a:p>
           <a:p>
@@ -25520,7 +25990,25 @@
                 </a:solidFill>
                 <a:latin typeface="Noto Sans TC"/>
               </a:rPr>
-              <a:t>• γ_T M(t)ζ：垂直溫度分層</a:t>
+              <a:t>• γ</a:t>
+            </a:r>
+            <a:r>
+              <a:rPr sz="800" baseline="-25000">
+                <a:solidFill>
+                  <a:srgbClr val="1E2733"/>
+                </a:solidFill>
+                <a:latin typeface="Noto Sans TC"/>
+              </a:rPr>
+              <a:t>T</a:t>
+            </a:r>
+            <a:r>
+              <a:rPr sz="1200" b="0">
+                <a:solidFill>
+                  <a:srgbClr val="1E2733"/>
+                </a:solidFill>
+                <a:latin typeface="Noto Sans TC"/>
+              </a:rPr>
+              <a:t> M(t)ζ：垂直溫度分層</a:t>
             </a:r>
           </a:p>
         </p:txBody>
@@ -25795,7 +26283,25 @@
                 </a:solidFill>
                 <a:latin typeface="Noto Sans TC"/>
               </a:rPr>
-              <a:t>• 所以保留 B_T 表示整體室溫移動</a:t>
+              <a:t>• 所以保留 B</a:t>
+            </a:r>
+            <a:r>
+              <a:rPr sz="800" baseline="-25000">
+                <a:solidFill>
+                  <a:srgbClr val="1E2733"/>
+                </a:solidFill>
+                <a:latin typeface="Noto Sans TC"/>
+              </a:rPr>
+              <a:t>T</a:t>
+            </a:r>
+            <a:r>
+              <a:rPr sz="1200" b="0">
+                <a:solidFill>
+                  <a:srgbClr val="1E2733"/>
+                </a:solidFill>
+                <a:latin typeface="Noto Sans TC"/>
+              </a:rPr>
+              <a:t> 表示整體室溫移動</a:t>
             </a:r>
           </a:p>
           <a:p>
@@ -25820,7 +26326,25 @@
                 </a:solidFill>
                 <a:latin typeface="Cambria Math"/>
               </a:rPr>
-              <a:t>S_T 再表達出風口、窗邊或燈具附近差異</a:t>
+              <a:t>S</a:t>
+            </a:r>
+            <a:r>
+              <a:rPr sz="1000" baseline="-25000">
+                <a:solidFill>
+                  <a:srgbClr val="1E2733"/>
+                </a:solidFill>
+                <a:latin typeface="Cambria Math"/>
+              </a:rPr>
+              <a:t>T</a:t>
+            </a:r>
+            <a:r>
+              <a:rPr sz="1400" b="0">
+                <a:solidFill>
+                  <a:srgbClr val="1E2733"/>
+                </a:solidFill>
+                <a:latin typeface="Cambria Math"/>
+              </a:rPr>
+              <a:t> 再表達出風口、窗邊或燈具附近差異</a:t>
             </a:r>
           </a:p>
           <a:p>
@@ -25846,6 +26370,31 @@
                 <a:latin typeface="Noto Sans TC"/>
               </a:rPr>
               <a:t>• 這是控制導向 reduced-order 熱場近似</a:t>
+            </a:r>
+          </a:p>
+          <a:p>
+            <a:pPr>
+              <a:lnSpc>
+                <a:spcPct val="114000"/>
+              </a:lnSpc>
+              <a:spcAft>
+                <a:spcPts val="400"/>
+              </a:spcAft>
+              <a:defRPr sz="1200">
+                <a:solidFill>
+                  <a:srgbClr val="1E2733"/>
+                </a:solidFill>
+                <a:latin typeface="Noto Sans TC"/>
+              </a:defRPr>
+            </a:pPr>
+            <a:r>
+              <a:rPr sz="1200" b="0">
+                <a:solidFill>
+                  <a:srgbClr val="1E2733"/>
+                </a:solidFill>
+                <a:latin typeface="Noto Sans TC"/>
+              </a:rPr>
+              <a:t>• 數值例：29-1.2-0.5+0.2(-0.1)=27.28°C</a:t>
             </a:r>
           </a:p>
         </p:txBody>
@@ -26064,7 +26613,7 @@
                 </a:solidFill>
                 <a:latin typeface="Noto Sans TC"/>
               </a:rPr>
-              <a:t>公式、符號意義、限制與可主張範圍</a:t>
+              <a:t>公式、符號意義、假設與限制</a:t>
             </a:r>
           </a:p>
         </p:txBody>
@@ -26289,7 +26838,79 @@
                 </a:solidFill>
                 <a:latin typeface="Cambria Math"/>
               </a:rPr>
-              <a:t>B_T(t) = B_ac,T(t) + B_win,T(t) + B_light,T(t)</a:t>
+              <a:t>B</a:t>
+            </a:r>
+            <a:r>
+              <a:rPr sz="1000" baseline="-25000">
+                <a:solidFill>
+                  <a:srgbClr val="1E2733"/>
+                </a:solidFill>
+                <a:latin typeface="Cambria Math"/>
+              </a:rPr>
+              <a:t>T</a:t>
+            </a:r>
+            <a:r>
+              <a:rPr sz="1400" b="0">
+                <a:solidFill>
+                  <a:srgbClr val="1E2733"/>
+                </a:solidFill>
+                <a:latin typeface="Cambria Math"/>
+              </a:rPr>
+              <a:t>(t) = B</a:t>
+            </a:r>
+            <a:r>
+              <a:rPr sz="1000" baseline="-25000">
+                <a:solidFill>
+                  <a:srgbClr val="1E2733"/>
+                </a:solidFill>
+                <a:latin typeface="Cambria Math"/>
+              </a:rPr>
+              <a:t>ac,T</a:t>
+            </a:r>
+            <a:r>
+              <a:rPr sz="1400" b="0">
+                <a:solidFill>
+                  <a:srgbClr val="1E2733"/>
+                </a:solidFill>
+                <a:latin typeface="Cambria Math"/>
+              </a:rPr>
+              <a:t>(t) + B</a:t>
+            </a:r>
+            <a:r>
+              <a:rPr sz="1000" baseline="-25000">
+                <a:solidFill>
+                  <a:srgbClr val="1E2733"/>
+                </a:solidFill>
+                <a:latin typeface="Cambria Math"/>
+              </a:rPr>
+              <a:t>win,T</a:t>
+            </a:r>
+            <a:r>
+              <a:rPr sz="1400" b="0">
+                <a:solidFill>
+                  <a:srgbClr val="1E2733"/>
+                </a:solidFill>
+                <a:latin typeface="Cambria Math"/>
+              </a:rPr>
+              <a:t>(t) + B</a:t>
+            </a:r>
+            <a:r>
+              <a:rPr sz="1000" baseline="-25000">
+                <a:solidFill>
+                  <a:srgbClr val="1E2733"/>
+                </a:solidFill>
+                <a:latin typeface="Cambria Math"/>
+              </a:rPr>
+              <a:t>light,T</a:t>
+            </a:r>
+            <a:r>
+              <a:rPr sz="1400" b="0">
+                <a:solidFill>
+                  <a:srgbClr val="1E2733"/>
+                </a:solidFill>
+                <a:latin typeface="Cambria Math"/>
+              </a:rPr>
+              <a:t>(t)</a:t>
             </a:r>
           </a:p>
           <a:p>
@@ -26314,7 +26935,79 @@
                 </a:solidFill>
                 <a:latin typeface="Cambria Math"/>
               </a:rPr>
-              <a:t>S_T(p,t) = S_ac,T(p,t) + S_win,T(p,t) + S_light,T(p,t)</a:t>
+              <a:t>S</a:t>
+            </a:r>
+            <a:r>
+              <a:rPr sz="1000" baseline="-25000">
+                <a:solidFill>
+                  <a:srgbClr val="1E2733"/>
+                </a:solidFill>
+                <a:latin typeface="Cambria Math"/>
+              </a:rPr>
+              <a:t>T</a:t>
+            </a:r>
+            <a:r>
+              <a:rPr sz="1400" b="0">
+                <a:solidFill>
+                  <a:srgbClr val="1E2733"/>
+                </a:solidFill>
+                <a:latin typeface="Cambria Math"/>
+              </a:rPr>
+              <a:t>(p,t) = S</a:t>
+            </a:r>
+            <a:r>
+              <a:rPr sz="1000" baseline="-25000">
+                <a:solidFill>
+                  <a:srgbClr val="1E2733"/>
+                </a:solidFill>
+                <a:latin typeface="Cambria Math"/>
+              </a:rPr>
+              <a:t>ac,T</a:t>
+            </a:r>
+            <a:r>
+              <a:rPr sz="1400" b="0">
+                <a:solidFill>
+                  <a:srgbClr val="1E2733"/>
+                </a:solidFill>
+                <a:latin typeface="Cambria Math"/>
+              </a:rPr>
+              <a:t>(p,t) + S</a:t>
+            </a:r>
+            <a:r>
+              <a:rPr sz="1000" baseline="-25000">
+                <a:solidFill>
+                  <a:srgbClr val="1E2733"/>
+                </a:solidFill>
+                <a:latin typeface="Cambria Math"/>
+              </a:rPr>
+              <a:t>win,T</a:t>
+            </a:r>
+            <a:r>
+              <a:rPr sz="1400" b="0">
+                <a:solidFill>
+                  <a:srgbClr val="1E2733"/>
+                </a:solidFill>
+                <a:latin typeface="Cambria Math"/>
+              </a:rPr>
+              <a:t>(p,t) + S</a:t>
+            </a:r>
+            <a:r>
+              <a:rPr sz="1000" baseline="-25000">
+                <a:solidFill>
+                  <a:srgbClr val="1E2733"/>
+                </a:solidFill>
+                <a:latin typeface="Cambria Math"/>
+              </a:rPr>
+              <a:t>light,T</a:t>
+            </a:r>
+            <a:r>
+              <a:rPr sz="1400" b="0">
+                <a:solidFill>
+                  <a:srgbClr val="1E2733"/>
+                </a:solidFill>
+                <a:latin typeface="Cambria Math"/>
+              </a:rPr>
+              <a:t>(p,t)</a:t>
             </a:r>
           </a:p>
           <a:p>
@@ -26339,7 +27032,25 @@
                 </a:solidFill>
                 <a:latin typeface="Cambria Math"/>
               </a:rPr>
-              <a:t>B_T 負責全室平均狀態改變</a:t>
+              <a:t>B</a:t>
+            </a:r>
+            <a:r>
+              <a:rPr sz="1000" baseline="-25000">
+                <a:solidFill>
+                  <a:srgbClr val="1E2733"/>
+                </a:solidFill>
+                <a:latin typeface="Cambria Math"/>
+              </a:rPr>
+              <a:t>T</a:t>
+            </a:r>
+            <a:r>
+              <a:rPr sz="1400" b="0">
+                <a:solidFill>
+                  <a:srgbClr val="1E2733"/>
+                </a:solidFill>
+                <a:latin typeface="Cambria Math"/>
+              </a:rPr>
+              <a:t> 負責全室平均狀態改變</a:t>
             </a:r>
           </a:p>
           <a:p>
@@ -26364,7 +27075,25 @@
                 </a:solidFill>
                 <a:latin typeface="Cambria Math"/>
               </a:rPr>
-              <a:t>S_T 負責某些位置比較強的局部差異</a:t>
+              <a:t>S</a:t>
+            </a:r>
+            <a:r>
+              <a:rPr sz="1000" baseline="-25000">
+                <a:solidFill>
+                  <a:srgbClr val="1E2733"/>
+                </a:solidFill>
+                <a:latin typeface="Cambria Math"/>
+              </a:rPr>
+              <a:t>T</a:t>
+            </a:r>
+            <a:r>
+              <a:rPr sz="1400" b="0">
+                <a:solidFill>
+                  <a:srgbClr val="1E2733"/>
+                </a:solidFill>
+                <a:latin typeface="Cambria Math"/>
+              </a:rPr>
+              <a:t> 負責某些位置比較強的局部差異</a:t>
             </a:r>
           </a:p>
           <a:p>
@@ -26639,7 +27368,25 @@
                 </a:solidFill>
                 <a:latin typeface="Noto Sans TC"/>
               </a:rPr>
-              <a:t>• 窗戶：依 T_out - T₀ 表示外氣熱交換方向</a:t>
+              <a:t>• 窗戶：依 T</a:t>
+            </a:r>
+            <a:r>
+              <a:rPr sz="800" baseline="-25000">
+                <a:solidFill>
+                  <a:srgbClr val="1E2733"/>
+                </a:solidFill>
+                <a:latin typeface="Noto Sans TC"/>
+              </a:rPr>
+              <a:t>out</a:t>
+            </a:r>
+            <a:r>
+              <a:rPr sz="1200" b="0">
+                <a:solidFill>
+                  <a:srgbClr val="1E2733"/>
+                </a:solidFill>
+                <a:latin typeface="Noto Sans TC"/>
+              </a:rPr>
+              <a:t> - T₀ 表示外氣熱交換方向</a:t>
             </a:r>
           </a:p>
           <a:p>
@@ -26689,7 +27436,7 @@
                 </a:solidFill>
                 <a:latin typeface="Noto Sans TC"/>
               </a:rPr>
-              <a:t>• 注意：燈具在溫度是熱源，在照度才是光源</a:t>
+              <a:t>• 燈具在溫度模型中代表發熱</a:t>
             </a:r>
           </a:p>
           <a:p>
@@ -26715,6 +27462,49 @@
                 <a:latin typeface="Noto Sans TC"/>
               </a:rPr>
               <a:t>• 這就是變數專屬公式的意義</a:t>
+            </a:r>
+          </a:p>
+          <a:p>
+            <a:pPr>
+              <a:lnSpc>
+                <a:spcPct val="114000"/>
+              </a:lnSpc>
+              <a:spcAft>
+                <a:spcPts val="400"/>
+              </a:spcAft>
+              <a:defRPr sz="1200">
+                <a:solidFill>
+                  <a:srgbClr val="1E2733"/>
+                </a:solidFill>
+                <a:latin typeface="Noto Sans TC"/>
+              </a:defRPr>
+            </a:pPr>
+            <a:r>
+              <a:rPr sz="1200" b="0">
+                <a:solidFill>
+                  <a:srgbClr val="1E2733"/>
+                </a:solidFill>
+                <a:latin typeface="Noto Sans TC"/>
+              </a:rPr>
+              <a:t>• 數值例：B</a:t>
+            </a:r>
+            <a:r>
+              <a:rPr sz="800" baseline="-25000">
+                <a:solidFill>
+                  <a:srgbClr val="1E2733"/>
+                </a:solidFill>
+                <a:latin typeface="Noto Sans TC"/>
+              </a:rPr>
+              <a:t>T</a:t>
+            </a:r>
+            <a:r>
+              <a:rPr sz="1200" b="0">
+                <a:solidFill>
+                  <a:srgbClr val="1E2733"/>
+                </a:solidFill>
+                <a:latin typeface="Noto Sans TC"/>
+              </a:rPr>
+              <a:t>=-1.0+0.2+0.1=-0.7°C</a:t>
             </a:r>
           </a:p>
         </p:txBody>
@@ -26933,7 +27723,7 @@
                 </a:solidFill>
                 <a:latin typeface="Noto Sans TC"/>
               </a:rPr>
-              <a:t>公式、符號意義、限制與可主張範圍</a:t>
+              <a:t>公式、符號意義、假設與限制</a:t>
             </a:r>
           </a:p>
         </p:txBody>
@@ -27158,7 +27948,115 @@
                 </a:solidFill>
                 <a:latin typeface="Cambria Math"/>
               </a:rPr>
-              <a:t>B_ac,T(t) = s_m k_ac,Tᵍ d_T P_ac A_ac(t)</a:t>
+              <a:t>B</a:t>
+            </a:r>
+            <a:r>
+              <a:rPr sz="1000" baseline="-25000">
+                <a:solidFill>
+                  <a:srgbClr val="1E2733"/>
+                </a:solidFill>
+                <a:latin typeface="Cambria Math"/>
+              </a:rPr>
+              <a:t>ac,T</a:t>
+            </a:r>
+            <a:r>
+              <a:rPr sz="1400" b="0">
+                <a:solidFill>
+                  <a:srgbClr val="1E2733"/>
+                </a:solidFill>
+                <a:latin typeface="Cambria Math"/>
+              </a:rPr>
+              <a:t>(t) = s</a:t>
+            </a:r>
+            <a:r>
+              <a:rPr sz="1000" baseline="-25000">
+                <a:solidFill>
+                  <a:srgbClr val="1E2733"/>
+                </a:solidFill>
+                <a:latin typeface="Cambria Math"/>
+              </a:rPr>
+              <a:t>m</a:t>
+            </a:r>
+            <a:r>
+              <a:rPr sz="1400" b="0">
+                <a:solidFill>
+                  <a:srgbClr val="1E2733"/>
+                </a:solidFill>
+                <a:latin typeface="Cambria Math"/>
+              </a:rPr>
+              <a:t> k</a:t>
+            </a:r>
+            <a:r>
+              <a:rPr sz="1000" baseline="-25000">
+                <a:solidFill>
+                  <a:srgbClr val="1E2733"/>
+                </a:solidFill>
+                <a:latin typeface="Cambria Math"/>
+              </a:rPr>
+              <a:t>ac,T</a:t>
+            </a:r>
+            <a:r>
+              <a:rPr sz="1400" b="0">
+                <a:solidFill>
+                  <a:srgbClr val="1E2733"/>
+                </a:solidFill>
+                <a:latin typeface="Cambria Math"/>
+              </a:rPr>
+              <a:t>ᵍ d</a:t>
+            </a:r>
+            <a:r>
+              <a:rPr sz="1000" baseline="-25000">
+                <a:solidFill>
+                  <a:srgbClr val="1E2733"/>
+                </a:solidFill>
+                <a:latin typeface="Cambria Math"/>
+              </a:rPr>
+              <a:t>T</a:t>
+            </a:r>
+            <a:r>
+              <a:rPr sz="1400" b="0">
+                <a:solidFill>
+                  <a:srgbClr val="1E2733"/>
+                </a:solidFill>
+                <a:latin typeface="Cambria Math"/>
+              </a:rPr>
+              <a:t> P</a:t>
+            </a:r>
+            <a:r>
+              <a:rPr sz="1000" baseline="-25000">
+                <a:solidFill>
+                  <a:srgbClr val="1E2733"/>
+                </a:solidFill>
+                <a:latin typeface="Cambria Math"/>
+              </a:rPr>
+              <a:t>ac</a:t>
+            </a:r>
+            <a:r>
+              <a:rPr sz="1400" b="0">
+                <a:solidFill>
+                  <a:srgbClr val="1E2733"/>
+                </a:solidFill>
+                <a:latin typeface="Cambria Math"/>
+              </a:rPr>
+              <a:t> A</a:t>
+            </a:r>
+            <a:r>
+              <a:rPr sz="1000" baseline="-25000">
+                <a:solidFill>
+                  <a:srgbClr val="1E2733"/>
+                </a:solidFill>
+                <a:latin typeface="Cambria Math"/>
+              </a:rPr>
+              <a:t>ac</a:t>
+            </a:r>
+            <a:r>
+              <a:rPr sz="1400" b="0">
+                <a:solidFill>
+                  <a:srgbClr val="1E2733"/>
+                </a:solidFill>
+                <a:latin typeface="Cambria Math"/>
+              </a:rPr>
+              <a:t>(t)</a:t>
             </a:r>
           </a:p>
           <a:p>
@@ -27183,7 +28081,25 @@
                 </a:solidFill>
                 <a:latin typeface="Noto Sans TC"/>
               </a:rPr>
-              <a:t>• s_m：冷房或暖房模式符號</a:t>
+              <a:t>• s</a:t>
+            </a:r>
+            <a:r>
+              <a:rPr sz="800" baseline="-25000">
+                <a:solidFill>
+                  <a:srgbClr val="1E2733"/>
+                </a:solidFill>
+                <a:latin typeface="Noto Sans TC"/>
+              </a:rPr>
+              <a:t>m</a:t>
+            </a:r>
+            <a:r>
+              <a:rPr sz="1200" b="0">
+                <a:solidFill>
+                  <a:srgbClr val="1E2733"/>
+                </a:solidFill>
+                <a:latin typeface="Noto Sans TC"/>
+              </a:rPr>
+              <a:t>：冷房或暖房模式符號</a:t>
             </a:r>
           </a:p>
           <a:p>
@@ -27208,7 +28124,25 @@
                 </a:solidFill>
                 <a:latin typeface="Noto Sans TC"/>
               </a:rPr>
-              <a:t>• k_ac,Tᵍ：冷氣對全室溫度的增益係數</a:t>
+              <a:t>• k</a:t>
+            </a:r>
+            <a:r>
+              <a:rPr sz="800" baseline="-25000">
+                <a:solidFill>
+                  <a:srgbClr val="1E2733"/>
+                </a:solidFill>
+                <a:latin typeface="Noto Sans TC"/>
+              </a:rPr>
+              <a:t>ac,T</a:t>
+            </a:r>
+            <a:r>
+              <a:rPr sz="1200" b="0">
+                <a:solidFill>
+                  <a:srgbClr val="1E2733"/>
+                </a:solidFill>
+                <a:latin typeface="Noto Sans TC"/>
+              </a:rPr>
+              <a:t>ᵍ：冷氣對全室溫度的增益係數</a:t>
             </a:r>
           </a:p>
           <a:p>
@@ -27233,7 +28167,25 @@
                 </a:solidFill>
                 <a:latin typeface="Noto Sans TC"/>
               </a:rPr>
-              <a:t>• d_T：設定溫度與室內基準的需求差</a:t>
+              <a:t>• d</a:t>
+            </a:r>
+            <a:r>
+              <a:rPr sz="800" baseline="-25000">
+                <a:solidFill>
+                  <a:srgbClr val="1E2733"/>
+                </a:solidFill>
+                <a:latin typeface="Noto Sans TC"/>
+              </a:rPr>
+              <a:t>T</a:t>
+            </a:r>
+            <a:r>
+              <a:rPr sz="1200" b="0">
+                <a:solidFill>
+                  <a:srgbClr val="1E2733"/>
+                </a:solidFill>
+                <a:latin typeface="Noto Sans TC"/>
+              </a:rPr>
+              <a:t>：設定溫度與室內基準的需求差</a:t>
             </a:r>
           </a:p>
           <a:p>
@@ -27258,7 +28210,25 @@
                 </a:solidFill>
                 <a:latin typeface="Noto Sans TC"/>
               </a:rPr>
-              <a:t>• P_ac：校正後冷氣 power scale</a:t>
+              <a:t>• P</a:t>
+            </a:r>
+            <a:r>
+              <a:rPr sz="800" baseline="-25000">
+                <a:solidFill>
+                  <a:srgbClr val="1E2733"/>
+                </a:solidFill>
+                <a:latin typeface="Noto Sans TC"/>
+              </a:rPr>
+              <a:t>ac</a:t>
+            </a:r>
+            <a:r>
+              <a:rPr sz="1200" b="0">
+                <a:solidFill>
+                  <a:srgbClr val="1E2733"/>
+                </a:solidFill>
+                <a:latin typeface="Noto Sans TC"/>
+              </a:rPr>
+              <a:t>：校正後冷氣 power scale</a:t>
             </a:r>
           </a:p>
         </p:txBody>
@@ -27483,7 +28453,115 @@
                 </a:solidFill>
                 <a:latin typeface="Cambria Math"/>
               </a:rPr>
-              <a:t>S_ac,T(p,t) = s_m k_ac,Tˢ d_T P_ac E_ac(p,t)</a:t>
+              <a:t>S</a:t>
+            </a:r>
+            <a:r>
+              <a:rPr sz="1000" baseline="-25000">
+                <a:solidFill>
+                  <a:srgbClr val="1E2733"/>
+                </a:solidFill>
+                <a:latin typeface="Cambria Math"/>
+              </a:rPr>
+              <a:t>ac,T</a:t>
+            </a:r>
+            <a:r>
+              <a:rPr sz="1400" b="0">
+                <a:solidFill>
+                  <a:srgbClr val="1E2733"/>
+                </a:solidFill>
+                <a:latin typeface="Cambria Math"/>
+              </a:rPr>
+              <a:t>(p,t) = s</a:t>
+            </a:r>
+            <a:r>
+              <a:rPr sz="1000" baseline="-25000">
+                <a:solidFill>
+                  <a:srgbClr val="1E2733"/>
+                </a:solidFill>
+                <a:latin typeface="Cambria Math"/>
+              </a:rPr>
+              <a:t>m</a:t>
+            </a:r>
+            <a:r>
+              <a:rPr sz="1400" b="0">
+                <a:solidFill>
+                  <a:srgbClr val="1E2733"/>
+                </a:solidFill>
+                <a:latin typeface="Cambria Math"/>
+              </a:rPr>
+              <a:t> k</a:t>
+            </a:r>
+            <a:r>
+              <a:rPr sz="1000" baseline="-25000">
+                <a:solidFill>
+                  <a:srgbClr val="1E2733"/>
+                </a:solidFill>
+                <a:latin typeface="Cambria Math"/>
+              </a:rPr>
+              <a:t>ac,T</a:t>
+            </a:r>
+            <a:r>
+              <a:rPr sz="1400" b="0">
+                <a:solidFill>
+                  <a:srgbClr val="1E2733"/>
+                </a:solidFill>
+                <a:latin typeface="Cambria Math"/>
+              </a:rPr>
+              <a:t>ˢ d</a:t>
+            </a:r>
+            <a:r>
+              <a:rPr sz="1000" baseline="-25000">
+                <a:solidFill>
+                  <a:srgbClr val="1E2733"/>
+                </a:solidFill>
+                <a:latin typeface="Cambria Math"/>
+              </a:rPr>
+              <a:t>T</a:t>
+            </a:r>
+            <a:r>
+              <a:rPr sz="1400" b="0">
+                <a:solidFill>
+                  <a:srgbClr val="1E2733"/>
+                </a:solidFill>
+                <a:latin typeface="Cambria Math"/>
+              </a:rPr>
+              <a:t> P</a:t>
+            </a:r>
+            <a:r>
+              <a:rPr sz="1000" baseline="-25000">
+                <a:solidFill>
+                  <a:srgbClr val="1E2733"/>
+                </a:solidFill>
+                <a:latin typeface="Cambria Math"/>
+              </a:rPr>
+              <a:t>ac</a:t>
+            </a:r>
+            <a:r>
+              <a:rPr sz="1400" b="0">
+                <a:solidFill>
+                  <a:srgbClr val="1E2733"/>
+                </a:solidFill>
+                <a:latin typeface="Cambria Math"/>
+              </a:rPr>
+              <a:t> E</a:t>
+            </a:r>
+            <a:r>
+              <a:rPr sz="1000" baseline="-25000">
+                <a:solidFill>
+                  <a:srgbClr val="1E2733"/>
+                </a:solidFill>
+                <a:latin typeface="Cambria Math"/>
+              </a:rPr>
+              <a:t>ac</a:t>
+            </a:r>
+            <a:r>
+              <a:rPr sz="1400" b="0">
+                <a:solidFill>
+                  <a:srgbClr val="1E2733"/>
+                </a:solidFill>
+                <a:latin typeface="Cambria Math"/>
+              </a:rPr>
+              <a:t>(p,t)</a:t>
             </a:r>
           </a:p>
           <a:p>
@@ -27508,7 +28586,25 @@
                 </a:solidFill>
                 <a:latin typeface="Noto Sans TC"/>
               </a:rPr>
-              <a:t>• k_ac,Tˢ：冷氣局部空間增益</a:t>
+              <a:t>• k</a:t>
+            </a:r>
+            <a:r>
+              <a:rPr sz="800" baseline="-25000">
+                <a:solidFill>
+                  <a:srgbClr val="1E2733"/>
+                </a:solidFill>
+                <a:latin typeface="Noto Sans TC"/>
+              </a:rPr>
+              <a:t>ac,T</a:t>
+            </a:r>
+            <a:r>
+              <a:rPr sz="1200" b="0">
+                <a:solidFill>
+                  <a:srgbClr val="1E2733"/>
+                </a:solidFill>
+                <a:latin typeface="Noto Sans TC"/>
+              </a:rPr>
+              <a:t>ˢ：冷氣局部空間增益</a:t>
             </a:r>
           </a:p>
           <a:p>
@@ -27533,7 +28629,25 @@
                 </a:solidFill>
                 <a:latin typeface="Noto Sans TC"/>
               </a:rPr>
-              <a:t>• E_ac(p,t)：出風口附近、方向與遮蔽造成的空間權重</a:t>
+              <a:t>• E</a:t>
+            </a:r>
+            <a:r>
+              <a:rPr sz="800" baseline="-25000">
+                <a:solidFill>
+                  <a:srgbClr val="1E2733"/>
+                </a:solidFill>
+                <a:latin typeface="Noto Sans TC"/>
+              </a:rPr>
+              <a:t>ac</a:t>
+            </a:r>
+            <a:r>
+              <a:rPr sz="1200" b="0">
+                <a:solidFill>
+                  <a:srgbClr val="1E2733"/>
+                </a:solidFill>
+                <a:latin typeface="Noto Sans TC"/>
+              </a:rPr>
+              <a:t>(p,t)：出風口附近、方向與遮蔽造成的空間權重</a:t>
             </a:r>
           </a:p>
           <a:p>
@@ -27558,7 +28672,7 @@
                 </a:solidFill>
                 <a:latin typeface="Noto Sans TC"/>
               </a:rPr>
-              <a:t>• 解讀方式：B 是全室趨勢，S 是出風口附近差異</a:t>
+              <a:t>• B 表示全室趨勢，S 表示出風口附近差異</a:t>
             </a:r>
           </a:p>
           <a:p>
@@ -27584,6 +28698,49 @@
                 <a:latin typeface="Noto Sans TC"/>
               </a:rPr>
               <a:t>• 兩者不是任意疊加，而是修正 local-only 的缺陷</a:t>
+            </a:r>
+          </a:p>
+          <a:p>
+            <a:pPr>
+              <a:lnSpc>
+                <a:spcPct val="114000"/>
+              </a:lnSpc>
+              <a:spcAft>
+                <a:spcPts val="400"/>
+              </a:spcAft>
+              <a:defRPr sz="1200">
+                <a:solidFill>
+                  <a:srgbClr val="1E2733"/>
+                </a:solidFill>
+                <a:latin typeface="Noto Sans TC"/>
+              </a:defRPr>
+            </a:pPr>
+            <a:r>
+              <a:rPr sz="1200" b="0">
+                <a:solidFill>
+                  <a:srgbClr val="1E2733"/>
+                </a:solidFill>
+                <a:latin typeface="Noto Sans TC"/>
+              </a:rPr>
+              <a:t>• 數值例：s=-1,k=0.8,d=3,P=1,A=0.5 → B</a:t>
+            </a:r>
+            <a:r>
+              <a:rPr sz="800" baseline="-25000">
+                <a:solidFill>
+                  <a:srgbClr val="1E2733"/>
+                </a:solidFill>
+                <a:latin typeface="Noto Sans TC"/>
+              </a:rPr>
+              <a:t>ac,T</a:t>
+            </a:r>
+            <a:r>
+              <a:rPr sz="1200" b="0">
+                <a:solidFill>
+                  <a:srgbClr val="1E2733"/>
+                </a:solidFill>
+                <a:latin typeface="Noto Sans TC"/>
+              </a:rPr>
+              <a:t>=-1.2°C</a:t>
             </a:r>
           </a:p>
         </p:txBody>
@@ -27802,7 +28959,7 @@
                 </a:solidFill>
                 <a:latin typeface="Noto Sans TC"/>
               </a:rPr>
-              <a:t>公式、符號意義、限制與可主張範圍</a:t>
+              <a:t>公式、符號意義、假設與限制</a:t>
             </a:r>
           </a:p>
         </p:txBody>
@@ -28027,7 +29184,97 @@
                 </a:solidFill>
                 <a:latin typeface="Cambria Math"/>
               </a:rPr>
-              <a:t>B_win,T(t) = k_win,Tᵍ (T_out - T₀) P_win A_win(t)</a:t>
+              <a:t>B</a:t>
+            </a:r>
+            <a:r>
+              <a:rPr sz="1000" baseline="-25000">
+                <a:solidFill>
+                  <a:srgbClr val="1E2733"/>
+                </a:solidFill>
+                <a:latin typeface="Cambria Math"/>
+              </a:rPr>
+              <a:t>win,T</a:t>
+            </a:r>
+            <a:r>
+              <a:rPr sz="1400" b="0">
+                <a:solidFill>
+                  <a:srgbClr val="1E2733"/>
+                </a:solidFill>
+                <a:latin typeface="Cambria Math"/>
+              </a:rPr>
+              <a:t>(t) = k</a:t>
+            </a:r>
+            <a:r>
+              <a:rPr sz="1000" baseline="-25000">
+                <a:solidFill>
+                  <a:srgbClr val="1E2733"/>
+                </a:solidFill>
+                <a:latin typeface="Cambria Math"/>
+              </a:rPr>
+              <a:t>win,T</a:t>
+            </a:r>
+            <a:r>
+              <a:rPr sz="1400" b="0">
+                <a:solidFill>
+                  <a:srgbClr val="1E2733"/>
+                </a:solidFill>
+                <a:latin typeface="Cambria Math"/>
+              </a:rPr>
+              <a:t>ᵍ (T</a:t>
+            </a:r>
+            <a:r>
+              <a:rPr sz="1000" baseline="-25000">
+                <a:solidFill>
+                  <a:srgbClr val="1E2733"/>
+                </a:solidFill>
+                <a:latin typeface="Cambria Math"/>
+              </a:rPr>
+              <a:t>out</a:t>
+            </a:r>
+            <a:r>
+              <a:rPr sz="1400" b="0">
+                <a:solidFill>
+                  <a:srgbClr val="1E2733"/>
+                </a:solidFill>
+                <a:latin typeface="Cambria Math"/>
+              </a:rPr>
+              <a:t> - T₀) P</a:t>
+            </a:r>
+            <a:r>
+              <a:rPr sz="1000" baseline="-25000">
+                <a:solidFill>
+                  <a:srgbClr val="1E2733"/>
+                </a:solidFill>
+                <a:latin typeface="Cambria Math"/>
+              </a:rPr>
+              <a:t>win</a:t>
+            </a:r>
+            <a:r>
+              <a:rPr sz="1400" b="0">
+                <a:solidFill>
+                  <a:srgbClr val="1E2733"/>
+                </a:solidFill>
+                <a:latin typeface="Cambria Math"/>
+              </a:rPr>
+              <a:t> A</a:t>
+            </a:r>
+            <a:r>
+              <a:rPr sz="1000" baseline="-25000">
+                <a:solidFill>
+                  <a:srgbClr val="1E2733"/>
+                </a:solidFill>
+                <a:latin typeface="Cambria Math"/>
+              </a:rPr>
+              <a:t>win</a:t>
+            </a:r>
+            <a:r>
+              <a:rPr sz="1400" b="0">
+                <a:solidFill>
+                  <a:srgbClr val="1E2733"/>
+                </a:solidFill>
+                <a:latin typeface="Cambria Math"/>
+              </a:rPr>
+              <a:t>(t)</a:t>
             </a:r>
           </a:p>
           <a:p>
@@ -28052,7 +29299,97 @@
                 </a:solidFill>
                 <a:latin typeface="Cambria Math"/>
               </a:rPr>
-              <a:t>S_win,T(p,t) = k_win,Tˢ (T_out - T₀) P_win E_win(p,t)</a:t>
+              <a:t>S</a:t>
+            </a:r>
+            <a:r>
+              <a:rPr sz="1000" baseline="-25000">
+                <a:solidFill>
+                  <a:srgbClr val="1E2733"/>
+                </a:solidFill>
+                <a:latin typeface="Cambria Math"/>
+              </a:rPr>
+              <a:t>win,T</a:t>
+            </a:r>
+            <a:r>
+              <a:rPr sz="1400" b="0">
+                <a:solidFill>
+                  <a:srgbClr val="1E2733"/>
+                </a:solidFill>
+                <a:latin typeface="Cambria Math"/>
+              </a:rPr>
+              <a:t>(p,t) = k</a:t>
+            </a:r>
+            <a:r>
+              <a:rPr sz="1000" baseline="-25000">
+                <a:solidFill>
+                  <a:srgbClr val="1E2733"/>
+                </a:solidFill>
+                <a:latin typeface="Cambria Math"/>
+              </a:rPr>
+              <a:t>win,T</a:t>
+            </a:r>
+            <a:r>
+              <a:rPr sz="1400" b="0">
+                <a:solidFill>
+                  <a:srgbClr val="1E2733"/>
+                </a:solidFill>
+                <a:latin typeface="Cambria Math"/>
+              </a:rPr>
+              <a:t>ˢ (T</a:t>
+            </a:r>
+            <a:r>
+              <a:rPr sz="1000" baseline="-25000">
+                <a:solidFill>
+                  <a:srgbClr val="1E2733"/>
+                </a:solidFill>
+                <a:latin typeface="Cambria Math"/>
+              </a:rPr>
+              <a:t>out</a:t>
+            </a:r>
+            <a:r>
+              <a:rPr sz="1400" b="0">
+                <a:solidFill>
+                  <a:srgbClr val="1E2733"/>
+                </a:solidFill>
+                <a:latin typeface="Cambria Math"/>
+              </a:rPr>
+              <a:t> - T₀) P</a:t>
+            </a:r>
+            <a:r>
+              <a:rPr sz="1000" baseline="-25000">
+                <a:solidFill>
+                  <a:srgbClr val="1E2733"/>
+                </a:solidFill>
+                <a:latin typeface="Cambria Math"/>
+              </a:rPr>
+              <a:t>win</a:t>
+            </a:r>
+            <a:r>
+              <a:rPr sz="1400" b="0">
+                <a:solidFill>
+                  <a:srgbClr val="1E2733"/>
+                </a:solidFill>
+                <a:latin typeface="Cambria Math"/>
+              </a:rPr>
+              <a:t> E</a:t>
+            </a:r>
+            <a:r>
+              <a:rPr sz="1000" baseline="-25000">
+                <a:solidFill>
+                  <a:srgbClr val="1E2733"/>
+                </a:solidFill>
+                <a:latin typeface="Cambria Math"/>
+              </a:rPr>
+              <a:t>win</a:t>
+            </a:r>
+            <a:r>
+              <a:rPr sz="1400" b="0">
+                <a:solidFill>
+                  <a:srgbClr val="1E2733"/>
+                </a:solidFill>
+                <a:latin typeface="Cambria Math"/>
+              </a:rPr>
+              <a:t>(p,t)</a:t>
             </a:r>
           </a:p>
           <a:p>
@@ -28077,7 +29414,25 @@
                 </a:solidFill>
                 <a:latin typeface="Noto Sans TC"/>
               </a:rPr>
-              <a:t>• T_out &gt; T₀ 時偏升溫</a:t>
+              <a:t>• T</a:t>
+            </a:r>
+            <a:r>
+              <a:rPr sz="800" baseline="-25000">
+                <a:solidFill>
+                  <a:srgbClr val="1E2733"/>
+                </a:solidFill>
+                <a:latin typeface="Noto Sans TC"/>
+              </a:rPr>
+              <a:t>out</a:t>
+            </a:r>
+            <a:r>
+              <a:rPr sz="1200" b="0">
+                <a:solidFill>
+                  <a:srgbClr val="1E2733"/>
+                </a:solidFill>
+                <a:latin typeface="Noto Sans TC"/>
+              </a:rPr>
+              <a:t> &gt; T₀ 時偏升溫</a:t>
             </a:r>
           </a:p>
           <a:p>
@@ -28102,7 +29457,25 @@
                 </a:solidFill>
                 <a:latin typeface="Noto Sans TC"/>
               </a:rPr>
-              <a:t>• T_out &lt; T₀ 時偏降溫</a:t>
+              <a:t>• T</a:t>
+            </a:r>
+            <a:r>
+              <a:rPr sz="800" baseline="-25000">
+                <a:solidFill>
+                  <a:srgbClr val="1E2733"/>
+                </a:solidFill>
+                <a:latin typeface="Noto Sans TC"/>
+              </a:rPr>
+              <a:t>out</a:t>
+            </a:r>
+            <a:r>
+              <a:rPr sz="1200" b="0">
+                <a:solidFill>
+                  <a:srgbClr val="1E2733"/>
+                </a:solidFill>
+                <a:latin typeface="Noto Sans TC"/>
+              </a:rPr>
+              <a:t> &lt; T₀ 時偏降溫</a:t>
             </a:r>
           </a:p>
           <a:p>
@@ -28127,7 +29500,25 @@
                 </a:solidFill>
                 <a:latin typeface="Noto Sans TC"/>
               </a:rPr>
-              <a:t>• P_win 表示窗戶開啟比例或校正後影響尺度</a:t>
+              <a:t>• P</a:t>
+            </a:r>
+            <a:r>
+              <a:rPr sz="800" baseline="-25000">
+                <a:solidFill>
+                  <a:srgbClr val="1E2733"/>
+                </a:solidFill>
+                <a:latin typeface="Noto Sans TC"/>
+              </a:rPr>
+              <a:t>win</a:t>
+            </a:r>
+            <a:r>
+              <a:rPr sz="1200" b="0">
+                <a:solidFill>
+                  <a:srgbClr val="1E2733"/>
+                </a:solidFill>
+                <a:latin typeface="Noto Sans TC"/>
+              </a:rPr>
+              <a:t> 表示窗戶開啟比例或校正後影響尺度</a:t>
             </a:r>
           </a:p>
         </p:txBody>
@@ -28352,7 +29743,79 @@
                 </a:solidFill>
                 <a:latin typeface="Cambria Math"/>
               </a:rPr>
-              <a:t>B_light,T(t) = k_light,Tᵍ P_light A_light(t)</a:t>
+              <a:t>B</a:t>
+            </a:r>
+            <a:r>
+              <a:rPr sz="1000" baseline="-25000">
+                <a:solidFill>
+                  <a:srgbClr val="1E2733"/>
+                </a:solidFill>
+                <a:latin typeface="Cambria Math"/>
+              </a:rPr>
+              <a:t>light,T</a:t>
+            </a:r>
+            <a:r>
+              <a:rPr sz="1400" b="0">
+                <a:solidFill>
+                  <a:srgbClr val="1E2733"/>
+                </a:solidFill>
+                <a:latin typeface="Cambria Math"/>
+              </a:rPr>
+              <a:t>(t) = k</a:t>
+            </a:r>
+            <a:r>
+              <a:rPr sz="1000" baseline="-25000">
+                <a:solidFill>
+                  <a:srgbClr val="1E2733"/>
+                </a:solidFill>
+                <a:latin typeface="Cambria Math"/>
+              </a:rPr>
+              <a:t>light,T</a:t>
+            </a:r>
+            <a:r>
+              <a:rPr sz="1400" b="0">
+                <a:solidFill>
+                  <a:srgbClr val="1E2733"/>
+                </a:solidFill>
+                <a:latin typeface="Cambria Math"/>
+              </a:rPr>
+              <a:t>ᵍ P</a:t>
+            </a:r>
+            <a:r>
+              <a:rPr sz="1000" baseline="-25000">
+                <a:solidFill>
+                  <a:srgbClr val="1E2733"/>
+                </a:solidFill>
+                <a:latin typeface="Cambria Math"/>
+              </a:rPr>
+              <a:t>light</a:t>
+            </a:r>
+            <a:r>
+              <a:rPr sz="1400" b="0">
+                <a:solidFill>
+                  <a:srgbClr val="1E2733"/>
+                </a:solidFill>
+                <a:latin typeface="Cambria Math"/>
+              </a:rPr>
+              <a:t> A</a:t>
+            </a:r>
+            <a:r>
+              <a:rPr sz="1000" baseline="-25000">
+                <a:solidFill>
+                  <a:srgbClr val="1E2733"/>
+                </a:solidFill>
+                <a:latin typeface="Cambria Math"/>
+              </a:rPr>
+              <a:t>light</a:t>
+            </a:r>
+            <a:r>
+              <a:rPr sz="1400" b="0">
+                <a:solidFill>
+                  <a:srgbClr val="1E2733"/>
+                </a:solidFill>
+                <a:latin typeface="Cambria Math"/>
+              </a:rPr>
+              <a:t>(t)</a:t>
             </a:r>
           </a:p>
           <a:p>
@@ -28377,7 +29840,79 @@
                 </a:solidFill>
                 <a:latin typeface="Cambria Math"/>
               </a:rPr>
-              <a:t>S_light,T(p,t) = k_light,Tˢ P_light E_light(p,t)</a:t>
+              <a:t>S</a:t>
+            </a:r>
+            <a:r>
+              <a:rPr sz="1000" baseline="-25000">
+                <a:solidFill>
+                  <a:srgbClr val="1E2733"/>
+                </a:solidFill>
+                <a:latin typeface="Cambria Math"/>
+              </a:rPr>
+              <a:t>light,T</a:t>
+            </a:r>
+            <a:r>
+              <a:rPr sz="1400" b="0">
+                <a:solidFill>
+                  <a:srgbClr val="1E2733"/>
+                </a:solidFill>
+                <a:latin typeface="Cambria Math"/>
+              </a:rPr>
+              <a:t>(p,t) = k</a:t>
+            </a:r>
+            <a:r>
+              <a:rPr sz="1000" baseline="-25000">
+                <a:solidFill>
+                  <a:srgbClr val="1E2733"/>
+                </a:solidFill>
+                <a:latin typeface="Cambria Math"/>
+              </a:rPr>
+              <a:t>light,T</a:t>
+            </a:r>
+            <a:r>
+              <a:rPr sz="1400" b="0">
+                <a:solidFill>
+                  <a:srgbClr val="1E2733"/>
+                </a:solidFill>
+                <a:latin typeface="Cambria Math"/>
+              </a:rPr>
+              <a:t>ˢ P</a:t>
+            </a:r>
+            <a:r>
+              <a:rPr sz="1000" baseline="-25000">
+                <a:solidFill>
+                  <a:srgbClr val="1E2733"/>
+                </a:solidFill>
+                <a:latin typeface="Cambria Math"/>
+              </a:rPr>
+              <a:t>light</a:t>
+            </a:r>
+            <a:r>
+              <a:rPr sz="1400" b="0">
+                <a:solidFill>
+                  <a:srgbClr val="1E2733"/>
+                </a:solidFill>
+                <a:latin typeface="Cambria Math"/>
+              </a:rPr>
+              <a:t> E</a:t>
+            </a:r>
+            <a:r>
+              <a:rPr sz="1000" baseline="-25000">
+                <a:solidFill>
+                  <a:srgbClr val="1E2733"/>
+                </a:solidFill>
+                <a:latin typeface="Cambria Math"/>
+              </a:rPr>
+              <a:t>light</a:t>
+            </a:r>
+            <a:r>
+              <a:rPr sz="1400" b="0">
+                <a:solidFill>
+                  <a:srgbClr val="1E2733"/>
+                </a:solidFill>
+                <a:latin typeface="Cambria Math"/>
+              </a:rPr>
+              <a:t>(p,t)</a:t>
             </a:r>
           </a:p>
           <a:p>
@@ -28453,6 +29988,67 @@
                 <a:latin typeface="Noto Sans TC"/>
               </a:rPr>
               <a:t>• 這可避免把光學效果誤解成熱場效果</a:t>
+            </a:r>
+          </a:p>
+          <a:p>
+            <a:pPr>
+              <a:lnSpc>
+                <a:spcPct val="114000"/>
+              </a:lnSpc>
+              <a:spcAft>
+                <a:spcPts val="400"/>
+              </a:spcAft>
+              <a:defRPr sz="1200">
+                <a:solidFill>
+                  <a:srgbClr val="1E2733"/>
+                </a:solidFill>
+                <a:latin typeface="Noto Sans TC"/>
+              </a:defRPr>
+            </a:pPr>
+            <a:r>
+              <a:rPr sz="1200" b="0">
+                <a:solidFill>
+                  <a:srgbClr val="1E2733"/>
+                </a:solidFill>
+                <a:latin typeface="Noto Sans TC"/>
+              </a:rPr>
+              <a:t>• 數值例：k=0.05,T</a:t>
+            </a:r>
+            <a:r>
+              <a:rPr sz="800" baseline="-25000">
+                <a:solidFill>
+                  <a:srgbClr val="1E2733"/>
+                </a:solidFill>
+                <a:latin typeface="Noto Sans TC"/>
+              </a:rPr>
+              <a:t>out</a:t>
+            </a:r>
+            <a:r>
+              <a:rPr sz="1200" b="0">
+                <a:solidFill>
+                  <a:srgbClr val="1E2733"/>
+                </a:solidFill>
+                <a:latin typeface="Noto Sans TC"/>
+              </a:rPr>
+              <a:t>-T₀=4 → B</a:t>
+            </a:r>
+            <a:r>
+              <a:rPr sz="800" baseline="-25000">
+                <a:solidFill>
+                  <a:srgbClr val="1E2733"/>
+                </a:solidFill>
+                <a:latin typeface="Noto Sans TC"/>
+              </a:rPr>
+              <a:t>win,T</a:t>
+            </a:r>
+            <a:r>
+              <a:rPr sz="1200" b="0">
+                <a:solidFill>
+                  <a:srgbClr val="1E2733"/>
+                </a:solidFill>
+                <a:latin typeface="Noto Sans TC"/>
+              </a:rPr>
+              <a:t>=+0.20°C</a:t>
             </a:r>
           </a:p>
         </p:txBody>
@@ -28671,7 +30267,7 @@
                 </a:solidFill>
                 <a:latin typeface="Noto Sans TC"/>
               </a:rPr>
-              <a:t>公式、符號意義、限制與可主張範圍</a:t>
+              <a:t>公式、符號意義、假設與限制</a:t>
             </a:r>
           </a:p>
         </p:txBody>
@@ -28896,7 +30492,79 @@
                 </a:solidFill>
                 <a:latin typeface="Cambria Math"/>
               </a:rPr>
-              <a:t>N_H(p,t) = clip[0,100]{H₀ + B_H(t) + S_H(p,t) - γ_H M(t) ζ}</a:t>
+              <a:t>N</a:t>
+            </a:r>
+            <a:r>
+              <a:rPr sz="1000" baseline="-25000">
+                <a:solidFill>
+                  <a:srgbClr val="1E2733"/>
+                </a:solidFill>
+                <a:latin typeface="Cambria Math"/>
+              </a:rPr>
+              <a:t>H</a:t>
+            </a:r>
+            <a:r>
+              <a:rPr sz="1400" b="0">
+                <a:solidFill>
+                  <a:srgbClr val="1E2733"/>
+                </a:solidFill>
+                <a:latin typeface="Cambria Math"/>
+              </a:rPr>
+              <a:t>(p,t) = clip[0,100]{H₀ + B</a:t>
+            </a:r>
+            <a:r>
+              <a:rPr sz="1000" baseline="-25000">
+                <a:solidFill>
+                  <a:srgbClr val="1E2733"/>
+                </a:solidFill>
+                <a:latin typeface="Cambria Math"/>
+              </a:rPr>
+              <a:t>H</a:t>
+            </a:r>
+            <a:r>
+              <a:rPr sz="1400" b="0">
+                <a:solidFill>
+                  <a:srgbClr val="1E2733"/>
+                </a:solidFill>
+                <a:latin typeface="Cambria Math"/>
+              </a:rPr>
+              <a:t>(t) + S</a:t>
+            </a:r>
+            <a:r>
+              <a:rPr sz="1000" baseline="-25000">
+                <a:solidFill>
+                  <a:srgbClr val="1E2733"/>
+                </a:solidFill>
+                <a:latin typeface="Cambria Math"/>
+              </a:rPr>
+              <a:t>H</a:t>
+            </a:r>
+            <a:r>
+              <a:rPr sz="1400" b="0">
+                <a:solidFill>
+                  <a:srgbClr val="1E2733"/>
+                </a:solidFill>
+                <a:latin typeface="Cambria Math"/>
+              </a:rPr>
+              <a:t>(p,t) - γ</a:t>
+            </a:r>
+            <a:r>
+              <a:rPr sz="1000" baseline="-25000">
+                <a:solidFill>
+                  <a:srgbClr val="1E2733"/>
+                </a:solidFill>
+                <a:latin typeface="Cambria Math"/>
+              </a:rPr>
+              <a:t>H</a:t>
+            </a:r>
+            <a:r>
+              <a:rPr sz="1400" b="0">
+                <a:solidFill>
+                  <a:srgbClr val="1E2733"/>
+                </a:solidFill>
+                <a:latin typeface="Cambria Math"/>
+              </a:rPr>
+              <a:t> M(t) ζ}</a:t>
             </a:r>
           </a:p>
           <a:p>
@@ -28946,7 +30614,25 @@
                 </a:solidFill>
                 <a:latin typeface="Cambria Math"/>
               </a:rPr>
-              <a:t>B_H(t)：全室平均水氣或除濕響應</a:t>
+              <a:t>B</a:t>
+            </a:r>
+            <a:r>
+              <a:rPr sz="1000" baseline="-25000">
+                <a:solidFill>
+                  <a:srgbClr val="1E2733"/>
+                </a:solidFill>
+                <a:latin typeface="Cambria Math"/>
+              </a:rPr>
+              <a:t>H</a:t>
+            </a:r>
+            <a:r>
+              <a:rPr sz="1400" b="0">
+                <a:solidFill>
+                  <a:srgbClr val="1E2733"/>
+                </a:solidFill>
+                <a:latin typeface="Cambria Math"/>
+              </a:rPr>
+              <a:t>(t)：全室平均水氣或除濕響應</a:t>
             </a:r>
           </a:p>
           <a:p>
@@ -28971,7 +30657,25 @@
                 </a:solidFill>
                 <a:latin typeface="Cambria Math"/>
               </a:rPr>
-              <a:t>S_H(p,t)：局部水氣交換或除濕差異</a:t>
+              <a:t>S</a:t>
+            </a:r>
+            <a:r>
+              <a:rPr sz="1000" baseline="-25000">
+                <a:solidFill>
+                  <a:srgbClr val="1E2733"/>
+                </a:solidFill>
+                <a:latin typeface="Cambria Math"/>
+              </a:rPr>
+              <a:t>H</a:t>
+            </a:r>
+            <a:r>
+              <a:rPr sz="1400" b="0">
+                <a:solidFill>
+                  <a:srgbClr val="1E2733"/>
+                </a:solidFill>
+                <a:latin typeface="Cambria Math"/>
+              </a:rPr>
+              <a:t>(p,t)：局部水氣交換或除濕差異</a:t>
             </a:r>
           </a:p>
           <a:p>
@@ -29322,6 +31026,31 @@
                 <a:latin typeface="Noto Sans TC"/>
               </a:rPr>
               <a:t>• 而是用低階水氣交換近似再由 sensor residual 校正</a:t>
+            </a:r>
+          </a:p>
+          <a:p>
+            <a:pPr>
+              <a:lnSpc>
+                <a:spcPct val="114000"/>
+              </a:lnSpc>
+              <a:spcAft>
+                <a:spcPts val="400"/>
+              </a:spcAft>
+              <a:defRPr sz="1200">
+                <a:solidFill>
+                  <a:srgbClr val="1E2733"/>
+                </a:solidFill>
+                <a:latin typeface="Noto Sans TC"/>
+              </a:defRPr>
+            </a:pPr>
+            <a:r>
+              <a:rPr sz="1200" b="0">
+                <a:solidFill>
+                  <a:srgbClr val="1E2733"/>
+                </a:solidFill>
+                <a:latin typeface="Noto Sans TC"/>
+              </a:rPr>
+              <a:t>• 數值例：clip[0,100](67-5+1-0.2)=62.8%</a:t>
             </a:r>
           </a:p>
         </p:txBody>
@@ -29540,7 +31269,7 @@
                 </a:solidFill>
                 <a:latin typeface="Noto Sans TC"/>
               </a:rPr>
-              <a:t>公式、符號意義、限制與可主張範圍</a:t>
+              <a:t>公式、符號意義、假設與限制</a:t>
             </a:r>
           </a:p>
         </p:txBody>
@@ -29765,7 +31494,97 @@
                 </a:solidFill>
                 <a:latin typeface="Cambria Math"/>
               </a:rPr>
-              <a:t>B_H(t) = -k_ac,Hᵍ d_H P_ac A_ac(t)</a:t>
+              <a:t>B</a:t>
+            </a:r>
+            <a:r>
+              <a:rPr sz="1000" baseline="-25000">
+                <a:solidFill>
+                  <a:srgbClr val="1E2733"/>
+                </a:solidFill>
+                <a:latin typeface="Cambria Math"/>
+              </a:rPr>
+              <a:t>H</a:t>
+            </a:r>
+            <a:r>
+              <a:rPr sz="1400" b="0">
+                <a:solidFill>
+                  <a:srgbClr val="1E2733"/>
+                </a:solidFill>
+                <a:latin typeface="Cambria Math"/>
+              </a:rPr>
+              <a:t>(t) = -k</a:t>
+            </a:r>
+            <a:r>
+              <a:rPr sz="1000" baseline="-25000">
+                <a:solidFill>
+                  <a:srgbClr val="1E2733"/>
+                </a:solidFill>
+                <a:latin typeface="Cambria Math"/>
+              </a:rPr>
+              <a:t>ac,H</a:t>
+            </a:r>
+            <a:r>
+              <a:rPr sz="1400" b="0">
+                <a:solidFill>
+                  <a:srgbClr val="1E2733"/>
+                </a:solidFill>
+                <a:latin typeface="Cambria Math"/>
+              </a:rPr>
+              <a:t>ᵍ d</a:t>
+            </a:r>
+            <a:r>
+              <a:rPr sz="1000" baseline="-25000">
+                <a:solidFill>
+                  <a:srgbClr val="1E2733"/>
+                </a:solidFill>
+                <a:latin typeface="Cambria Math"/>
+              </a:rPr>
+              <a:t>H</a:t>
+            </a:r>
+            <a:r>
+              <a:rPr sz="1400" b="0">
+                <a:solidFill>
+                  <a:srgbClr val="1E2733"/>
+                </a:solidFill>
+                <a:latin typeface="Cambria Math"/>
+              </a:rPr>
+              <a:t> P</a:t>
+            </a:r>
+            <a:r>
+              <a:rPr sz="1000" baseline="-25000">
+                <a:solidFill>
+                  <a:srgbClr val="1E2733"/>
+                </a:solidFill>
+                <a:latin typeface="Cambria Math"/>
+              </a:rPr>
+              <a:t>ac</a:t>
+            </a:r>
+            <a:r>
+              <a:rPr sz="1400" b="0">
+                <a:solidFill>
+                  <a:srgbClr val="1E2733"/>
+                </a:solidFill>
+                <a:latin typeface="Cambria Math"/>
+              </a:rPr>
+              <a:t> A</a:t>
+            </a:r>
+            <a:r>
+              <a:rPr sz="1000" baseline="-25000">
+                <a:solidFill>
+                  <a:srgbClr val="1E2733"/>
+                </a:solidFill>
+                <a:latin typeface="Cambria Math"/>
+              </a:rPr>
+              <a:t>ac</a:t>
+            </a:r>
+            <a:r>
+              <a:rPr sz="1400" b="0">
+                <a:solidFill>
+                  <a:srgbClr val="1E2733"/>
+                </a:solidFill>
+                <a:latin typeface="Cambria Math"/>
+              </a:rPr>
+              <a:t>(t)</a:t>
             </a:r>
           </a:p>
           <a:p>
@@ -29790,7 +31609,79 @@
                 </a:solidFill>
                 <a:latin typeface="Cambria Math"/>
               </a:rPr>
-              <a:t>+ k_win,Hᵍ (H_out - H₀) P_win A_win(t)</a:t>
+              <a:t>+ k</a:t>
+            </a:r>
+            <a:r>
+              <a:rPr sz="1000" baseline="-25000">
+                <a:solidFill>
+                  <a:srgbClr val="1E2733"/>
+                </a:solidFill>
+                <a:latin typeface="Cambria Math"/>
+              </a:rPr>
+              <a:t>win,H</a:t>
+            </a:r>
+            <a:r>
+              <a:rPr sz="1400" b="0">
+                <a:solidFill>
+                  <a:srgbClr val="1E2733"/>
+                </a:solidFill>
+                <a:latin typeface="Cambria Math"/>
+              </a:rPr>
+              <a:t>ᵍ (H</a:t>
+            </a:r>
+            <a:r>
+              <a:rPr sz="1000" baseline="-25000">
+                <a:solidFill>
+                  <a:srgbClr val="1E2733"/>
+                </a:solidFill>
+                <a:latin typeface="Cambria Math"/>
+              </a:rPr>
+              <a:t>out</a:t>
+            </a:r>
+            <a:r>
+              <a:rPr sz="1400" b="0">
+                <a:solidFill>
+                  <a:srgbClr val="1E2733"/>
+                </a:solidFill>
+                <a:latin typeface="Cambria Math"/>
+              </a:rPr>
+              <a:t> - H₀) P</a:t>
+            </a:r>
+            <a:r>
+              <a:rPr sz="1000" baseline="-25000">
+                <a:solidFill>
+                  <a:srgbClr val="1E2733"/>
+                </a:solidFill>
+                <a:latin typeface="Cambria Math"/>
+              </a:rPr>
+              <a:t>win</a:t>
+            </a:r>
+            <a:r>
+              <a:rPr sz="1400" b="0">
+                <a:solidFill>
+                  <a:srgbClr val="1E2733"/>
+                </a:solidFill>
+                <a:latin typeface="Cambria Math"/>
+              </a:rPr>
+              <a:t> A</a:t>
+            </a:r>
+            <a:r>
+              <a:rPr sz="1000" baseline="-25000">
+                <a:solidFill>
+                  <a:srgbClr val="1E2733"/>
+                </a:solidFill>
+                <a:latin typeface="Cambria Math"/>
+              </a:rPr>
+              <a:t>win</a:t>
+            </a:r>
+            <a:r>
+              <a:rPr sz="1400" b="0">
+                <a:solidFill>
+                  <a:srgbClr val="1E2733"/>
+                </a:solidFill>
+                <a:latin typeface="Cambria Math"/>
+              </a:rPr>
+              <a:t>(t)</a:t>
             </a:r>
           </a:p>
           <a:p>
@@ -29840,7 +31731,25 @@
                 </a:solidFill>
                 <a:latin typeface="Noto Sans TC"/>
               </a:rPr>
-              <a:t>• 窗戶項正負由 H_out - H₀ 決定</a:t>
+              <a:t>• 窗戶項正負由 H</a:t>
+            </a:r>
+            <a:r>
+              <a:rPr sz="800" baseline="-25000">
+                <a:solidFill>
+                  <a:srgbClr val="1E2733"/>
+                </a:solidFill>
+                <a:latin typeface="Noto Sans TC"/>
+              </a:rPr>
+              <a:t>out</a:t>
+            </a:r>
+            <a:r>
+              <a:rPr sz="1200" b="0">
+                <a:solidFill>
+                  <a:srgbClr val="1E2733"/>
+                </a:solidFill>
+                <a:latin typeface="Noto Sans TC"/>
+              </a:rPr>
+              <a:t> - H₀ 決定</a:t>
             </a:r>
           </a:p>
           <a:p>
@@ -30090,7 +31999,97 @@
                 </a:solidFill>
                 <a:latin typeface="Cambria Math"/>
               </a:rPr>
-              <a:t>S_H(p,t) = -k_ac,Hˢ d_H P_ac E_ac(p,t)</a:t>
+              <a:t>S</a:t>
+            </a:r>
+            <a:r>
+              <a:rPr sz="1000" baseline="-25000">
+                <a:solidFill>
+                  <a:srgbClr val="1E2733"/>
+                </a:solidFill>
+                <a:latin typeface="Cambria Math"/>
+              </a:rPr>
+              <a:t>H</a:t>
+            </a:r>
+            <a:r>
+              <a:rPr sz="1400" b="0">
+                <a:solidFill>
+                  <a:srgbClr val="1E2733"/>
+                </a:solidFill>
+                <a:latin typeface="Cambria Math"/>
+              </a:rPr>
+              <a:t>(p,t) = -k</a:t>
+            </a:r>
+            <a:r>
+              <a:rPr sz="1000" baseline="-25000">
+                <a:solidFill>
+                  <a:srgbClr val="1E2733"/>
+                </a:solidFill>
+                <a:latin typeface="Cambria Math"/>
+              </a:rPr>
+              <a:t>ac,H</a:t>
+            </a:r>
+            <a:r>
+              <a:rPr sz="1400" b="0">
+                <a:solidFill>
+                  <a:srgbClr val="1E2733"/>
+                </a:solidFill>
+                <a:latin typeface="Cambria Math"/>
+              </a:rPr>
+              <a:t>ˢ d</a:t>
+            </a:r>
+            <a:r>
+              <a:rPr sz="1000" baseline="-25000">
+                <a:solidFill>
+                  <a:srgbClr val="1E2733"/>
+                </a:solidFill>
+                <a:latin typeface="Cambria Math"/>
+              </a:rPr>
+              <a:t>H</a:t>
+            </a:r>
+            <a:r>
+              <a:rPr sz="1400" b="0">
+                <a:solidFill>
+                  <a:srgbClr val="1E2733"/>
+                </a:solidFill>
+                <a:latin typeface="Cambria Math"/>
+              </a:rPr>
+              <a:t> P</a:t>
+            </a:r>
+            <a:r>
+              <a:rPr sz="1000" baseline="-25000">
+                <a:solidFill>
+                  <a:srgbClr val="1E2733"/>
+                </a:solidFill>
+                <a:latin typeface="Cambria Math"/>
+              </a:rPr>
+              <a:t>ac</a:t>
+            </a:r>
+            <a:r>
+              <a:rPr sz="1400" b="0">
+                <a:solidFill>
+                  <a:srgbClr val="1E2733"/>
+                </a:solidFill>
+                <a:latin typeface="Cambria Math"/>
+              </a:rPr>
+              <a:t> E</a:t>
+            </a:r>
+            <a:r>
+              <a:rPr sz="1000" baseline="-25000">
+                <a:solidFill>
+                  <a:srgbClr val="1E2733"/>
+                </a:solidFill>
+                <a:latin typeface="Cambria Math"/>
+              </a:rPr>
+              <a:t>ac</a:t>
+            </a:r>
+            <a:r>
+              <a:rPr sz="1400" b="0">
+                <a:solidFill>
+                  <a:srgbClr val="1E2733"/>
+                </a:solidFill>
+                <a:latin typeface="Cambria Math"/>
+              </a:rPr>
+              <a:t>(p,t)</a:t>
             </a:r>
           </a:p>
           <a:p>
@@ -30115,7 +32114,79 @@
                 </a:solidFill>
                 <a:latin typeface="Cambria Math"/>
               </a:rPr>
-              <a:t>+ k_win,Hˢ (H_out - H₀) P_win E_win(p,t)</a:t>
+              <a:t>+ k</a:t>
+            </a:r>
+            <a:r>
+              <a:rPr sz="1000" baseline="-25000">
+                <a:solidFill>
+                  <a:srgbClr val="1E2733"/>
+                </a:solidFill>
+                <a:latin typeface="Cambria Math"/>
+              </a:rPr>
+              <a:t>win,H</a:t>
+            </a:r>
+            <a:r>
+              <a:rPr sz="1400" b="0">
+                <a:solidFill>
+                  <a:srgbClr val="1E2733"/>
+                </a:solidFill>
+                <a:latin typeface="Cambria Math"/>
+              </a:rPr>
+              <a:t>ˢ (H</a:t>
+            </a:r>
+            <a:r>
+              <a:rPr sz="1000" baseline="-25000">
+                <a:solidFill>
+                  <a:srgbClr val="1E2733"/>
+                </a:solidFill>
+                <a:latin typeface="Cambria Math"/>
+              </a:rPr>
+              <a:t>out</a:t>
+            </a:r>
+            <a:r>
+              <a:rPr sz="1400" b="0">
+                <a:solidFill>
+                  <a:srgbClr val="1E2733"/>
+                </a:solidFill>
+                <a:latin typeface="Cambria Math"/>
+              </a:rPr>
+              <a:t> - H₀) P</a:t>
+            </a:r>
+            <a:r>
+              <a:rPr sz="1000" baseline="-25000">
+                <a:solidFill>
+                  <a:srgbClr val="1E2733"/>
+                </a:solidFill>
+                <a:latin typeface="Cambria Math"/>
+              </a:rPr>
+              <a:t>win</a:t>
+            </a:r>
+            <a:r>
+              <a:rPr sz="1400" b="0">
+                <a:solidFill>
+                  <a:srgbClr val="1E2733"/>
+                </a:solidFill>
+                <a:latin typeface="Cambria Math"/>
+              </a:rPr>
+              <a:t> E</a:t>
+            </a:r>
+            <a:r>
+              <a:rPr sz="1000" baseline="-25000">
+                <a:solidFill>
+                  <a:srgbClr val="1E2733"/>
+                </a:solidFill>
+                <a:latin typeface="Cambria Math"/>
+              </a:rPr>
+              <a:t>win</a:t>
+            </a:r>
+            <a:r>
+              <a:rPr sz="1400" b="0">
+                <a:solidFill>
+                  <a:srgbClr val="1E2733"/>
+                </a:solidFill>
+                <a:latin typeface="Cambria Math"/>
+              </a:rPr>
+              <a:t>(p,t)</a:t>
             </a:r>
           </a:p>
           <a:p>
@@ -30140,7 +32211,25 @@
                 </a:solidFill>
                 <a:latin typeface="Noto Sans TC"/>
               </a:rPr>
-              <a:t>• E_ac 讓除濕效果在冷氣影響區附近更強</a:t>
+              <a:t>• E</a:t>
+            </a:r>
+            <a:r>
+              <a:rPr sz="800" baseline="-25000">
+                <a:solidFill>
+                  <a:srgbClr val="1E2733"/>
+                </a:solidFill>
+                <a:latin typeface="Noto Sans TC"/>
+              </a:rPr>
+              <a:t>ac</a:t>
+            </a:r>
+            <a:r>
+              <a:rPr sz="1200" b="0">
+                <a:solidFill>
+                  <a:srgbClr val="1E2733"/>
+                </a:solidFill>
+                <a:latin typeface="Noto Sans TC"/>
+              </a:rPr>
+              <a:t> 讓除濕效果在冷氣影響區附近更強</a:t>
             </a:r>
           </a:p>
           <a:p>
@@ -30165,7 +32254,25 @@
                 </a:solidFill>
                 <a:latin typeface="Noto Sans TC"/>
               </a:rPr>
-              <a:t>• E_win 讓窗邊水氣交換較強</a:t>
+              <a:t>• E</a:t>
+            </a:r>
+            <a:r>
+              <a:rPr sz="800" baseline="-25000">
+                <a:solidFill>
+                  <a:srgbClr val="1E2733"/>
+                </a:solidFill>
+                <a:latin typeface="Noto Sans TC"/>
+              </a:rPr>
+              <a:t>win</a:t>
+            </a:r>
+            <a:r>
+              <a:rPr sz="1200" b="0">
+                <a:solidFill>
+                  <a:srgbClr val="1E2733"/>
+                </a:solidFill>
+                <a:latin typeface="Noto Sans TC"/>
+              </a:rPr>
+              <a:t> 讓窗邊水氣交換較強</a:t>
             </a:r>
           </a:p>
           <a:p>
@@ -30191,6 +32298,31 @@
                 <a:latin typeface="Noto Sans TC"/>
               </a:rPr>
               <a:t>• 濕度沒有使用燈具照度那套光學公式</a:t>
+            </a:r>
+          </a:p>
+          <a:p>
+            <a:pPr>
+              <a:lnSpc>
+                <a:spcPct val="114000"/>
+              </a:lnSpc>
+              <a:spcAft>
+                <a:spcPts val="400"/>
+              </a:spcAft>
+              <a:defRPr sz="1200">
+                <a:solidFill>
+                  <a:srgbClr val="1E2733"/>
+                </a:solidFill>
+                <a:latin typeface="Noto Sans TC"/>
+              </a:defRPr>
+            </a:pPr>
+            <a:r>
+              <a:rPr sz="1200" b="0">
+                <a:solidFill>
+                  <a:srgbClr val="1E2733"/>
+                </a:solidFill>
+                <a:latin typeface="Noto Sans TC"/>
+              </a:rPr>
+              <a:t>• 數值例：-0.4×10×0.5 + 0.02×8=-1.84%</a:t>
             </a:r>
           </a:p>
         </p:txBody>
@@ -31419,7 +33551,7 @@
                 </a:solidFill>
                 <a:latin typeface="Noto Sans TC"/>
               </a:rPr>
-              <a:t>公式、符號意義、限制與可主張範圍</a:t>
+              <a:t>公式、符號意義、假設與限制</a:t>
             </a:r>
           </a:p>
         </p:txBody>
@@ -31644,7 +33776,43 @@
                 </a:solidFill>
                 <a:latin typeface="Cambria Math"/>
               </a:rPr>
-              <a:t>N_L(p,t) = max{0, L₀ + L_winᵈⁱʳ(p,t)</a:t>
+              <a:t>N</a:t>
+            </a:r>
+            <a:r>
+              <a:rPr sz="1000" baseline="-25000">
+                <a:solidFill>
+                  <a:srgbClr val="1E2733"/>
+                </a:solidFill>
+                <a:latin typeface="Cambria Math"/>
+              </a:rPr>
+              <a:t>L</a:t>
+            </a:r>
+            <a:r>
+              <a:rPr sz="1400" b="0">
+                <a:solidFill>
+                  <a:srgbClr val="1E2733"/>
+                </a:solidFill>
+                <a:latin typeface="Cambria Math"/>
+              </a:rPr>
+              <a:t>(p,t) = max{0, L₀ + L</a:t>
+            </a:r>
+            <a:r>
+              <a:rPr sz="1000" baseline="-25000">
+                <a:solidFill>
+                  <a:srgbClr val="1E2733"/>
+                </a:solidFill>
+                <a:latin typeface="Cambria Math"/>
+              </a:rPr>
+              <a:t>win</a:t>
+            </a:r>
+            <a:r>
+              <a:rPr sz="1400" b="0">
+                <a:solidFill>
+                  <a:srgbClr val="1E2733"/>
+                </a:solidFill>
+                <a:latin typeface="Cambria Math"/>
+              </a:rPr>
+              <a:t>ᵈⁱʳ(p,t)</a:t>
             </a:r>
           </a:p>
           <a:p>
@@ -31669,7 +33837,43 @@
                 </a:solidFill>
                 <a:latin typeface="Cambria Math"/>
               </a:rPr>
-              <a:t>+ L_lightᵈⁱʳ(p,t) + L_winᵃᵐᵇ(p,t) + Iʳᵉᶠˡ(p,t)}</a:t>
+              <a:t>+ L</a:t>
+            </a:r>
+            <a:r>
+              <a:rPr sz="1000" baseline="-25000">
+                <a:solidFill>
+                  <a:srgbClr val="1E2733"/>
+                </a:solidFill>
+                <a:latin typeface="Cambria Math"/>
+              </a:rPr>
+              <a:t>light</a:t>
+            </a:r>
+            <a:r>
+              <a:rPr sz="1400" b="0">
+                <a:solidFill>
+                  <a:srgbClr val="1E2733"/>
+                </a:solidFill>
+                <a:latin typeface="Cambria Math"/>
+              </a:rPr>
+              <a:t>ᵈⁱʳ(p,t) + L</a:t>
+            </a:r>
+            <a:r>
+              <a:rPr sz="1000" baseline="-25000">
+                <a:solidFill>
+                  <a:srgbClr val="1E2733"/>
+                </a:solidFill>
+                <a:latin typeface="Cambria Math"/>
+              </a:rPr>
+              <a:t>win</a:t>
+            </a:r>
+            <a:r>
+              <a:rPr sz="1400" b="0">
+                <a:solidFill>
+                  <a:srgbClr val="1E2733"/>
+                </a:solidFill>
+                <a:latin typeface="Cambria Math"/>
+              </a:rPr>
+              <a:t>ᵃᵐᵇ(p,t) + Iʳᵉᶠˡ(p,t)}</a:t>
             </a:r>
           </a:p>
           <a:p>
@@ -31744,7 +33948,7 @@
                 </a:solidFill>
                 <a:latin typeface="Noto Sans TC"/>
               </a:rPr>
-              <a:t>• 照度由光源、窗戶、遮蔽與反射決定</a:t>
+              <a:t>• 照度由燈具光束、窗戶、遮蔽與反射決定</a:t>
             </a:r>
           </a:p>
         </p:txBody>
@@ -32070,6 +34274,31 @@
                 <a:latin typeface="Noto Sans TC"/>
               </a:rPr>
               <a:t>• 再用一次漫反射補足間接光</a:t>
+            </a:r>
+          </a:p>
+          <a:p>
+            <a:pPr>
+              <a:lnSpc>
+                <a:spcPct val="114000"/>
+              </a:lnSpc>
+              <a:spcAft>
+                <a:spcPts val="400"/>
+              </a:spcAft>
+              <a:defRPr sz="1200">
+                <a:solidFill>
+                  <a:srgbClr val="1E2733"/>
+                </a:solidFill>
+                <a:latin typeface="Noto Sans TC"/>
+              </a:defRPr>
+            </a:pPr>
+            <a:r>
+              <a:rPr sz="1200" b="0">
+                <a:solidFill>
+                  <a:srgbClr val="1E2733"/>
+                </a:solidFill>
+                <a:latin typeface="Noto Sans TC"/>
+              </a:rPr>
+              <a:t>• 數值例：max(0,90+250+120+40+30)=530 lux</a:t>
             </a:r>
           </a:p>
         </p:txBody>
@@ -32288,7 +34517,7 @@
                 </a:solidFill>
                 <a:latin typeface="Noto Sans TC"/>
               </a:rPr>
-              <a:t>公式、符號意義、限制與可主張範圍</a:t>
+              <a:t>公式、符號意義、假設與限制</a:t>
             </a:r>
           </a:p>
         </p:txBody>
@@ -32513,7 +34742,115 @@
                 </a:solidFill>
                 <a:latin typeface="Cambria Math"/>
               </a:rPr>
-              <a:t>L_winᵈⁱʳ(p,t) = S_out d_f k_sol P_win E_win(p,t)</a:t>
+              <a:t>L</a:t>
+            </a:r>
+            <a:r>
+              <a:rPr sz="1000" baseline="-25000">
+                <a:solidFill>
+                  <a:srgbClr val="1E2733"/>
+                </a:solidFill>
+                <a:latin typeface="Cambria Math"/>
+              </a:rPr>
+              <a:t>win</a:t>
+            </a:r>
+            <a:r>
+              <a:rPr sz="1400" b="0">
+                <a:solidFill>
+                  <a:srgbClr val="1E2733"/>
+                </a:solidFill>
+                <a:latin typeface="Cambria Math"/>
+              </a:rPr>
+              <a:t>ᵈⁱʳ(p,t) = S</a:t>
+            </a:r>
+            <a:r>
+              <a:rPr sz="1000" baseline="-25000">
+                <a:solidFill>
+                  <a:srgbClr val="1E2733"/>
+                </a:solidFill>
+                <a:latin typeface="Cambria Math"/>
+              </a:rPr>
+              <a:t>out</a:t>
+            </a:r>
+            <a:r>
+              <a:rPr sz="1400" b="0">
+                <a:solidFill>
+                  <a:srgbClr val="1E2733"/>
+                </a:solidFill>
+                <a:latin typeface="Cambria Math"/>
+              </a:rPr>
+              <a:t> d</a:t>
+            </a:r>
+            <a:r>
+              <a:rPr sz="1000" baseline="-25000">
+                <a:solidFill>
+                  <a:srgbClr val="1E2733"/>
+                </a:solidFill>
+                <a:latin typeface="Cambria Math"/>
+              </a:rPr>
+              <a:t>f</a:t>
+            </a:r>
+            <a:r>
+              <a:rPr sz="1400" b="0">
+                <a:solidFill>
+                  <a:srgbClr val="1E2733"/>
+                </a:solidFill>
+                <a:latin typeface="Cambria Math"/>
+              </a:rPr>
+              <a:t> k</a:t>
+            </a:r>
+            <a:r>
+              <a:rPr sz="1000" baseline="-25000">
+                <a:solidFill>
+                  <a:srgbClr val="1E2733"/>
+                </a:solidFill>
+                <a:latin typeface="Cambria Math"/>
+              </a:rPr>
+              <a:t>sol</a:t>
+            </a:r>
+            <a:r>
+              <a:rPr sz="1400" b="0">
+                <a:solidFill>
+                  <a:srgbClr val="1E2733"/>
+                </a:solidFill>
+                <a:latin typeface="Cambria Math"/>
+              </a:rPr>
+              <a:t> P</a:t>
+            </a:r>
+            <a:r>
+              <a:rPr sz="1000" baseline="-25000">
+                <a:solidFill>
+                  <a:srgbClr val="1E2733"/>
+                </a:solidFill>
+                <a:latin typeface="Cambria Math"/>
+              </a:rPr>
+              <a:t>win</a:t>
+            </a:r>
+            <a:r>
+              <a:rPr sz="1400" b="0">
+                <a:solidFill>
+                  <a:srgbClr val="1E2733"/>
+                </a:solidFill>
+                <a:latin typeface="Cambria Math"/>
+              </a:rPr>
+              <a:t> E</a:t>
+            </a:r>
+            <a:r>
+              <a:rPr sz="1000" baseline="-25000">
+                <a:solidFill>
+                  <a:srgbClr val="1E2733"/>
+                </a:solidFill>
+                <a:latin typeface="Cambria Math"/>
+              </a:rPr>
+              <a:t>win</a:t>
+            </a:r>
+            <a:r>
+              <a:rPr sz="1400" b="0">
+                <a:solidFill>
+                  <a:srgbClr val="1E2733"/>
+                </a:solidFill>
+                <a:latin typeface="Cambria Math"/>
+              </a:rPr>
+              <a:t>(p,t)</a:t>
             </a:r>
           </a:p>
           <a:p>
@@ -32538,7 +34875,25 @@
                 </a:solidFill>
                 <a:latin typeface="Noto Sans TC"/>
               </a:rPr>
-              <a:t>• S_out：室外日照強度</a:t>
+              <a:t>• S</a:t>
+            </a:r>
+            <a:r>
+              <a:rPr sz="800" baseline="-25000">
+                <a:solidFill>
+                  <a:srgbClr val="1E2733"/>
+                </a:solidFill>
+                <a:latin typeface="Noto Sans TC"/>
+              </a:rPr>
+              <a:t>out</a:t>
+            </a:r>
+            <a:r>
+              <a:rPr sz="1200" b="0">
+                <a:solidFill>
+                  <a:srgbClr val="1E2733"/>
+                </a:solidFill>
+                <a:latin typeface="Noto Sans TC"/>
+              </a:rPr>
+              <a:t>：室外日照強度</a:t>
             </a:r>
           </a:p>
           <a:p>
@@ -32563,7 +34918,25 @@
                 </a:solidFill>
                 <a:latin typeface="Noto Sans TC"/>
               </a:rPr>
-              <a:t>• d_f：與時間、季節或日照方向相關的折減</a:t>
+              <a:t>• d</a:t>
+            </a:r>
+            <a:r>
+              <a:rPr sz="800" baseline="-25000">
+                <a:solidFill>
+                  <a:srgbClr val="1E2733"/>
+                </a:solidFill>
+                <a:latin typeface="Noto Sans TC"/>
+              </a:rPr>
+              <a:t>f</a:t>
+            </a:r>
+            <a:r>
+              <a:rPr sz="1200" b="0">
+                <a:solidFill>
+                  <a:srgbClr val="1E2733"/>
+                </a:solidFill>
+                <a:latin typeface="Noto Sans TC"/>
+              </a:rPr>
+              <a:t>：與時間、季節或日照方向相關的折減</a:t>
             </a:r>
           </a:p>
           <a:p>
@@ -32588,7 +34961,25 @@
                 </a:solidFill>
                 <a:latin typeface="Noto Sans TC"/>
               </a:rPr>
-              <a:t>• k_sol：窗戶日照轉換係數</a:t>
+              <a:t>• k</a:t>
+            </a:r>
+            <a:r>
+              <a:rPr sz="800" baseline="-25000">
+                <a:solidFill>
+                  <a:srgbClr val="1E2733"/>
+                </a:solidFill>
+                <a:latin typeface="Noto Sans TC"/>
+              </a:rPr>
+              <a:t>sol</a:t>
+            </a:r>
+            <a:r>
+              <a:rPr sz="1200" b="0">
+                <a:solidFill>
+                  <a:srgbClr val="1E2733"/>
+                </a:solidFill>
+                <a:latin typeface="Noto Sans TC"/>
+              </a:rPr>
+              <a:t>：窗戶日照轉換係數</a:t>
             </a:r>
           </a:p>
           <a:p>
@@ -32613,7 +35004,25 @@
                 </a:solidFill>
                 <a:latin typeface="Noto Sans TC"/>
               </a:rPr>
-              <a:t>• E_win：窗戶到室內點的距離、方向與遮蔽權重</a:t>
+              <a:t>• E</a:t>
+            </a:r>
+            <a:r>
+              <a:rPr sz="800" baseline="-25000">
+                <a:solidFill>
+                  <a:srgbClr val="1E2733"/>
+                </a:solidFill>
+                <a:latin typeface="Noto Sans TC"/>
+              </a:rPr>
+              <a:t>win</a:t>
+            </a:r>
+            <a:r>
+              <a:rPr sz="1200" b="0">
+                <a:solidFill>
+                  <a:srgbClr val="1E2733"/>
+                </a:solidFill>
+                <a:latin typeface="Noto Sans TC"/>
+              </a:rPr>
+              <a:t>：窗戶到室內點的距離、方向與遮蔽權重</a:t>
             </a:r>
           </a:p>
         </p:txBody>
@@ -32838,7 +35247,237 @@
                 </a:solidFill>
                 <a:latin typeface="Cambria Math"/>
               </a:rPr>
-              <a:t>L_lightᵈⁱʳ(p,t) = G_light P_light E_light(p,t)</a:t>
+              <a:t>L</a:t>
+            </a:r>
+            <a:r>
+              <a:rPr sz="1000" baseline="-25000">
+                <a:solidFill>
+                  <a:srgbClr val="1E2733"/>
+                </a:solidFill>
+                <a:latin typeface="Cambria Math"/>
+              </a:rPr>
+              <a:t>light</a:t>
+            </a:r>
+            <a:r>
+              <a:rPr sz="1400" b="0">
+                <a:solidFill>
+                  <a:srgbClr val="1E2733"/>
+                </a:solidFill>
+                <a:latin typeface="Cambria Math"/>
+              </a:rPr>
+              <a:t>ᵈⁱʳ(p,t) = G</a:t>
+            </a:r>
+            <a:r>
+              <a:rPr sz="1000" baseline="-25000">
+                <a:solidFill>
+                  <a:srgbClr val="1E2733"/>
+                </a:solidFill>
+                <a:latin typeface="Cambria Math"/>
+              </a:rPr>
+              <a:t>light</a:t>
+            </a:r>
+            <a:r>
+              <a:rPr sz="1400" b="0">
+                <a:solidFill>
+                  <a:srgbClr val="1E2733"/>
+                </a:solidFill>
+                <a:latin typeface="Cambria Math"/>
+              </a:rPr>
+              <a:t> P</a:t>
+            </a:r>
+            <a:r>
+              <a:rPr sz="1000" baseline="-25000">
+                <a:solidFill>
+                  <a:srgbClr val="1E2733"/>
+                </a:solidFill>
+                <a:latin typeface="Cambria Math"/>
+              </a:rPr>
+              <a:t>light</a:t>
+            </a:r>
+            <a:r>
+              <a:rPr sz="1400" b="0">
+                <a:solidFill>
+                  <a:srgbClr val="1E2733"/>
+                </a:solidFill>
+                <a:latin typeface="Cambria Math"/>
+              </a:rPr>
+              <a:t> A</a:t>
+            </a:r>
+            <a:r>
+              <a:rPr sz="1000" baseline="-25000">
+                <a:solidFill>
+                  <a:srgbClr val="1E2733"/>
+                </a:solidFill>
+                <a:latin typeface="Cambria Math"/>
+              </a:rPr>
+              <a:t>light</a:t>
+            </a:r>
+            <a:r>
+              <a:rPr sz="1400" b="0">
+                <a:solidFill>
+                  <a:srgbClr val="1E2733"/>
+                </a:solidFill>
+                <a:latin typeface="Cambria Math"/>
+              </a:rPr>
+              <a:t>(t) Φ</a:t>
+            </a:r>
+            <a:r>
+              <a:rPr sz="1000" baseline="-25000">
+                <a:solidFill>
+                  <a:srgbClr val="1E2733"/>
+                </a:solidFill>
+                <a:latin typeface="Cambria Math"/>
+              </a:rPr>
+              <a:t>light</a:t>
+            </a:r>
+            <a:r>
+              <a:rPr sz="1400" b="0">
+                <a:solidFill>
+                  <a:srgbClr val="1E2733"/>
+                </a:solidFill>
+                <a:latin typeface="Cambria Math"/>
+              </a:rPr>
+              <a:t>(p) Q</a:t>
+            </a:r>
+            <a:r>
+              <a:rPr sz="1000" baseline="-25000">
+                <a:solidFill>
+                  <a:srgbClr val="1E2733"/>
+                </a:solidFill>
+                <a:latin typeface="Cambria Math"/>
+              </a:rPr>
+              <a:t>light</a:t>
+            </a:r>
+            <a:r>
+              <a:rPr sz="1400" b="0">
+                <a:solidFill>
+                  <a:srgbClr val="1E2733"/>
+                </a:solidFill>
+                <a:latin typeface="Cambria Math"/>
+              </a:rPr>
+              <a:t>(p) V</a:t>
+            </a:r>
+            <a:r>
+              <a:rPr sz="1000" baseline="-25000">
+                <a:solidFill>
+                  <a:srgbClr val="1E2733"/>
+                </a:solidFill>
+                <a:latin typeface="Cambria Math"/>
+              </a:rPr>
+              <a:t>light</a:t>
+            </a:r>
+            <a:r>
+              <a:rPr sz="1400" b="0">
+                <a:solidFill>
+                  <a:srgbClr val="1E2733"/>
+                </a:solidFill>
+                <a:latin typeface="Cambria Math"/>
+              </a:rPr>
+              <a:t>(p)</a:t>
+            </a:r>
+          </a:p>
+          <a:p>
+            <a:pPr>
+              <a:lnSpc>
+                <a:spcPct val="114000"/>
+              </a:lnSpc>
+              <a:spcAft>
+                <a:spcPts val="400"/>
+              </a:spcAft>
+              <a:defRPr sz="1200">
+                <a:solidFill>
+                  <a:srgbClr val="1E2733"/>
+                </a:solidFill>
+                <a:latin typeface="Noto Sans TC"/>
+              </a:defRPr>
+            </a:pPr>
+            <a:r>
+              <a:rPr sz="1200" b="0">
+                <a:solidFill>
+                  <a:srgbClr val="1E2733"/>
+                </a:solidFill>
+                <a:latin typeface="Noto Sans TC"/>
+              </a:rPr>
+              <a:t>• Φ</a:t>
+            </a:r>
+            <a:r>
+              <a:rPr sz="800" baseline="-25000">
+                <a:solidFill>
+                  <a:srgbClr val="1E2733"/>
+                </a:solidFill>
+                <a:latin typeface="Noto Sans TC"/>
+              </a:rPr>
+              <a:t>light</a:t>
+            </a:r>
+            <a:r>
+              <a:rPr sz="1200" b="0">
+                <a:solidFill>
+                  <a:srgbClr val="1E2733"/>
+                </a:solidFill>
+                <a:latin typeface="Noto Sans TC"/>
+              </a:rPr>
+              <a:t>：由光束角推得的 cosine 方向權重</a:t>
+            </a:r>
+          </a:p>
+          <a:p>
+            <a:pPr>
+              <a:lnSpc>
+                <a:spcPct val="114000"/>
+              </a:lnSpc>
+              <a:spcAft>
+                <a:spcPts val="400"/>
+              </a:spcAft>
+              <a:defRPr sz="1200">
+                <a:solidFill>
+                  <a:srgbClr val="1E2733"/>
+                </a:solidFill>
+                <a:latin typeface="Noto Sans TC"/>
+              </a:defRPr>
+            </a:pPr>
+            <a:r>
+              <a:rPr sz="1200" b="0">
+                <a:solidFill>
+                  <a:srgbClr val="1E2733"/>
+                </a:solidFill>
+                <a:latin typeface="Noto Sans TC"/>
+              </a:rPr>
+              <a:t>• Q</a:t>
+            </a:r>
+            <a:r>
+              <a:rPr sz="800" baseline="-25000">
+                <a:solidFill>
+                  <a:srgbClr val="1E2733"/>
+                </a:solidFill>
+                <a:latin typeface="Noto Sans TC"/>
+              </a:rPr>
+              <a:t>light</a:t>
+            </a:r>
+            <a:r>
+              <a:rPr sz="1200" b="0">
+                <a:solidFill>
+                  <a:srgbClr val="1E2733"/>
+                </a:solidFill>
+                <a:latin typeface="Noto Sans TC"/>
+              </a:rPr>
+              <a:t>：參考距離正規化後的距離衰減；V</a:t>
+            </a:r>
+            <a:r>
+              <a:rPr sz="800" baseline="-25000">
+                <a:solidFill>
+                  <a:srgbClr val="1E2733"/>
+                </a:solidFill>
+                <a:latin typeface="Noto Sans TC"/>
+              </a:rPr>
+              <a:t>light</a:t>
+            </a:r>
+            <a:r>
+              <a:rPr sz="1200" b="0">
+                <a:solidFill>
+                  <a:srgbClr val="1E2733"/>
+                </a:solidFill>
+                <a:latin typeface="Noto Sans TC"/>
+              </a:rPr>
+              <a:t>：遮蔽或可見性</a:t>
             </a:r>
           </a:p>
           <a:p>
@@ -32863,7 +35502,25 @@
                 </a:solidFill>
                 <a:latin typeface="Cambria Math"/>
               </a:rPr>
-              <a:t>L_winᵃᵐᵇ(p,t)：窗戶帶來的擴散環境光</a:t>
+              <a:t>L</a:t>
+            </a:r>
+            <a:r>
+              <a:rPr sz="1000" baseline="-25000">
+                <a:solidFill>
+                  <a:srgbClr val="1E2733"/>
+                </a:solidFill>
+                <a:latin typeface="Cambria Math"/>
+              </a:rPr>
+              <a:t>win</a:t>
+            </a:r>
+            <a:r>
+              <a:rPr sz="1400" b="0">
+                <a:solidFill>
+                  <a:srgbClr val="1E2733"/>
+                </a:solidFill>
+                <a:latin typeface="Cambria Math"/>
+              </a:rPr>
+              <a:t>ᵃᵐᵇ(p,t)：窗戶帶來的擴散環境光</a:t>
             </a:r>
           </a:p>
           <a:p>
@@ -32888,7 +35545,7 @@
                 </a:solidFill>
                 <a:latin typeface="Noto Sans TC"/>
               </a:rPr>
-              <a:t>• G_light：燈具光通量尺度</a:t>
+              <a:t>• 直射與環境光分開，可描述窗邊與全室背景亮度</a:t>
             </a:r>
           </a:p>
           <a:p>
@@ -32913,32 +35570,7 @@
                 </a:solidFill>
                 <a:latin typeface="Noto Sans TC"/>
               </a:rPr>
-              <a:t>• P_light：燈具啟動或校正後影響尺度</a:t>
-            </a:r>
-          </a:p>
-          <a:p>
-            <a:pPr>
-              <a:lnSpc>
-                <a:spcPct val="114000"/>
-              </a:lnSpc>
-              <a:spcAft>
-                <a:spcPts val="400"/>
-              </a:spcAft>
-              <a:defRPr sz="1200">
-                <a:solidFill>
-                  <a:srgbClr val="1E2733"/>
-                </a:solidFill>
-                <a:latin typeface="Noto Sans TC"/>
-              </a:defRPr>
-            </a:pPr>
-            <a:r>
-              <a:rPr sz="1200" b="0">
-                <a:solidFill>
-                  <a:srgbClr val="1E2733"/>
-                </a:solidFill>
-                <a:latin typeface="Noto Sans TC"/>
-              </a:rPr>
-              <a:t>• 直射與環境光分開，可描述窗邊與全室背景亮度</a:t>
+              <a:t>• 數值例：500×1×0.8×0.5×0.4×1=80 lux</a:t>
             </a:r>
           </a:p>
         </p:txBody>
@@ -33157,7 +35789,7 @@
                 </a:solidFill>
                 <a:latin typeface="Noto Sans TC"/>
               </a:rPr>
-              <a:t>公式、符號意義、限制與可主張範圍</a:t>
+              <a:t>公式、符號意義、假設與限制</a:t>
             </a:r>
           </a:p>
         </p:txBody>
@@ -33382,7 +36014,115 @@
                 </a:solidFill>
                 <a:latin typeface="Cambria Math"/>
               </a:rPr>
-              <a:t>Iʳᵉᶠˡ(p,t) = Σ_s ρ_s Ī_s A_sʳᵉˡ exp(-||p-c_s||/ℓ_s)</a:t>
+              <a:t>Iʳᵉᶠˡ(p,t) = Σ</a:t>
+            </a:r>
+            <a:r>
+              <a:rPr sz="1000" baseline="-25000">
+                <a:solidFill>
+                  <a:srgbClr val="1E2733"/>
+                </a:solidFill>
+                <a:latin typeface="Cambria Math"/>
+              </a:rPr>
+              <a:t>s</a:t>
+            </a:r>
+            <a:r>
+              <a:rPr sz="1400" b="0">
+                <a:solidFill>
+                  <a:srgbClr val="1E2733"/>
+                </a:solidFill>
+                <a:latin typeface="Cambria Math"/>
+              </a:rPr>
+              <a:t> ρ</a:t>
+            </a:r>
+            <a:r>
+              <a:rPr sz="1000" baseline="-25000">
+                <a:solidFill>
+                  <a:srgbClr val="1E2733"/>
+                </a:solidFill>
+                <a:latin typeface="Cambria Math"/>
+              </a:rPr>
+              <a:t>s</a:t>
+            </a:r>
+            <a:r>
+              <a:rPr sz="1400" b="0">
+                <a:solidFill>
+                  <a:srgbClr val="1E2733"/>
+                </a:solidFill>
+                <a:latin typeface="Cambria Math"/>
+              </a:rPr>
+              <a:t> Ī</a:t>
+            </a:r>
+            <a:r>
+              <a:rPr sz="1000" baseline="-25000">
+                <a:solidFill>
+                  <a:srgbClr val="1E2733"/>
+                </a:solidFill>
+                <a:latin typeface="Cambria Math"/>
+              </a:rPr>
+              <a:t>s</a:t>
+            </a:r>
+            <a:r>
+              <a:rPr sz="1400" b="0">
+                <a:solidFill>
+                  <a:srgbClr val="1E2733"/>
+                </a:solidFill>
+                <a:latin typeface="Cambria Math"/>
+              </a:rPr>
+              <a:t> A</a:t>
+            </a:r>
+            <a:r>
+              <a:rPr sz="1000" baseline="-25000">
+                <a:solidFill>
+                  <a:srgbClr val="1E2733"/>
+                </a:solidFill>
+                <a:latin typeface="Cambria Math"/>
+              </a:rPr>
+              <a:t>s</a:t>
+            </a:r>
+            <a:r>
+              <a:rPr sz="1400" b="0">
+                <a:solidFill>
+                  <a:srgbClr val="1E2733"/>
+                </a:solidFill>
+                <a:latin typeface="Cambria Math"/>
+              </a:rPr>
+              <a:t>ʳᵉˡ exp(-||p-c</a:t>
+            </a:r>
+            <a:r>
+              <a:rPr sz="1000" baseline="-25000">
+                <a:solidFill>
+                  <a:srgbClr val="1E2733"/>
+                </a:solidFill>
+                <a:latin typeface="Cambria Math"/>
+              </a:rPr>
+              <a:t>s</a:t>
+            </a:r>
+            <a:r>
+              <a:rPr sz="1400" b="0">
+                <a:solidFill>
+                  <a:srgbClr val="1E2733"/>
+                </a:solidFill>
+                <a:latin typeface="Cambria Math"/>
+              </a:rPr>
+              <a:t>||/ℓ</a:t>
+            </a:r>
+            <a:r>
+              <a:rPr sz="1000" baseline="-25000">
+                <a:solidFill>
+                  <a:srgbClr val="1E2733"/>
+                </a:solidFill>
+                <a:latin typeface="Cambria Math"/>
+              </a:rPr>
+              <a:t>s</a:t>
+            </a:r>
+            <a:r>
+              <a:rPr sz="1400" b="0">
+                <a:solidFill>
+                  <a:srgbClr val="1E2733"/>
+                </a:solidFill>
+                <a:latin typeface="Cambria Math"/>
+              </a:rPr>
+              <a:t>)</a:t>
             </a:r>
           </a:p>
           <a:p>
@@ -33407,7 +36147,61 @@
                 </a:solidFill>
                 <a:latin typeface="Cambria Math"/>
               </a:rPr>
-              <a:t>× max(0, n_s·r̂_s→p) V_s(p)</a:t>
+              <a:t>× max(0, n</a:t>
+            </a:r>
+            <a:r>
+              <a:rPr sz="1000" baseline="-25000">
+                <a:solidFill>
+                  <a:srgbClr val="1E2733"/>
+                </a:solidFill>
+                <a:latin typeface="Cambria Math"/>
+              </a:rPr>
+              <a:t>s</a:t>
+            </a:r>
+            <a:r>
+              <a:rPr sz="1400" b="0">
+                <a:solidFill>
+                  <a:srgbClr val="1E2733"/>
+                </a:solidFill>
+                <a:latin typeface="Cambria Math"/>
+              </a:rPr>
+              <a:t>·r̂</a:t>
+            </a:r>
+            <a:r>
+              <a:rPr sz="1000" baseline="-25000">
+                <a:solidFill>
+                  <a:srgbClr val="1E2733"/>
+                </a:solidFill>
+                <a:latin typeface="Cambria Math"/>
+              </a:rPr>
+              <a:t>s</a:t>
+            </a:r>
+            <a:r>
+              <a:rPr sz="1400" b="0">
+                <a:solidFill>
+                  <a:srgbClr val="1E2733"/>
+                </a:solidFill>
+                <a:latin typeface="Cambria Math"/>
+              </a:rPr>
+              <a:t>→p) V</a:t>
+            </a:r>
+            <a:r>
+              <a:rPr sz="1000" baseline="-25000">
+                <a:solidFill>
+                  <a:srgbClr val="1E2733"/>
+                </a:solidFill>
+                <a:latin typeface="Cambria Math"/>
+              </a:rPr>
+              <a:t>s</a:t>
+            </a:r>
+            <a:r>
+              <a:rPr sz="1400" b="0">
+                <a:solidFill>
+                  <a:srgbClr val="1E2733"/>
+                </a:solidFill>
+                <a:latin typeface="Cambria Math"/>
+              </a:rPr>
+              <a:t>(p)</a:t>
             </a:r>
           </a:p>
           <a:p>
@@ -33457,7 +36251,25 @@
                 </a:solidFill>
                 <a:latin typeface="Noto Sans TC"/>
               </a:rPr>
-              <a:t>• ρ_s：表面反射率</a:t>
+              <a:t>• ρ</a:t>
+            </a:r>
+            <a:r>
+              <a:rPr sz="800" baseline="-25000">
+                <a:solidFill>
+                  <a:srgbClr val="1E2733"/>
+                </a:solidFill>
+                <a:latin typeface="Noto Sans TC"/>
+              </a:rPr>
+              <a:t>s</a:t>
+            </a:r>
+            <a:r>
+              <a:rPr sz="1200" b="0">
+                <a:solidFill>
+                  <a:srgbClr val="1E2733"/>
+                </a:solidFill>
+                <a:latin typeface="Noto Sans TC"/>
+              </a:rPr>
+              <a:t>：表面反射率</a:t>
             </a:r>
           </a:p>
           <a:p>
@@ -33482,7 +36294,25 @@
                 </a:solidFill>
                 <a:latin typeface="Noto Sans TC"/>
               </a:rPr>
-              <a:t>• Ī_s：表面接收到的平均照度</a:t>
+              <a:t>• Ī</a:t>
+            </a:r>
+            <a:r>
+              <a:rPr sz="800" baseline="-25000">
+                <a:solidFill>
+                  <a:srgbClr val="1E2733"/>
+                </a:solidFill>
+                <a:latin typeface="Noto Sans TC"/>
+              </a:rPr>
+              <a:t>s</a:t>
+            </a:r>
+            <a:r>
+              <a:rPr sz="1200" b="0">
+                <a:solidFill>
+                  <a:srgbClr val="1E2733"/>
+                </a:solidFill>
+                <a:latin typeface="Noto Sans TC"/>
+              </a:rPr>
+              <a:t>：表面接收到的平均照度</a:t>
             </a:r>
           </a:p>
         </p:txBody>
@@ -33659,7 +36489,7 @@
                 </a:solidFill>
                 <a:latin typeface="Noto Sans TC"/>
               </a:rPr>
-              <a:t>限制與說法</a:t>
+              <a:t>模型限制</a:t>
             </a:r>
           </a:p>
         </p:txBody>
@@ -33782,7 +36612,7 @@
                 </a:solidFill>
                 <a:latin typeface="Noto Sans TC"/>
               </a:rPr>
-              <a:t>• 可主張改善照度主要趨勢</a:t>
+              <a:t>• 主要用途是改善照度空間趨勢</a:t>
             </a:r>
           </a:p>
           <a:p>
@@ -33807,7 +36637,32 @@
                 </a:solidFill>
                 <a:latin typeface="Noto Sans TC"/>
               </a:rPr>
-              <a:t>• 不能主張達到精密光學模擬等級</a:t>
+              <a:t>• 不等同精密光學模擬等級</a:t>
+            </a:r>
+          </a:p>
+          <a:p>
+            <a:pPr>
+              <a:lnSpc>
+                <a:spcPct val="114000"/>
+              </a:lnSpc>
+              <a:spcAft>
+                <a:spcPts val="400"/>
+              </a:spcAft>
+              <a:defRPr sz="1200">
+                <a:solidFill>
+                  <a:srgbClr val="1E2733"/>
+                </a:solidFill>
+                <a:latin typeface="Noto Sans TC"/>
+              </a:defRPr>
+            </a:pPr>
+            <a:r>
+              <a:rPr sz="1200" b="0">
+                <a:solidFill>
+                  <a:srgbClr val="1E2733"/>
+                </a:solidFill>
+                <a:latin typeface="Noto Sans TC"/>
+              </a:rPr>
+              <a:t>• 數值例：0.6×200×0.5×0.4×0.8×1=19.2 lux</a:t>
             </a:r>
           </a:p>
         </p:txBody>
@@ -34026,7 +36881,7 @@
                 </a:solidFill>
                 <a:latin typeface="Noto Sans TC"/>
               </a:rPr>
-              <a:t>公式、符號意義、限制與可主張範圍</a:t>
+              <a:t>公式、符號意義、假設與限制</a:t>
             </a:r>
           </a:p>
         </p:txBody>
@@ -34351,7 +37206,7 @@
                 </a:solidFill>
                 <a:latin typeface="Noto Sans TC"/>
               </a:rPr>
-              <a:t>• 比 affine 多了交互項，仍保持低階可解釋</a:t>
+              <a:t>• 係數會依變數 v 與當次感測校正狀態而定</a:t>
             </a:r>
           </a:p>
         </p:txBody>
@@ -34677,6 +37532,31 @@
                 <a:latin typeface="Noto Sans TC"/>
               </a:rPr>
               <a:t>• 但不是唯一決定任意複雜真實場</a:t>
+            </a:r>
+          </a:p>
+          <a:p>
+            <a:pPr>
+              <a:lnSpc>
+                <a:spcPct val="114000"/>
+              </a:lnSpc>
+              <a:spcAft>
+                <a:spcPts val="400"/>
+              </a:spcAft>
+              <a:defRPr sz="1200">
+                <a:solidFill>
+                  <a:srgbClr val="1E2733"/>
+                </a:solidFill>
+                <a:latin typeface="Noto Sans TC"/>
+              </a:defRPr>
+            </a:pPr>
+            <a:r>
+              <a:rPr sz="1200" b="0">
+                <a:solidFill>
+                  <a:srgbClr val="1E2733"/>
+                </a:solidFill>
+                <a:latin typeface="Noto Sans TC"/>
+              </a:rPr>
+              <a:t>• 數值例：X=Y=Z=0.5 → C=0.375</a:t>
             </a:r>
           </a:p>
         </p:txBody>
@@ -34895,7 +37775,7 @@
                 </a:solidFill>
                 <a:latin typeface="Noto Sans TC"/>
               </a:rPr>
-              <a:t>公式、符號意義、限制與可主張範圍</a:t>
+              <a:t>公式、符號意義、假設與限制</a:t>
             </a:r>
           </a:p>
         </p:txBody>
@@ -35618,6 +38498,85 @@
                 <a:latin typeface="Noto Sans TC"/>
               </a:rPr>
               <a:t>• 這一步讓模型與真實稀疏感測資料對齊</a:t>
+            </a:r>
+          </a:p>
+          <a:p>
+            <a:pPr>
+              <a:lnSpc>
+                <a:spcPct val="114000"/>
+              </a:lnSpc>
+              <a:spcAft>
+                <a:spcPts val="400"/>
+              </a:spcAft>
+              <a:defRPr sz="1200">
+                <a:solidFill>
+                  <a:srgbClr val="1E2733"/>
+                </a:solidFill>
+                <a:latin typeface="Noto Sans TC"/>
+              </a:defRPr>
+            </a:pPr>
+            <a:r>
+              <a:rPr sz="1200" b="0">
+                <a:solidFill>
+                  <a:srgbClr val="1E2733"/>
+                </a:solidFill>
+                <a:latin typeface="Noto Sans TC"/>
+              </a:rPr>
+              <a:t>• 數值例：O</a:t>
+            </a:r>
+            <a:r>
+              <a:rPr sz="800" baseline="-25000">
+                <a:solidFill>
+                  <a:srgbClr val="1E2733"/>
+                </a:solidFill>
+                <a:latin typeface="Noto Sans TC"/>
+              </a:rPr>
+              <a:t>T</a:t>
+            </a:r>
+            <a:r>
+              <a:rPr sz="1200" b="0">
+                <a:solidFill>
+                  <a:srgbClr val="1E2733"/>
+                </a:solidFill>
+                <a:latin typeface="Noto Sans TC"/>
+              </a:rPr>
+              <a:t>=27.2,N</a:t>
+            </a:r>
+            <a:r>
+              <a:rPr sz="800" baseline="-25000">
+                <a:solidFill>
+                  <a:srgbClr val="1E2733"/>
+                </a:solidFill>
+                <a:latin typeface="Noto Sans TC"/>
+              </a:rPr>
+              <a:t>T</a:t>
+            </a:r>
+            <a:r>
+              <a:rPr sz="1200" b="0">
+                <a:solidFill>
+                  <a:srgbClr val="1E2733"/>
+                </a:solidFill>
+                <a:latin typeface="Noto Sans TC"/>
+              </a:rPr>
+              <a:t>=26.8 → r</a:t>
+            </a:r>
+            <a:r>
+              <a:rPr sz="800" baseline="-25000">
+                <a:solidFill>
+                  <a:srgbClr val="1E2733"/>
+                </a:solidFill>
+                <a:latin typeface="Noto Sans TC"/>
+              </a:rPr>
+              <a:t>T</a:t>
+            </a:r>
+            <a:r>
+              <a:rPr sz="1200" b="0">
+                <a:solidFill>
+                  <a:srgbClr val="1E2733"/>
+                </a:solidFill>
+                <a:latin typeface="Noto Sans TC"/>
+              </a:rPr>
+              <a:t>=+0.4°C</a:t>
             </a:r>
           </a:p>
         </p:txBody>
@@ -35836,7 +38795,7 @@
                 </a:solidFill>
                 <a:latin typeface="Noto Sans TC"/>
               </a:rPr>
-              <a:t>公式、符號意義、限制與可主張範圍</a:t>
+              <a:t>公式、符號意義、假設與限制</a:t>
             </a:r>
           </a:p>
         </p:txBody>
@@ -36070,7 +39029,7 @@
                 </a:solidFill>
                 <a:latin typeface="Cambria Math"/>
               </a:rPr>
-              <a:t>a,b,c∈{0,1</a:t>
+              <a:t>a,b,c∈B</a:t>
             </a:r>
             <a:r>
               <a:rPr sz="1400" b="0">
@@ -36079,7 +39038,7 @@
                 </a:solidFill>
                 <a:latin typeface="Cambria Math"/>
               </a:rPr>
-              <a:t>} rᵛ</a:t>
+              <a:t> rᵛ</a:t>
             </a:r>
             <a:r>
               <a:rPr sz="1000" baseline="-25000">
@@ -36122,7 +39081,61 @@
                 </a:solidFill>
                 <a:latin typeface="Cambria Math"/>
               </a:rPr>
-              <a:t>× ℓ_a(X) ℓ_b(Y) ℓ_c(Z)</a:t>
+              <a:t>× ℓ</a:t>
+            </a:r>
+            <a:r>
+              <a:rPr sz="1000" baseline="-25000">
+                <a:solidFill>
+                  <a:srgbClr val="1E2733"/>
+                </a:solidFill>
+                <a:latin typeface="Cambria Math"/>
+              </a:rPr>
+              <a:t>a</a:t>
+            </a:r>
+            <a:r>
+              <a:rPr sz="1400" b="0">
+                <a:solidFill>
+                  <a:srgbClr val="1E2733"/>
+                </a:solidFill>
+                <a:latin typeface="Cambria Math"/>
+              </a:rPr>
+              <a:t>(X) ℓ</a:t>
+            </a:r>
+            <a:r>
+              <a:rPr sz="1000" baseline="-25000">
+                <a:solidFill>
+                  <a:srgbClr val="1E2733"/>
+                </a:solidFill>
+                <a:latin typeface="Cambria Math"/>
+              </a:rPr>
+              <a:t>b</a:t>
+            </a:r>
+            <a:r>
+              <a:rPr sz="1400" b="0">
+                <a:solidFill>
+                  <a:srgbClr val="1E2733"/>
+                </a:solidFill>
+                <a:latin typeface="Cambria Math"/>
+              </a:rPr>
+              <a:t>(Y) ℓ</a:t>
+            </a:r>
+            <a:r>
+              <a:rPr sz="1000" baseline="-25000">
+                <a:solidFill>
+                  <a:srgbClr val="1E2733"/>
+                </a:solidFill>
+                <a:latin typeface="Cambria Math"/>
+              </a:rPr>
+              <a:t>c</a:t>
+            </a:r>
+            <a:r>
+              <a:rPr sz="1400" b="0">
+                <a:solidFill>
+                  <a:srgbClr val="1E2733"/>
+                </a:solidFill>
+                <a:latin typeface="Cambria Math"/>
+              </a:rPr>
+              <a:t>(Z), B={0,1}</a:t>
             </a:r>
           </a:p>
           <a:p>
@@ -36523,6 +39536,31 @@
                 <a:latin typeface="Noto Sans TC"/>
               </a:rPr>
               <a:t>• 這是本研究 8 點推估最核心的數學基礎</a:t>
+            </a:r>
+          </a:p>
+          <a:p>
+            <a:pPr>
+              <a:lnSpc>
+                <a:spcPct val="114000"/>
+              </a:lnSpc>
+              <a:spcAft>
+                <a:spcPts val="400"/>
+              </a:spcAft>
+              <a:defRPr sz="1200">
+                <a:solidFill>
+                  <a:srgbClr val="1E2733"/>
+                </a:solidFill>
+                <a:latin typeface="Noto Sans TC"/>
+              </a:defRPr>
+            </a:pPr>
+            <a:r>
+              <a:rPr sz="1200" b="0">
+                <a:solidFill>
+                  <a:srgbClr val="1E2733"/>
+                </a:solidFill>
+                <a:latin typeface="Noto Sans TC"/>
+              </a:rPr>
+              <a:t>• 數值例：中心點權重各 1/8，Σr=1.6 → C=0.2</a:t>
             </a:r>
           </a:p>
         </p:txBody>
@@ -36741,7 +39779,7 @@
                 </a:solidFill>
                 <a:latin typeface="Noto Sans TC"/>
               </a:rPr>
-              <a:t>公式、符號意義、限制與可主張範圍</a:t>
+              <a:t>公式、符號意義、假設與限制</a:t>
             </a:r>
           </a:p>
         </p:txBody>
@@ -37279,7 +40317,7 @@
                 </a:solidFill>
                 <a:latin typeface="Noto Sans TC"/>
               </a:rPr>
-              <a:t>主張邊界</a:t>
+              <a:t>適用範圍</a:t>
             </a:r>
           </a:p>
         </p:txBody>
@@ -37352,7 +40390,7 @@
                 </a:solidFill>
                 <a:latin typeface="Noto Sans TC"/>
               </a:rPr>
-              <a:t>• 我們證明的是三線性 residual correction 的一致性與可表示範圍</a:t>
+              <a:t>• 三線性 residual correction 在角點與觀測一致</a:t>
             </a:r>
           </a:p>
           <a:p>
@@ -37402,7 +40440,7 @@
                 </a:solidFill>
                 <a:latin typeface="Noto Sans TC"/>
               </a:rPr>
-              <a:t>• 所以主張是接近主要空間趨勢</a:t>
+              <a:t>• 適用於主要空間趨勢估計</a:t>
             </a:r>
           </a:p>
           <a:p>
@@ -37427,7 +40465,86 @@
                 </a:solidFill>
                 <a:latin typeface="Noto Sans TC"/>
               </a:rPr>
-              <a:t>• 不是宣稱無條件還原任意真實室內場</a:t>
+              <a:t>• 不等同無條件還原任意真實室內場</a:t>
+            </a:r>
+          </a:p>
+          <a:p>
+            <a:pPr>
+              <a:lnSpc>
+                <a:spcPct val="114000"/>
+              </a:lnSpc>
+              <a:spcAft>
+                <a:spcPts val="400"/>
+              </a:spcAft>
+              <a:defRPr sz="1200">
+                <a:solidFill>
+                  <a:srgbClr val="1E2733"/>
+                </a:solidFill>
+                <a:latin typeface="Noto Sans TC"/>
+              </a:defRPr>
+            </a:pPr>
+            <a:r>
+              <a:rPr sz="1200" b="0">
+                <a:solidFill>
+                  <a:srgbClr val="1E2733"/>
+                </a:solidFill>
+                <a:latin typeface="Noto Sans TC"/>
+              </a:rPr>
+              <a:t>• 數值例：N</a:t>
+            </a:r>
+            <a:r>
+              <a:rPr sz="800" baseline="-25000">
+                <a:solidFill>
+                  <a:srgbClr val="1E2733"/>
+                </a:solidFill>
+                <a:latin typeface="Noto Sans TC"/>
+              </a:rPr>
+              <a:t>T</a:t>
+            </a:r>
+            <a:r>
+              <a:rPr sz="1200" b="0">
+                <a:solidFill>
+                  <a:srgbClr val="1E2733"/>
+                </a:solidFill>
+                <a:latin typeface="Noto Sans TC"/>
+              </a:rPr>
+              <a:t>=26.8,C</a:t>
+            </a:r>
+            <a:r>
+              <a:rPr sz="800" baseline="-25000">
+                <a:solidFill>
+                  <a:srgbClr val="1E2733"/>
+                </a:solidFill>
+                <a:latin typeface="Noto Sans TC"/>
+              </a:rPr>
+              <a:t>T</a:t>
+            </a:r>
+            <a:r>
+              <a:rPr sz="1200" b="0">
+                <a:solidFill>
+                  <a:srgbClr val="1E2733"/>
+                </a:solidFill>
+                <a:latin typeface="Noto Sans TC"/>
+              </a:rPr>
+              <a:t>=0.4 → F̂</a:t>
+            </a:r>
+            <a:r>
+              <a:rPr sz="800" baseline="-25000">
+                <a:solidFill>
+                  <a:srgbClr val="1E2733"/>
+                </a:solidFill>
+                <a:latin typeface="Noto Sans TC"/>
+              </a:rPr>
+              <a:t>T</a:t>
+            </a:r>
+            <a:r>
+              <a:rPr sz="1200" b="0">
+                <a:solidFill>
+                  <a:srgbClr val="1E2733"/>
+                </a:solidFill>
+                <a:latin typeface="Noto Sans TC"/>
+              </a:rPr>
+              <a:t>=27.2°C</a:t>
             </a:r>
           </a:p>
         </p:txBody>
@@ -37646,7 +40763,7 @@
                 </a:solidFill>
                 <a:latin typeface="Noto Sans TC"/>
               </a:rPr>
-              <a:t>公式、符號意義、限制與可主張範圍</a:t>
+              <a:t>公式、符號意義、假設與限制</a:t>
             </a:r>
           </a:p>
         </p:txBody>
@@ -38148,7 +41265,7 @@
                 </a:solidFill>
                 <a:latin typeface="Noto Sans TC"/>
               </a:rPr>
-              <a:t>嚴謹主張</a:t>
+              <a:t>適用範圍</a:t>
             </a:r>
           </a:p>
         </p:txBody>
@@ -38196,7 +41313,7 @@
                 </a:solidFill>
                 <a:latin typeface="Noto Sans TC"/>
               </a:rPr>
-              <a:t>• 這不是說所有室內場都一定是三線性</a:t>
+              <a:t>• 並非所有室內場都必然三線性</a:t>
             </a:r>
           </a:p>
           <a:p>
@@ -38221,7 +41338,7 @@
                 </a:solidFill>
                 <a:latin typeface="Noto Sans TC"/>
               </a:rPr>
-              <a:t>• 而是說在三線性 residual 假設下可完全重建</a:t>
+              <a:t>• 三線性 residual 假設下可完全重建</a:t>
             </a:r>
           </a:p>
           <a:p>
@@ -38246,7 +41363,7 @@
                 </a:solidFill>
                 <a:latin typeface="Noto Sans TC"/>
               </a:rPr>
-              <a:t>• 對平滑但非三線性的 residual，則用誤差界描述接近程度</a:t>
+              <a:t>• 平滑但非三線性的 residual 可由誤差界描述接近程度</a:t>
             </a:r>
           </a:p>
           <a:p>
@@ -38271,7 +41388,7 @@
                 </a:solidFill>
                 <a:latin typeface="Noto Sans TC"/>
               </a:rPr>
-              <a:t>• 對突發局部熱源、光斑或遮蔽尖峰，8 點不保證捕捉</a:t>
+              <a:t>• 突發局部熱源、光斑或遮蔽尖峰需額外資料補強</a:t>
             </a:r>
           </a:p>
           <a:p>
@@ -38296,7 +41413,32 @@
                 </a:solidFill>
                 <a:latin typeface="Noto Sans TC"/>
               </a:rPr>
-              <a:t>• 這樣的 claim boundary 比較嚴謹</a:t>
+              <a:t>• 此條件界定模型適用範圍</a:t>
+            </a:r>
+          </a:p>
+          <a:p>
+            <a:pPr>
+              <a:lnSpc>
+                <a:spcPct val="114000"/>
+              </a:lnSpc>
+              <a:spcAft>
+                <a:spcPts val="400"/>
+              </a:spcAft>
+              <a:defRPr sz="1200">
+                <a:solidFill>
+                  <a:srgbClr val="1E2733"/>
+                </a:solidFill>
+                <a:latin typeface="Noto Sans TC"/>
+              </a:defRPr>
+            </a:pPr>
+            <a:r>
+              <a:rPr sz="1200" b="0">
+                <a:solidFill>
+                  <a:srgbClr val="1E2733"/>
+                </a:solidFill>
+                <a:latin typeface="Noto Sans TC"/>
+              </a:rPr>
+              <a:t>• 數值例：R=0.2+0.3X+0.1Y，(0.5,0.5,0)→0.40</a:t>
             </a:r>
           </a:p>
         </p:txBody>
@@ -38515,7 +41657,7 @@
                 </a:solidFill>
                 <a:latin typeface="Noto Sans TC"/>
               </a:rPr>
-              <a:t>公式、符號意義、限制與可主張範圍</a:t>
+              <a:t>公式、符號意義、假設與限制</a:t>
             </a:r>
           </a:p>
         </p:txBody>
@@ -38692,7 +41834,7 @@
                 </a:solidFill>
                 <a:latin typeface="Noto Sans TC"/>
               </a:rPr>
-              <a:t>誤差上界</a:t>
+              <a:t>這個上界在衡量什麼</a:t>
             </a:r>
           </a:p>
         </p:txBody>
@@ -38740,24 +41882,17 @@
                 </a:solidFill>
                 <a:latin typeface="Cambria Math"/>
               </a:rPr>
-              <a:t>|Rᵥ(p,t) - Cᵥ(p,t)| ≤ W²M_xx/8 + L²M_yy/8</a:t>
-            </a:r>
-          </a:p>
-          <a:p>
-            <a:pPr>
-              <a:lnSpc>
-                <a:spcPct val="108000"/>
-              </a:lnSpc>
-              <a:spcAft>
-                <a:spcPts val="200"/>
-              </a:spcAft>
-              <a:defRPr sz="1400">
+              <a:t>|Rᵥ-Cᵥ| ≤ W²M</a:t>
+            </a:r>
+            <a:r>
+              <a:rPr sz="1000" baseline="-25000">
                 <a:solidFill>
                   <a:srgbClr val="1E2733"/>
                 </a:solidFill>
                 <a:latin typeface="Cambria Math"/>
-              </a:defRPr>
-            </a:pPr>
+              </a:rPr>
+              <a:t>xx</a:t>
+            </a:r>
             <a:r>
               <a:rPr sz="1400" b="0">
                 <a:solidFill>
@@ -38765,24 +41900,17 @@
                 </a:solidFill>
                 <a:latin typeface="Cambria Math"/>
               </a:rPr>
-              <a:t>+ H²M_zz/8</a:t>
-            </a:r>
-          </a:p>
-          <a:p>
-            <a:pPr>
-              <a:lnSpc>
-                <a:spcPct val="108000"/>
-              </a:lnSpc>
-              <a:spcAft>
-                <a:spcPts val="200"/>
-              </a:spcAft>
-              <a:defRPr sz="1400">
+              <a:t>/8 + L²M</a:t>
+            </a:r>
+            <a:r>
+              <a:rPr sz="1000" baseline="-25000">
                 <a:solidFill>
                   <a:srgbClr val="1E2733"/>
                 </a:solidFill>
                 <a:latin typeface="Cambria Math"/>
-              </a:defRPr>
-            </a:pPr>
+              </a:rPr>
+              <a:t>yy</a:t>
+            </a:r>
             <a:r>
               <a:rPr sz="1400" b="0">
                 <a:solidFill>
@@ -38790,24 +41918,17 @@
                 </a:solidFill>
                 <a:latin typeface="Cambria Math"/>
               </a:rPr>
-              <a:t>Rᵥ：真實 residual</a:t>
-            </a:r>
-          </a:p>
-          <a:p>
-            <a:pPr>
-              <a:lnSpc>
-                <a:spcPct val="108000"/>
-              </a:lnSpc>
-              <a:spcAft>
-                <a:spcPts val="200"/>
-              </a:spcAft>
-              <a:defRPr sz="1400">
+              <a:t>/8 + H²M</a:t>
+            </a:r>
+            <a:r>
+              <a:rPr sz="1000" baseline="-25000">
                 <a:solidFill>
                   <a:srgbClr val="1E2733"/>
                 </a:solidFill>
                 <a:latin typeface="Cambria Math"/>
-              </a:defRPr>
-            </a:pPr>
+              </a:rPr>
+              <a:t>zz</a:t>
+            </a:r>
             <a:r>
               <a:rPr sz="1400" b="0">
                 <a:solidFill>
@@ -38815,7 +41936,7 @@
                 </a:solidFill>
                 <a:latin typeface="Cambria Math"/>
               </a:rPr>
-              <a:t>Cᵥ：三線性校正 residual</a:t>
+              <a:t>/8</a:t>
             </a:r>
           </a:p>
           <a:p>
@@ -38840,7 +41961,136 @@
                 </a:solidFill>
                 <a:latin typeface="Noto Sans TC"/>
               </a:rPr>
-              <a:t>• W/L/H：房間寬、長、高</a:t>
+              <a:t>• 左邊：某個未量測點的 residual 可能補錯多少</a:t>
+            </a:r>
+          </a:p>
+          <a:p>
+            <a:pPr>
+              <a:lnSpc>
+                <a:spcPct val="114000"/>
+              </a:lnSpc>
+              <a:spcAft>
+                <a:spcPts val="400"/>
+              </a:spcAft>
+              <a:defRPr sz="1200">
+                <a:solidFill>
+                  <a:srgbClr val="1E2733"/>
+                </a:solidFill>
+                <a:latin typeface="Noto Sans TC"/>
+              </a:defRPr>
+            </a:pPr>
+            <a:r>
+              <a:rPr sz="1200" b="0">
+                <a:solidFill>
+                  <a:srgbClr val="1E2733"/>
+                </a:solidFill>
+                <a:latin typeface="Noto Sans TC"/>
+              </a:rPr>
+              <a:t>• M</a:t>
+            </a:r>
+            <a:r>
+              <a:rPr sz="800" baseline="-25000">
+                <a:solidFill>
+                  <a:srgbClr val="1E2733"/>
+                </a:solidFill>
+                <a:latin typeface="Noto Sans TC"/>
+              </a:rPr>
+              <a:t>xx</a:t>
+            </a:r>
+            <a:r>
+              <a:rPr sz="1200" b="0">
+                <a:solidFill>
+                  <a:srgbClr val="1E2733"/>
+                </a:solidFill>
+                <a:latin typeface="Noto Sans TC"/>
+              </a:rPr>
+              <a:t> ≥ max|∂²Rᵥ/∂x²|：x 方向曲率上界</a:t>
+            </a:r>
+          </a:p>
+          <a:p>
+            <a:pPr>
+              <a:lnSpc>
+                <a:spcPct val="114000"/>
+              </a:lnSpc>
+              <a:spcAft>
+                <a:spcPts val="400"/>
+              </a:spcAft>
+              <a:defRPr sz="1200">
+                <a:solidFill>
+                  <a:srgbClr val="1E2733"/>
+                </a:solidFill>
+                <a:latin typeface="Noto Sans TC"/>
+              </a:defRPr>
+            </a:pPr>
+            <a:r>
+              <a:rPr sz="1200" b="0">
+                <a:solidFill>
+                  <a:srgbClr val="1E2733"/>
+                </a:solidFill>
+                <a:latin typeface="Noto Sans TC"/>
+              </a:rPr>
+              <a:t>• M</a:t>
+            </a:r>
+            <a:r>
+              <a:rPr sz="800" baseline="-25000">
+                <a:solidFill>
+                  <a:srgbClr val="1E2733"/>
+                </a:solidFill>
+                <a:latin typeface="Noto Sans TC"/>
+              </a:rPr>
+              <a:t>yy</a:t>
+            </a:r>
+            <a:r>
+              <a:rPr sz="1200" b="0">
+                <a:solidFill>
+                  <a:srgbClr val="1E2733"/>
+                </a:solidFill>
+                <a:latin typeface="Noto Sans TC"/>
+              </a:rPr>
+              <a:t>、M</a:t>
+            </a:r>
+            <a:r>
+              <a:rPr sz="800" baseline="-25000">
+                <a:solidFill>
+                  <a:srgbClr val="1E2733"/>
+                </a:solidFill>
+                <a:latin typeface="Noto Sans TC"/>
+              </a:rPr>
+              <a:t>zz</a:t>
+            </a:r>
+            <a:r>
+              <a:rPr sz="1200" b="0">
+                <a:solidFill>
+                  <a:srgbClr val="1E2733"/>
+                </a:solidFill>
+                <a:latin typeface="Noto Sans TC"/>
+              </a:rPr>
+              <a:t> 同理對應 y/z 方向</a:t>
+            </a:r>
+          </a:p>
+          <a:p>
+            <a:pPr>
+              <a:lnSpc>
+                <a:spcPct val="114000"/>
+              </a:lnSpc>
+              <a:spcAft>
+                <a:spcPts val="400"/>
+              </a:spcAft>
+              <a:defRPr sz="1200">
+                <a:solidFill>
+                  <a:srgbClr val="1E2733"/>
+                </a:solidFill>
+                <a:latin typeface="Noto Sans TC"/>
+              </a:defRPr>
+            </a:pPr>
+            <a:r>
+              <a:rPr sz="1200" b="0">
+                <a:solidFill>
+                  <a:srgbClr val="1E2733"/>
+                </a:solidFill>
+                <a:latin typeface="Noto Sans TC"/>
+              </a:rPr>
+              <a:t>• W/L/H 越大，補間跨度越長</a:t>
             </a:r>
           </a:p>
         </p:txBody>
@@ -39017,7 +42267,7 @@
                 </a:solidFill>
                 <a:latin typeface="Noto Sans TC"/>
               </a:rPr>
-              <a:t>如何解釋「接近」</a:t>
+              <a:t>為什麼會這樣</a:t>
             </a:r>
           </a:p>
         </p:txBody>
@@ -39051,21 +42301,21 @@
               <a:spcAft>
                 <a:spcPts val="400"/>
               </a:spcAft>
-              <a:defRPr sz="1200">
-                <a:solidFill>
-                  <a:srgbClr val="1E2733"/>
-                </a:solidFill>
-                <a:latin typeface="Noto Sans TC"/>
-              </a:defRPr>
-            </a:pPr>
-            <a:r>
-              <a:rPr sz="1200" b="0">
-                <a:solidFill>
-                  <a:srgbClr val="1E2733"/>
-                </a:solidFill>
-                <a:latin typeface="Noto Sans TC"/>
-              </a:rPr>
-              <a:t>• M_xx/M_yy/M_zz 是 residual 二階曲率上界</a:t>
+              <a:defRPr sz="1100">
+                <a:solidFill>
+                  <a:srgbClr val="1E2733"/>
+                </a:solidFill>
+                <a:latin typeface="Noto Sans TC"/>
+              </a:defRPr>
+            </a:pPr>
+            <a:r>
+              <a:rPr sz="1100" b="0">
+                <a:solidFill>
+                  <a:srgbClr val="1E2733"/>
+                </a:solidFill>
+                <a:latin typeface="Noto Sans TC"/>
+              </a:rPr>
+              <a:t>• xx 表示對 x 微分兩次，不是 x×x</a:t>
             </a:r>
           </a:p>
           <a:p>
@@ -39076,21 +42326,21 @@
               <a:spcAft>
                 <a:spcPts val="400"/>
               </a:spcAft>
-              <a:defRPr sz="1200">
-                <a:solidFill>
-                  <a:srgbClr val="1E2733"/>
-                </a:solidFill>
-                <a:latin typeface="Noto Sans TC"/>
-              </a:defRPr>
-            </a:pPr>
-            <a:r>
-              <a:rPr sz="1200" b="0">
-                <a:solidFill>
-                  <a:srgbClr val="1E2733"/>
-                </a:solidFill>
-                <a:latin typeface="Noto Sans TC"/>
-              </a:rPr>
-              <a:t>• 曲率越小，代表 residual 越平滑</a:t>
+              <a:defRPr sz="1100">
+                <a:solidFill>
+                  <a:srgbClr val="1E2733"/>
+                </a:solidFill>
+                <a:latin typeface="Noto Sans TC"/>
+              </a:defRPr>
+            </a:pPr>
+            <a:r>
+              <a:rPr sz="1100" b="0">
+                <a:solidFill>
+                  <a:srgbClr val="1E2733"/>
+                </a:solidFill>
+                <a:latin typeface="Noto Sans TC"/>
+              </a:rPr>
+              <a:t>• 線性補間用端點連線近似中間曲線</a:t>
             </a:r>
           </a:p>
           <a:p>
@@ -39101,21 +42351,21 @@
               <a:spcAft>
                 <a:spcPts val="400"/>
               </a:spcAft>
-              <a:defRPr sz="1200">
-                <a:solidFill>
-                  <a:srgbClr val="1E2733"/>
-                </a:solidFill>
-                <a:latin typeface="Noto Sans TC"/>
-              </a:defRPr>
-            </a:pPr>
-            <a:r>
-              <a:rPr sz="1200" b="0">
-                <a:solidFill>
-                  <a:srgbClr val="1E2733"/>
-                </a:solidFill>
-                <a:latin typeface="Noto Sans TC"/>
-              </a:rPr>
-              <a:t>• 平滑時，8 點三線性補間誤差可被上界限制</a:t>
+              <a:defRPr sz="1100">
+                <a:solidFill>
+                  <a:srgbClr val="1E2733"/>
+                </a:solidFill>
+                <a:latin typeface="Noto Sans TC"/>
+              </a:defRPr>
+            </a:pPr>
+            <a:r>
+              <a:rPr sz="1100" b="0">
+                <a:solidFill>
+                  <a:srgbClr val="1E2733"/>
+                </a:solidFill>
+                <a:latin typeface="Noto Sans TC"/>
+              </a:rPr>
+              <a:t>• 若 residual 是直線，二階導數為 0</a:t>
             </a:r>
           </a:p>
           <a:p>
@@ -39126,21 +42376,21 @@
               <a:spcAft>
                 <a:spcPts val="400"/>
               </a:spcAft>
-              <a:defRPr sz="1200">
-                <a:solidFill>
-                  <a:srgbClr val="1E2733"/>
-                </a:solidFill>
-                <a:latin typeface="Noto Sans TC"/>
-              </a:defRPr>
-            </a:pPr>
-            <a:r>
-              <a:rPr sz="1200" b="0">
-                <a:solidFill>
-                  <a:srgbClr val="1E2733"/>
-                </a:solidFill>
-                <a:latin typeface="Noto Sans TC"/>
-              </a:rPr>
-              <a:t>• 所以可說「在平滑 residual 假設下接近真實情況」</a:t>
+              <a:defRPr sz="1100">
+                <a:solidFill>
+                  <a:srgbClr val="1E2733"/>
+                </a:solidFill>
+                <a:latin typeface="Noto Sans TC"/>
+              </a:defRPr>
+            </a:pPr>
+            <a:r>
+              <a:rPr sz="1100" b="0">
+                <a:solidFill>
+                  <a:srgbClr val="1E2733"/>
+                </a:solidFill>
+                <a:latin typeface="Noto Sans TC"/>
+              </a:rPr>
+              <a:t>• 曲率越大，中間點越可能偏離直線</a:t>
             </a:r>
           </a:p>
           <a:p>
@@ -39151,21 +42401,71 @@
               <a:spcAft>
                 <a:spcPts val="400"/>
               </a:spcAft>
-              <a:defRPr sz="1200">
-                <a:solidFill>
-                  <a:srgbClr val="1E2733"/>
-                </a:solidFill>
-                <a:latin typeface="Noto Sans TC"/>
-              </a:defRPr>
-            </a:pPr>
-            <a:r>
-              <a:rPr sz="1200" b="0">
-                <a:solidFill>
-                  <a:srgbClr val="1E2733"/>
-                </a:solidFill>
-                <a:latin typeface="Noto Sans TC"/>
-              </a:rPr>
-              <a:t>• 不能說高頻局部變化也一定準確</a:t>
+              <a:defRPr sz="1100">
+                <a:solidFill>
+                  <a:srgbClr val="1E2733"/>
+                </a:solidFill>
+                <a:latin typeface="Noto Sans TC"/>
+              </a:defRPr>
+            </a:pPr>
+            <a:r>
+              <a:rPr sz="1100" b="0">
+                <a:solidFill>
+                  <a:srgbClr val="1E2733"/>
+                </a:solidFill>
+                <a:latin typeface="Noto Sans TC"/>
+              </a:rPr>
+              <a:t>• 三線性補間是 x/y/z 三方向線性補間</a:t>
+            </a:r>
+          </a:p>
+          <a:p>
+            <a:pPr>
+              <a:lnSpc>
+                <a:spcPct val="114000"/>
+              </a:lnSpc>
+              <a:spcAft>
+                <a:spcPts val="400"/>
+              </a:spcAft>
+              <a:defRPr sz="1100">
+                <a:solidFill>
+                  <a:srgbClr val="1E2733"/>
+                </a:solidFill>
+                <a:latin typeface="Noto Sans TC"/>
+              </a:defRPr>
+            </a:pPr>
+            <a:r>
+              <a:rPr sz="1100" b="0">
+                <a:solidFill>
+                  <a:srgbClr val="1E2733"/>
+                </a:solidFill>
+                <a:latin typeface="Noto Sans TC"/>
+              </a:rPr>
+              <a:t>• 平滑 residual 可控；尖峰或光斑需更多資料</a:t>
+            </a:r>
+          </a:p>
+          <a:p>
+            <a:pPr>
+              <a:lnSpc>
+                <a:spcPct val="114000"/>
+              </a:lnSpc>
+              <a:spcAft>
+                <a:spcPts val="400"/>
+              </a:spcAft>
+              <a:defRPr sz="1100">
+                <a:solidFill>
+                  <a:srgbClr val="1E2733"/>
+                </a:solidFill>
+                <a:latin typeface="Noto Sans TC"/>
+              </a:defRPr>
+            </a:pPr>
+            <a:r>
+              <a:rPr sz="1100" b="0">
+                <a:solidFill>
+                  <a:srgbClr val="1E2733"/>
+                </a:solidFill>
+                <a:latin typeface="Noto Sans TC"/>
+              </a:rPr>
+              <a:t>• 數值例：W=6,L=4,H=3,M=(0.01,0.02,0.01) → bound≈0.096</a:t>
             </a:r>
           </a:p>
         </p:txBody>
@@ -39384,7 +42684,7 @@
                 </a:solidFill>
                 <a:latin typeface="Noto Sans TC"/>
               </a:rPr>
-              <a:t>公式、符號意義、限制與可主張範圍</a:t>
+              <a:t>公式、符號意義、假設與限制</a:t>
             </a:r>
           </a:p>
         </p:txBody>
@@ -39561,7 +42861,7 @@
                 </a:solidFill>
                 <a:latin typeface="Noto Sans TC"/>
               </a:rPr>
-              <a:t>特徵向量</a:t>
+              <a:t>before/after delta</a:t>
             </a:r>
           </a:p>
         </p:txBody>
@@ -39609,7 +42909,181 @@
                 </a:solidFill>
                 <a:latin typeface="Cambria Math"/>
               </a:rPr>
-              <a:t>φᵢ = [xᵢ,yᵢ,zᵢ,tᵢ, baseline, outdoor, F_temp,</a:t>
+              <a:t>Δy</a:t>
+            </a:r>
+            <a:r>
+              <a:rPr sz="1000" baseline="-25000">
+                <a:solidFill>
+                  <a:srgbClr val="1E2733"/>
+                </a:solidFill>
+                <a:latin typeface="Cambria Math"/>
+              </a:rPr>
+              <a:t>m</a:t>
+            </a:r>
+            <a:r>
+              <a:rPr sz="1400" b="0">
+                <a:solidFill>
+                  <a:srgbClr val="1E2733"/>
+                </a:solidFill>
+                <a:latin typeface="Cambria Math"/>
+              </a:rPr>
+              <a:t> = y</a:t>
+            </a:r>
+            <a:r>
+              <a:rPr sz="1000" baseline="-25000">
+                <a:solidFill>
+                  <a:srgbClr val="1E2733"/>
+                </a:solidFill>
+                <a:latin typeface="Cambria Math"/>
+              </a:rPr>
+              <a:t>m</a:t>
+            </a:r>
+            <a:r>
+              <a:rPr sz="1400" b="0">
+                <a:solidFill>
+                  <a:srgbClr val="1E2733"/>
+                </a:solidFill>
+                <a:latin typeface="Cambria Math"/>
+              </a:rPr>
+              <a:t>ᵃᶠᵗᵉʳ - y</a:t>
+            </a:r>
+            <a:r>
+              <a:rPr sz="1000" baseline="-25000">
+                <a:solidFill>
+                  <a:srgbClr val="1E2733"/>
+                </a:solidFill>
+                <a:latin typeface="Cambria Math"/>
+              </a:rPr>
+              <a:t>m</a:t>
+            </a:r>
+            <a:r>
+              <a:rPr sz="1400" b="0">
+                <a:solidFill>
+                  <a:srgbClr val="1E2733"/>
+                </a:solidFill>
+                <a:latin typeface="Cambria Math"/>
+              </a:rPr>
+              <a:t>ᵇᵉᶠᵒʳᵉ</a:t>
+            </a:r>
+          </a:p>
+          <a:p>
+            <a:pPr>
+              <a:lnSpc>
+                <a:spcPct val="108000"/>
+              </a:lnSpc>
+              <a:spcAft>
+                <a:spcPts val="200"/>
+              </a:spcAft>
+              <a:defRPr sz="1400">
+                <a:solidFill>
+                  <a:srgbClr val="1E2733"/>
+                </a:solidFill>
+                <a:latin typeface="Cambria Math"/>
+              </a:defRPr>
+            </a:pPr>
+            <a:r>
+              <a:rPr sz="1400" b="0">
+                <a:solidFill>
+                  <a:srgbClr val="1E2733"/>
+                </a:solidFill>
+                <a:latin typeface="Cambria Math"/>
+              </a:rPr>
+              <a:t>m ∈ {T,H,L}</a:t>
+            </a:r>
+          </a:p>
+          <a:p>
+            <a:pPr>
+              <a:lnSpc>
+                <a:spcPct val="108000"/>
+              </a:lnSpc>
+              <a:spcAft>
+                <a:spcPts val="200"/>
+              </a:spcAft>
+              <a:defRPr sz="1400">
+                <a:solidFill>
+                  <a:srgbClr val="1E2733"/>
+                </a:solidFill>
+                <a:latin typeface="Cambria Math"/>
+              </a:defRPr>
+            </a:pPr>
+            <a:r>
+              <a:rPr sz="1400" b="0">
+                <a:solidFill>
+                  <a:srgbClr val="1E2733"/>
+                </a:solidFill>
+                <a:latin typeface="Cambria Math"/>
+              </a:rPr>
+              <a:t>X</a:t>
+            </a:r>
+            <a:r>
+              <a:rPr sz="1000" baseline="-25000">
+                <a:solidFill>
+                  <a:srgbClr val="1E2733"/>
+                </a:solidFill>
+                <a:latin typeface="Cambria Math"/>
+              </a:rPr>
+              <a:t>i,k</a:t>
+            </a:r>
+            <a:r>
+              <a:rPr sz="1400" b="0">
+                <a:solidFill>
+                  <a:srgbClr val="1E2733"/>
+                </a:solidFill>
+                <a:latin typeface="Cambria Math"/>
+              </a:rPr>
+              <a:t>：第 i 個感測點對第 k 個裝置 envelope</a:t>
+            </a:r>
+          </a:p>
+          <a:p>
+            <a:pPr>
+              <a:lnSpc>
+                <a:spcPct val="108000"/>
+              </a:lnSpc>
+              <a:spcAft>
+                <a:spcPts val="200"/>
+              </a:spcAft>
+              <a:defRPr sz="1400">
+                <a:solidFill>
+                  <a:srgbClr val="1E2733"/>
+                </a:solidFill>
+                <a:latin typeface="Cambria Math"/>
+              </a:defRPr>
+            </a:pPr>
+            <a:r>
+              <a:rPr sz="1400" b="0">
+                <a:solidFill>
+                  <a:srgbClr val="1E2733"/>
+                </a:solidFill>
+                <a:latin typeface="Cambria Math"/>
+              </a:rPr>
+              <a:t>Δy</a:t>
+            </a:r>
+            <a:r>
+              <a:rPr sz="1000" baseline="-25000">
+                <a:solidFill>
+                  <a:srgbClr val="1E2733"/>
+                </a:solidFill>
+                <a:latin typeface="Cambria Math"/>
+              </a:rPr>
+              <a:t>m</a:t>
+            </a:r>
+            <a:r>
+              <a:rPr sz="1400" b="0">
+                <a:solidFill>
+                  <a:srgbClr val="1E2733"/>
+                </a:solidFill>
+                <a:latin typeface="Cambria Math"/>
+              </a:rPr>
+              <a:t> ≈ X β</a:t>
+            </a:r>
+            <a:r>
+              <a:rPr sz="1000" baseline="-25000">
+                <a:solidFill>
+                  <a:srgbClr val="1E2733"/>
+                </a:solidFill>
+                <a:latin typeface="Cambria Math"/>
+              </a:rPr>
+              <a:t>m</a:t>
             </a:r>
           </a:p>
           <a:p>
@@ -39634,82 +43108,7 @@
                 </a:solidFill>
                 <a:latin typeface="Noto Sans TC"/>
               </a:rPr>
-              <a:t>• F_hum, F_illum, activations, powers, envelopes]</a:t>
-            </a:r>
-          </a:p>
-          <a:p>
-            <a:pPr>
-              <a:lnSpc>
-                <a:spcPct val="108000"/>
-              </a:lnSpc>
-              <a:spcAft>
-                <a:spcPts val="200"/>
-              </a:spcAft>
-              <a:defRPr sz="1400">
-                <a:solidFill>
-                  <a:srgbClr val="1E2733"/>
-                </a:solidFill>
-                <a:latin typeface="Cambria Math"/>
-              </a:defRPr>
-            </a:pPr>
-            <a:r>
-              <a:rPr sz="1400" b="0">
-                <a:solidFill>
-                  <a:srgbClr val="1E2733"/>
-                </a:solidFill>
-                <a:latin typeface="Cambria Math"/>
-              </a:rPr>
-              <a:t>φᵢ 是模型已知的情境特徵</a:t>
-            </a:r>
-          </a:p>
-          <a:p>
-            <a:pPr>
-              <a:lnSpc>
-                <a:spcPct val="114000"/>
-              </a:lnSpc>
-              <a:spcAft>
-                <a:spcPts val="400"/>
-              </a:spcAft>
-              <a:defRPr sz="1200">
-                <a:solidFill>
-                  <a:srgbClr val="1E2733"/>
-                </a:solidFill>
-                <a:latin typeface="Noto Sans TC"/>
-              </a:defRPr>
-            </a:pPr>
-            <a:r>
-              <a:rPr sz="1200" b="0">
-                <a:solidFill>
-                  <a:srgbClr val="1E2733"/>
-                </a:solidFill>
-                <a:latin typeface="Noto Sans TC"/>
-              </a:rPr>
-              <a:t>• 包含位置、時間、室內外條件與設備作用強度</a:t>
-            </a:r>
-          </a:p>
-          <a:p>
-            <a:pPr>
-              <a:lnSpc>
-                <a:spcPct val="114000"/>
-              </a:lnSpc>
-              <a:spcAft>
-                <a:spcPts val="400"/>
-              </a:spcAft>
-              <a:defRPr sz="1200">
-                <a:solidFill>
-                  <a:srgbClr val="1E2733"/>
-                </a:solidFill>
-                <a:latin typeface="Noto Sans TC"/>
-              </a:defRPr>
-            </a:pPr>
-            <a:r>
-              <a:rPr sz="1200" b="0">
-                <a:solidFill>
-                  <a:srgbClr val="1E2733"/>
-                </a:solidFill>
-                <a:latin typeface="Noto Sans TC"/>
-              </a:rPr>
-              <a:t>• 目標是從觀測差異學出非連網設備的影響係數</a:t>
+              <a:t>• 同一筆 record 綁定裝置狀態、baseline 與 outdoor</a:t>
             </a:r>
           </a:p>
         </p:txBody>
@@ -39886,7 +43285,7 @@
                 </a:solidFill>
                 <a:latin typeface="Noto Sans TC"/>
               </a:rPr>
-              <a:t>標籤定義</a:t>
+              <a:t>least-squares 估計</a:t>
             </a:r>
           </a:p>
         </p:txBody>
@@ -39934,7 +43333,61 @@
                 </a:solidFill>
                 <a:latin typeface="Cambria Math"/>
               </a:rPr>
-              <a:t>yᵢᵛ = F_trueᵛ(pᵢ,tᵢ) - Fᵥ(pᵢ,tᵢ)</a:t>
+              <a:t>β</a:t>
+            </a:r>
+            <a:r>
+              <a:rPr sz="1000" baseline="-25000">
+                <a:solidFill>
+                  <a:srgbClr val="1E2733"/>
+                </a:solidFill>
+                <a:latin typeface="Cambria Math"/>
+              </a:rPr>
+              <a:t>m</a:t>
+            </a:r>
+            <a:r>
+              <a:rPr sz="1400" b="0">
+                <a:solidFill>
+                  <a:srgbClr val="1E2733"/>
+                </a:solidFill>
+                <a:latin typeface="Cambria Math"/>
+              </a:rPr>
+              <a:t> = argmin</a:t>
+            </a:r>
+            <a:r>
+              <a:rPr sz="1000" baseline="-25000">
+                <a:solidFill>
+                  <a:srgbClr val="1E2733"/>
+                </a:solidFill>
+                <a:latin typeface="Cambria Math"/>
+              </a:rPr>
+              <a:t>β</a:t>
+            </a:r>
+            <a:r>
+              <a:rPr sz="1400" b="0">
+                <a:solidFill>
+                  <a:srgbClr val="1E2733"/>
+                </a:solidFill>
+                <a:latin typeface="Cambria Math"/>
+              </a:rPr>
+              <a:t> ||Δy</a:t>
+            </a:r>
+            <a:r>
+              <a:rPr sz="1000" baseline="-25000">
+                <a:solidFill>
+                  <a:srgbClr val="1E2733"/>
+                </a:solidFill>
+                <a:latin typeface="Cambria Math"/>
+              </a:rPr>
+              <a:t>m</a:t>
+            </a:r>
+            <a:r>
+              <a:rPr sz="1400" b="0">
+                <a:solidFill>
+                  <a:srgbClr val="1E2733"/>
+                </a:solidFill>
+                <a:latin typeface="Cambria Math"/>
+              </a:rPr>
+              <a:t> - Xβ||²₂</a:t>
             </a:r>
           </a:p>
           <a:p>
@@ -39959,7 +43412,25 @@
                 </a:solidFill>
                 <a:latin typeface="Cambria Math"/>
               </a:rPr>
-              <a:t>yᵢᵛ 是主模型尚未吸收的 residual target</a:t>
+              <a:t>β</a:t>
+            </a:r>
+            <a:r>
+              <a:rPr sz="1000" baseline="-25000">
+                <a:solidFill>
+                  <a:srgbClr val="1E2733"/>
+                </a:solidFill>
+                <a:latin typeface="Cambria Math"/>
+              </a:rPr>
+              <a:t>m</a:t>
+            </a:r>
+            <a:r>
+              <a:rPr sz="1400" b="0">
+                <a:solidFill>
+                  <a:srgbClr val="1E2733"/>
+                </a:solidFill>
+                <a:latin typeface="Cambria Math"/>
+              </a:rPr>
+              <a:t>：裝置對第 m 個因子的影響係數</a:t>
             </a:r>
           </a:p>
           <a:p>
@@ -39984,7 +43455,7 @@
                 </a:solidFill>
                 <a:latin typeface="Noto Sans TC"/>
               </a:rPr>
-              <a:t>• before/after 觀測提供設備啟用造成的差異訊號</a:t>
+              <a:t>• X：由 influence envelope 組成的設計矩陣</a:t>
             </a:r>
           </a:p>
           <a:p>
@@ -40009,7 +43480,7 @@
                 </a:solidFill>
                 <a:latin typeface="Noto Sans TC"/>
               </a:rPr>
-              <a:t>• least-squares 適合小資料、可解釋且可快速重算</a:t>
+              <a:t>• before/after 觀測提供真實操作造成的差異訊號</a:t>
             </a:r>
           </a:p>
           <a:p>
@@ -40034,7 +43505,32 @@
                 </a:solidFill>
                 <a:latin typeface="Noto Sans TC"/>
               </a:rPr>
-              <a:t>• 若多個未知事件重疊，學到的是混合效果</a:t>
+              <a:t>• 多事件重疊時係數代表混合效果</a:t>
+            </a:r>
+          </a:p>
+          <a:p>
+            <a:pPr>
+              <a:lnSpc>
+                <a:spcPct val="114000"/>
+              </a:lnSpc>
+              <a:spcAft>
+                <a:spcPts val="400"/>
+              </a:spcAft>
+              <a:defRPr sz="1200">
+                <a:solidFill>
+                  <a:srgbClr val="1E2733"/>
+                </a:solidFill>
+                <a:latin typeface="Noto Sans TC"/>
+              </a:defRPr>
+            </a:pPr>
+            <a:r>
+              <a:rPr sz="1200" b="0">
+                <a:solidFill>
+                  <a:srgbClr val="1E2733"/>
+                </a:solidFill>
+                <a:latin typeface="Noto Sans TC"/>
+              </a:rPr>
+              <a:t>• 數值例：X=[1,0.5], Δy=[-0.8,-0.4] → β=-0.8</a:t>
             </a:r>
           </a:p>
         </p:txBody>
@@ -41088,7 +44584,7 @@
                 </a:solidFill>
                 <a:latin typeface="Noto Sans TC"/>
               </a:rPr>
-              <a:t>公式、符號意義、限制與可主張範圍</a:t>
+              <a:t>公式、符號意義、假設與限制</a:t>
             </a:r>
           </a:p>
         </p:txBody>
@@ -41313,7 +44809,25 @@
                 </a:solidFill>
                 <a:latin typeface="Cambria Math"/>
               </a:rPr>
-              <a:t>F_hybridᵛ(p,t) = Fᵥ(p,t) + Rᵥ(p,t; θᵥ)</a:t>
+              <a:t>F</a:t>
+            </a:r>
+            <a:r>
+              <a:rPr sz="1000" baseline="-25000">
+                <a:solidFill>
+                  <a:srgbClr val="1E2733"/>
+                </a:solidFill>
+                <a:latin typeface="Cambria Math"/>
+              </a:rPr>
+              <a:t>hybrid</a:t>
+            </a:r>
+            <a:r>
+              <a:rPr sz="1400" b="0">
+                <a:solidFill>
+                  <a:srgbClr val="1E2733"/>
+                </a:solidFill>
+                <a:latin typeface="Cambria Math"/>
+              </a:rPr>
+              <a:t>ᵛ(p,t) = Fᵥ(p,t) + Rᵥ(p,t; θᵥ)</a:t>
             </a:r>
           </a:p>
           <a:p>
@@ -41739,6 +45253,49 @@
                 <a:latin typeface="Noto Sans TC"/>
               </a:rPr>
               <a:t>• LOO 結果代表標準情境 family 內 residual 可學習</a:t>
+            </a:r>
+          </a:p>
+          <a:p>
+            <a:pPr>
+              <a:lnSpc>
+                <a:spcPct val="114000"/>
+              </a:lnSpc>
+              <a:spcAft>
+                <a:spcPts val="400"/>
+              </a:spcAft>
+              <a:defRPr sz="1200">
+                <a:solidFill>
+                  <a:srgbClr val="1E2733"/>
+                </a:solidFill>
+                <a:latin typeface="Noto Sans TC"/>
+              </a:defRPr>
+            </a:pPr>
+            <a:r>
+              <a:rPr sz="1200" b="0">
+                <a:solidFill>
+                  <a:srgbClr val="1E2733"/>
+                </a:solidFill>
+                <a:latin typeface="Noto Sans TC"/>
+              </a:rPr>
+              <a:t>• 數值例：F=27.0,R=-0.3 → F</a:t>
+            </a:r>
+            <a:r>
+              <a:rPr sz="800" baseline="-25000">
+                <a:solidFill>
+                  <a:srgbClr val="1E2733"/>
+                </a:solidFill>
+                <a:latin typeface="Noto Sans TC"/>
+              </a:rPr>
+              <a:t>hybrid</a:t>
+            </a:r>
+            <a:r>
+              <a:rPr sz="1200" b="0">
+                <a:solidFill>
+                  <a:srgbClr val="1E2733"/>
+                </a:solidFill>
+                <a:latin typeface="Noto Sans TC"/>
+              </a:rPr>
+              <a:t>=26.7°C</a:t>
             </a:r>
           </a:p>
         </p:txBody>
@@ -41957,7 +45514,7 @@
                 </a:solidFill>
                 <a:latin typeface="Noto Sans TC"/>
               </a:rPr>
-              <a:t>公式、符號意義、限制與可主張範圍</a:t>
+              <a:t>公式、符號意義、假設與限制</a:t>
             </a:r>
           </a:p>
         </p:txBody>
@@ -42182,7 +45739,25 @@
                 </a:solidFill>
                 <a:latin typeface="Cambria Math"/>
               </a:rPr>
-              <a:t>Rᵥ*(p,t) = F_trueᵛ(p,t) - Fᵥ(p,t)</a:t>
+              <a:t>Rᵥ*(p,t) = F</a:t>
+            </a:r>
+            <a:r>
+              <a:rPr sz="1000" baseline="-25000">
+                <a:solidFill>
+                  <a:srgbClr val="1E2733"/>
+                </a:solidFill>
+                <a:latin typeface="Cambria Math"/>
+              </a:rPr>
+              <a:t>true</a:t>
+            </a:r>
+            <a:r>
+              <a:rPr sz="1400" b="0">
+                <a:solidFill>
+                  <a:srgbClr val="1E2733"/>
+                </a:solidFill>
+                <a:latin typeface="Cambria Math"/>
+              </a:rPr>
+              <a:t>ᵛ(p,t) - Fᵥ(p,t)</a:t>
             </a:r>
           </a:p>
           <a:p>
@@ -42207,7 +45782,25 @@
                 </a:solidFill>
                 <a:latin typeface="Cambria Math"/>
               </a:rPr>
-              <a:t>F_trueᵛ：訓練或合成 truth 場</a:t>
+              <a:t>F</a:t>
+            </a:r>
+            <a:r>
+              <a:rPr sz="1000" baseline="-25000">
+                <a:solidFill>
+                  <a:srgbClr val="1E2733"/>
+                </a:solidFill>
+                <a:latin typeface="Cambria Math"/>
+              </a:rPr>
+              <a:t>true</a:t>
+            </a:r>
+            <a:r>
+              <a:rPr sz="1400" b="0">
+                <a:solidFill>
+                  <a:srgbClr val="1E2733"/>
+                </a:solidFill>
+                <a:latin typeface="Cambria Math"/>
+              </a:rPr>
+              <a:t>ᵛ：訓練或合成 truth 場</a:t>
             </a:r>
           </a:p>
           <a:p>
@@ -42507,7 +46100,7 @@
                 </a:solidFill>
                 <a:latin typeface="Cambria Math"/>
               </a:rPr>
-              <a:t>ℒ(θᵥ) = (1/N)Σᵢ ||Rᵥ* - Rᵥ(pᵢ,tᵢ;θᵥ)||²</a:t>
+              <a:t>ℒ(θᵥ) = (1/N)Σᵢ ||Rᵥ*(pᵢ,tᵢ)</a:t>
             </a:r>
           </a:p>
           <a:p>
@@ -42532,7 +46125,7 @@
                 </a:solidFill>
                 <a:latin typeface="Cambria Math"/>
               </a:rPr>
-              <a:t>+ λ||θᵥ||²</a:t>
+              <a:t>- Rᵥ(pᵢ,tᵢ;θᵥ)||² + λ||θᵥ||²</a:t>
             </a:r>
           </a:p>
           <a:p>
@@ -42608,6 +46201,31 @@
                 <a:latin typeface="Noto Sans TC"/>
               </a:rPr>
               <a:t>• 溫濕度響應較平滑可低通；照度因光源/遮蔽需保留快速跳變</a:t>
+            </a:r>
+          </a:p>
+          <a:p>
+            <a:pPr>
+              <a:lnSpc>
+                <a:spcPct val="114000"/>
+              </a:lnSpc>
+              <a:spcAft>
+                <a:spcPts val="400"/>
+              </a:spcAft>
+              <a:defRPr sz="1200">
+                <a:solidFill>
+                  <a:srgbClr val="1E2733"/>
+                </a:solidFill>
+                <a:latin typeface="Noto Sans TC"/>
+              </a:defRPr>
+            </a:pPr>
+            <a:r>
+              <a:rPr sz="1200" b="0">
+                <a:solidFill>
+                  <a:srgbClr val="1E2733"/>
+                </a:solidFill>
+                <a:latin typeface="Noto Sans TC"/>
+              </a:rPr>
+              <a:t>• 數值例：errors=(0.2,-0.1), λ||θ||²=0.01 → ℒ=0.035</a:t>
             </a:r>
           </a:p>
         </p:txBody>
@@ -42826,7 +46444,7 @@
                 </a:solidFill>
                 <a:latin typeface="Noto Sans TC"/>
               </a:rPr>
-              <a:t>公式、符號意義、限制與可主張範圍</a:t>
+              <a:t>公式、符號意義、假設與限制</a:t>
             </a:r>
           </a:p>
         </p:txBody>
@@ -43082,6 +46700,67 @@
           <a:p>
             <a:pPr>
               <a:lnSpc>
+                <a:spcPct val="108000"/>
+              </a:lnSpc>
+              <a:spcAft>
+                <a:spcPts val="200"/>
+              </a:spcAft>
+              <a:defRPr sz="1400">
+                <a:solidFill>
+                  <a:srgbClr val="1E2733"/>
+                </a:solidFill>
+                <a:latin typeface="Cambria Math"/>
+              </a:defRPr>
+            </a:pPr>
+            <a:r>
+              <a:rPr sz="1400" b="0">
+                <a:solidFill>
+                  <a:srgbClr val="1E2733"/>
+                </a:solidFill>
+                <a:latin typeface="Cambria Math"/>
+              </a:rPr>
+              <a:t>Corr = cov(ŷ,y)/(σ</a:t>
+            </a:r>
+            <a:r>
+              <a:rPr sz="1000" baseline="-25000">
+                <a:solidFill>
+                  <a:srgbClr val="1E2733"/>
+                </a:solidFill>
+                <a:latin typeface="Cambria Math"/>
+              </a:rPr>
+              <a:t>ŷ</a:t>
+            </a:r>
+            <a:r>
+              <a:rPr sz="1400" b="0">
+                <a:solidFill>
+                  <a:srgbClr val="1E2733"/>
+                </a:solidFill>
+                <a:latin typeface="Cambria Math"/>
+              </a:rPr>
+              <a:t> σ</a:t>
+            </a:r>
+            <a:r>
+              <a:rPr sz="1000" baseline="-25000">
+                <a:solidFill>
+                  <a:srgbClr val="1E2733"/>
+                </a:solidFill>
+                <a:latin typeface="Cambria Math"/>
+              </a:rPr>
+              <a:t>y</a:t>
+            </a:r>
+            <a:r>
+              <a:rPr sz="1400" b="0">
+                <a:solidFill>
+                  <a:srgbClr val="1E2733"/>
+                </a:solidFill>
+                <a:latin typeface="Cambria Math"/>
+              </a:rPr>
+              <a:t>)</a:t>
+            </a:r>
+          </a:p>
+          <a:p>
+            <a:pPr>
+              <a:lnSpc>
                 <a:spcPct val="114000"/>
               </a:lnSpc>
               <a:spcAft>
@@ -43101,32 +46780,7 @@
                 </a:solidFill>
                 <a:latin typeface="Noto Sans TC"/>
               </a:rPr>
-              <a:t>• ŷᵢ：模型估計值</a:t>
-            </a:r>
-          </a:p>
-          <a:p>
-            <a:pPr>
-              <a:lnSpc>
-                <a:spcPct val="108000"/>
-              </a:lnSpc>
-              <a:spcAft>
-                <a:spcPts val="200"/>
-              </a:spcAft>
-              <a:defRPr sz="1400">
-                <a:solidFill>
-                  <a:srgbClr val="1E2733"/>
-                </a:solidFill>
-                <a:latin typeface="Cambria Math"/>
-              </a:defRPr>
-            </a:pPr>
-            <a:r>
-              <a:rPr sz="1400" b="0">
-                <a:solidFill>
-                  <a:srgbClr val="1E2733"/>
-                </a:solidFill>
-                <a:latin typeface="Cambria Math"/>
-              </a:rPr>
-              <a:t>yᵢ：truth 或觀測參考值</a:t>
+              <a:t>• ŷᵢ：模型估計值；yᵢ：truth 或觀測</a:t>
             </a:r>
           </a:p>
           <a:p>
@@ -43407,26 +47061,51 @@
           <a:p>
             <a:pPr>
               <a:lnSpc>
+                <a:spcPct val="108000"/>
+              </a:lnSpc>
+              <a:spcAft>
+                <a:spcPts val="200"/>
+              </a:spcAft>
+              <a:defRPr sz="1400">
+                <a:solidFill>
+                  <a:srgbClr val="1E2733"/>
+                </a:solidFill>
+                <a:latin typeface="Cambria Math"/>
+              </a:defRPr>
+            </a:pPr>
+            <a:r>
+              <a:rPr sz="1400" b="0">
+                <a:solidFill>
+                  <a:srgbClr val="1E2733"/>
+                </a:solidFill>
+                <a:latin typeface="Cambria Math"/>
+              </a:rPr>
+              <a:t>Correlation 用於公開資料時序任務，檢查趨勢是否同向</a:t>
+            </a:r>
+          </a:p>
+          <a:p>
+            <a:pPr>
+              <a:lnSpc>
                 <a:spcPct val="114000"/>
               </a:lnSpc>
               <a:spcAft>
                 <a:spcPts val="400"/>
               </a:spcAft>
-              <a:defRPr sz="1200">
-                <a:solidFill>
-                  <a:srgbClr val="1E2733"/>
-                </a:solidFill>
-                <a:latin typeface="Noto Sans TC"/>
-              </a:defRPr>
-            </a:pPr>
-            <a:r>
-              <a:rPr sz="1200" b="0">
-                <a:solidFill>
-                  <a:srgbClr val="1E2733"/>
-                </a:solidFill>
-                <a:latin typeface="Noto Sans TC"/>
-              </a:rPr>
-              <a:t>• Correlation 用於公開資料時序任務，檢查趨勢是否同向</a:t>
+              <a:defRPr sz="1100">
+                <a:solidFill>
+                  <a:srgbClr val="1E2733"/>
+                </a:solidFill>
+                <a:latin typeface="Noto Sans TC"/>
+              </a:defRPr>
+            </a:pPr>
+            <a:r>
+              <a:rPr sz="1100" b="0">
+                <a:solidFill>
+                  <a:srgbClr val="1E2733"/>
+                </a:solidFill>
+                <a:latin typeface="Noto Sans TC"/>
+              </a:rPr>
+              <a:t>• 三者搭配可避免只看單一指標</a:t>
             </a:r>
           </a:p>
           <a:p>
@@ -43437,21 +47116,21 @@
               <a:spcAft>
                 <a:spcPts val="400"/>
               </a:spcAft>
-              <a:defRPr sz="1200">
-                <a:solidFill>
-                  <a:srgbClr val="1E2733"/>
-                </a:solidFill>
-                <a:latin typeface="Noto Sans TC"/>
-              </a:defRPr>
-            </a:pPr>
-            <a:r>
-              <a:rPr sz="1200" b="0">
-                <a:solidFill>
-                  <a:srgbClr val="1E2733"/>
-                </a:solidFill>
-                <a:latin typeface="Noto Sans TC"/>
-              </a:rPr>
-              <a:t>• 三者搭配可避免只看單一指標</a:t>
+              <a:defRPr sz="1100">
+                <a:solidFill>
+                  <a:srgbClr val="1E2733"/>
+                </a:solidFill>
+                <a:latin typeface="Noto Sans TC"/>
+              </a:defRPr>
+            </a:pPr>
+            <a:r>
+              <a:rPr sz="1100" b="0">
+                <a:solidFill>
+                  <a:srgbClr val="1E2733"/>
+                </a:solidFill>
+                <a:latin typeface="Noto Sans TC"/>
+              </a:rPr>
+              <a:t>• 照度量級較大，圖表常用 log-scale 避免遮蔽溫濕度差異</a:t>
             </a:r>
           </a:p>
           <a:p>
@@ -43462,21 +47141,21 @@
               <a:spcAft>
                 <a:spcPts val="400"/>
               </a:spcAft>
-              <a:defRPr sz="1200">
-                <a:solidFill>
-                  <a:srgbClr val="1E2733"/>
-                </a:solidFill>
-                <a:latin typeface="Noto Sans TC"/>
-              </a:defRPr>
-            </a:pPr>
-            <a:r>
-              <a:rPr sz="1200" b="0">
-                <a:solidFill>
-                  <a:srgbClr val="1E2733"/>
-                </a:solidFill>
-                <a:latin typeface="Noto Sans TC"/>
-              </a:rPr>
-              <a:t>• 照度量級較大，圖表常用 log-scale 避免遮蔽溫濕度差異</a:t>
+              <a:defRPr sz="1100">
+                <a:solidFill>
+                  <a:srgbClr val="1E2733"/>
+                </a:solidFill>
+                <a:latin typeface="Noto Sans TC"/>
+              </a:defRPr>
+            </a:pPr>
+            <a:r>
+              <a:rPr sz="1100" b="0">
+                <a:solidFill>
+                  <a:srgbClr val="1E2733"/>
+                </a:solidFill>
+                <a:latin typeface="Noto Sans TC"/>
+              </a:rPr>
+              <a:t>• 數值例：ŷ=[1,2,3], y=[1,2,4] → MAE=0.33, RMSE=0.58, Corr≈0.98</a:t>
             </a:r>
           </a:p>
         </p:txBody>
@@ -43695,7 +47374,7 @@
                 </a:solidFill>
                 <a:latin typeface="Noto Sans TC"/>
               </a:rPr>
-              <a:t>公式、符號意義、限制與可主張範圍</a:t>
+              <a:t>公式、符號意義、假設與限制</a:t>
             </a:r>
           </a:p>
         </p:txBody>
@@ -43920,7 +47599,88 @@
                 </a:solidFill>
                 <a:latin typeface="Cambria Math"/>
               </a:rPr>
-              <a:t>IDW(p) = Σ_s w_s O_s / Σ_s w_s</a:t>
+              <a:t>IDW(p) = Σ</a:t>
+            </a:r>
+            <a:r>
+              <a:rPr sz="1000" baseline="-25000">
+                <a:solidFill>
+                  <a:srgbClr val="1E2733"/>
+                </a:solidFill>
+                <a:latin typeface="Cambria Math"/>
+              </a:rPr>
+              <a:t>s</a:t>
+            </a:r>
+            <a:r>
+              <a:rPr sz="1400" b="0">
+                <a:solidFill>
+                  <a:srgbClr val="1E2733"/>
+                </a:solidFill>
+                <a:latin typeface="Cambria Math"/>
+              </a:rPr>
+              <a:t> w</a:t>
+            </a:r>
+            <a:r>
+              <a:rPr sz="1000" baseline="-25000">
+                <a:solidFill>
+                  <a:srgbClr val="1E2733"/>
+                </a:solidFill>
+                <a:latin typeface="Cambria Math"/>
+              </a:rPr>
+              <a:t>s</a:t>
+            </a:r>
+            <a:r>
+              <a:rPr sz="1400" b="0">
+                <a:solidFill>
+                  <a:srgbClr val="1E2733"/>
+                </a:solidFill>
+                <a:latin typeface="Cambria Math"/>
+              </a:rPr>
+              <a:t> O</a:t>
+            </a:r>
+            <a:r>
+              <a:rPr sz="1000" baseline="-25000">
+                <a:solidFill>
+                  <a:srgbClr val="1E2733"/>
+                </a:solidFill>
+                <a:latin typeface="Cambria Math"/>
+              </a:rPr>
+              <a:t>s</a:t>
+            </a:r>
+            <a:r>
+              <a:rPr sz="1400" b="0">
+                <a:solidFill>
+                  <a:srgbClr val="1E2733"/>
+                </a:solidFill>
+                <a:latin typeface="Cambria Math"/>
+              </a:rPr>
+              <a:t> / Σ</a:t>
+            </a:r>
+            <a:r>
+              <a:rPr sz="1000" baseline="-25000">
+                <a:solidFill>
+                  <a:srgbClr val="1E2733"/>
+                </a:solidFill>
+                <a:latin typeface="Cambria Math"/>
+              </a:rPr>
+              <a:t>s</a:t>
+            </a:r>
+            <a:r>
+              <a:rPr sz="1400" b="0">
+                <a:solidFill>
+                  <a:srgbClr val="1E2733"/>
+                </a:solidFill>
+                <a:latin typeface="Cambria Math"/>
+              </a:rPr>
+              <a:t> w</a:t>
+            </a:r>
+            <a:r>
+              <a:rPr sz="1000" baseline="-25000">
+                <a:solidFill>
+                  <a:srgbClr val="1E2733"/>
+                </a:solidFill>
+                <a:latin typeface="Cambria Math"/>
+              </a:rPr>
+              <a:t>s</a:t>
             </a:r>
           </a:p>
           <a:p>
@@ -43945,7 +47705,25 @@
                 </a:solidFill>
                 <a:latin typeface="Cambria Math"/>
               </a:rPr>
-              <a:t>w_s = 1 / (dist(p,s) + ε)^q</a:t>
+              <a:t>w</a:t>
+            </a:r>
+            <a:r>
+              <a:rPr sz="1000" baseline="-25000">
+                <a:solidFill>
+                  <a:srgbClr val="1E2733"/>
+                </a:solidFill>
+                <a:latin typeface="Cambria Math"/>
+              </a:rPr>
+              <a:t>s</a:t>
+            </a:r>
+            <a:r>
+              <a:rPr sz="1400" b="0">
+                <a:solidFill>
+                  <a:srgbClr val="1E2733"/>
+                </a:solidFill>
+                <a:latin typeface="Cambria Math"/>
+              </a:rPr>
+              <a:t> = 1 / (dist(p,s) + ε)^q</a:t>
             </a:r>
           </a:p>
           <a:p>
@@ -43995,7 +47773,25 @@
                 </a:solidFill>
                 <a:latin typeface="Noto Sans TC"/>
               </a:rPr>
-              <a:t>• O_s：感測器觀測值</a:t>
+              <a:t>• O</a:t>
+            </a:r>
+            <a:r>
+              <a:rPr sz="800" baseline="-25000">
+                <a:solidFill>
+                  <a:srgbClr val="1E2733"/>
+                </a:solidFill>
+                <a:latin typeface="Noto Sans TC"/>
+              </a:rPr>
+              <a:t>s</a:t>
+            </a:r>
+            <a:r>
+              <a:rPr sz="1200" b="0">
+                <a:solidFill>
+                  <a:srgbClr val="1E2733"/>
+                </a:solidFill>
+                <a:latin typeface="Noto Sans TC"/>
+              </a:rPr>
+              <a:t>：感測器觀測值</a:t>
             </a:r>
           </a:p>
           <a:p>
@@ -44197,7 +47993,7 @@
                 </a:solidFill>
                 <a:latin typeface="Noto Sans TC"/>
               </a:rPr>
-              <a:t>為什麼拿它比較</a:t>
+              <a:t>比較基準理由</a:t>
             </a:r>
           </a:p>
         </p:txBody>
@@ -44346,6 +48142,31 @@
                 <a:latin typeface="Noto Sans TC"/>
               </a:rPr>
               <a:t>• 但 IDW 在無光源、平坦場時可能表現不差</a:t>
+            </a:r>
+          </a:p>
+          <a:p>
+            <a:pPr>
+              <a:lnSpc>
+                <a:spcPct val="114000"/>
+              </a:lnSpc>
+              <a:spcAft>
+                <a:spcPts val="400"/>
+              </a:spcAft>
+              <a:defRPr sz="1200">
+                <a:solidFill>
+                  <a:srgbClr val="1E2733"/>
+                </a:solidFill>
+                <a:latin typeface="Noto Sans TC"/>
+              </a:defRPr>
+            </a:pPr>
+            <a:r>
+              <a:rPr sz="1200" b="0">
+                <a:solidFill>
+                  <a:srgbClr val="1E2733"/>
+                </a:solidFill>
+                <a:latin typeface="Noto Sans TC"/>
+              </a:rPr>
+              <a:t>• 數值例：O=(26,30), d=(1,3), q=2 → IDW≈26.4°C</a:t>
             </a:r>
           </a:p>
         </p:txBody>
@@ -44564,7 +48385,7 @@
                 </a:solidFill>
                 <a:latin typeface="Noto Sans TC"/>
               </a:rPr>
-              <a:t>公式、符號意義、限制與可主張範圍</a:t>
+              <a:t>公式、符號意義、假設與限制</a:t>
             </a:r>
           </a:p>
         </p:txBody>
@@ -44789,7 +48610,79 @@
                 </a:solidFill>
                 <a:latin typeface="Cambria Math"/>
               </a:rPr>
-              <a:t>Score(a) = P_before - P_after</a:t>
+              <a:t>q</a:t>
+            </a:r>
+            <a:r>
+              <a:rPr sz="1000" baseline="-25000">
+                <a:solidFill>
+                  <a:srgbClr val="1E2733"/>
+                </a:solidFill>
+                <a:latin typeface="Cambria Math"/>
+              </a:rPr>
+              <a:t>m</a:t>
+            </a:r>
+            <a:r>
+              <a:rPr sz="1400" b="0">
+                <a:solidFill>
+                  <a:srgbClr val="1E2733"/>
+                </a:solidFill>
+                <a:latin typeface="Cambria Math"/>
+              </a:rPr>
+              <a:t>(S)= (1/K)Σ</a:t>
+            </a:r>
+            <a:r>
+              <a:rPr sz="1000" baseline="-25000">
+                <a:solidFill>
+                  <a:srgbClr val="1E2733"/>
+                </a:solidFill>
+                <a:latin typeface="Cambria Math"/>
+              </a:rPr>
+              <a:t>k</a:t>
+            </a:r>
+            <a:r>
+              <a:rPr sz="1400" b="0">
+                <a:solidFill>
+                  <a:srgbClr val="1E2733"/>
+                </a:solidFill>
+                <a:latin typeface="Cambria Math"/>
+              </a:rPr>
+              <a:t> F</a:t>
+            </a:r>
+            <a:r>
+              <a:rPr sz="1000" baseline="-25000">
+                <a:solidFill>
+                  <a:srgbClr val="1E2733"/>
+                </a:solidFill>
+                <a:latin typeface="Cambria Math"/>
+              </a:rPr>
+              <a:t>m</a:t>
+            </a:r>
+            <a:r>
+              <a:rPr sz="1400" b="0">
+                <a:solidFill>
+                  <a:srgbClr val="1E2733"/>
+                </a:solidFill>
+                <a:latin typeface="Cambria Math"/>
+              </a:rPr>
+              <a:t>(p</a:t>
+            </a:r>
+            <a:r>
+              <a:rPr sz="1000" baseline="-25000">
+                <a:solidFill>
+                  <a:srgbClr val="1E2733"/>
+                </a:solidFill>
+                <a:latin typeface="Cambria Math"/>
+              </a:rPr>
+              <a:t>k</a:t>
+            </a:r>
+            <a:r>
+              <a:rPr sz="1400" b="0">
+                <a:solidFill>
+                  <a:srgbClr val="1E2733"/>
+                </a:solidFill>
+                <a:latin typeface="Cambria Math"/>
+              </a:rPr>
+              <a:t>,t)</a:t>
             </a:r>
           </a:p>
           <a:p>
@@ -44814,57 +48707,201 @@
                 </a:solidFill>
                 <a:latin typeface="Cambria Math"/>
               </a:rPr>
-              <a:t>Penalty 越大代表越偏離舒適目標</a:t>
-            </a:r>
-          </a:p>
-          <a:p>
-            <a:pPr>
-              <a:lnSpc>
-                <a:spcPct val="114000"/>
-              </a:lnSpc>
-              <a:spcAft>
-                <a:spcPts val="400"/>
-              </a:spcAft>
-              <a:defRPr sz="1200">
-                <a:solidFill>
-                  <a:srgbClr val="1E2733"/>
-                </a:solidFill>
-                <a:latin typeface="Noto Sans TC"/>
-              </a:defRPr>
-            </a:pPr>
-            <a:r>
-              <a:rPr sz="1200" b="0">
-                <a:solidFill>
-                  <a:srgbClr val="1E2733"/>
-                </a:solidFill>
-                <a:latin typeface="Noto Sans TC"/>
-              </a:rPr>
-              <a:t>• P_before：採取動作前的目標區域懲罰</a:t>
-            </a:r>
-          </a:p>
-          <a:p>
-            <a:pPr>
-              <a:lnSpc>
-                <a:spcPct val="114000"/>
-              </a:lnSpc>
-              <a:spcAft>
-                <a:spcPts val="400"/>
-              </a:spcAft>
-              <a:defRPr sz="1200">
-                <a:solidFill>
-                  <a:srgbClr val="1E2733"/>
-                </a:solidFill>
-                <a:latin typeface="Noto Sans TC"/>
-              </a:defRPr>
-            </a:pPr>
-            <a:r>
-              <a:rPr sz="1200" b="0">
-                <a:solidFill>
-                  <a:srgbClr val="1E2733"/>
-                </a:solidFill>
-                <a:latin typeface="Noto Sans TC"/>
-              </a:rPr>
-              <a:t>• P_after：反事實模擬動作後的懲罰</a:t>
+              <a:t>P(q)=Σ</a:t>
+            </a:r>
+            <a:r>
+              <a:rPr sz="1000" baseline="-25000">
+                <a:solidFill>
+                  <a:srgbClr val="1E2733"/>
+                </a:solidFill>
+                <a:latin typeface="Cambria Math"/>
+              </a:rPr>
+              <a:t>m</a:t>
+            </a:r>
+            <a:r>
+              <a:rPr sz="1400" b="0">
+                <a:solidFill>
+                  <a:srgbClr val="1E2733"/>
+                </a:solidFill>
+                <a:latin typeface="Cambria Math"/>
+              </a:rPr>
+              <a:t> w</a:t>
+            </a:r>
+            <a:r>
+              <a:rPr sz="1000" baseline="-25000">
+                <a:solidFill>
+                  <a:srgbClr val="1E2733"/>
+                </a:solidFill>
+                <a:latin typeface="Cambria Math"/>
+              </a:rPr>
+              <a:t>m</a:t>
+            </a:r>
+            <a:r>
+              <a:rPr sz="1400" b="0">
+                <a:solidFill>
+                  <a:srgbClr val="1E2733"/>
+                </a:solidFill>
+                <a:latin typeface="Cambria Math"/>
+              </a:rPr>
+              <a:t> max(0,(|q</a:t>
+            </a:r>
+            <a:r>
+              <a:rPr sz="1000" baseline="-25000">
+                <a:solidFill>
+                  <a:srgbClr val="1E2733"/>
+                </a:solidFill>
+                <a:latin typeface="Cambria Math"/>
+              </a:rPr>
+              <a:t>m</a:t>
+            </a:r>
+            <a:r>
+              <a:rPr sz="1400" b="0">
+                <a:solidFill>
+                  <a:srgbClr val="1E2733"/>
+                </a:solidFill>
+                <a:latin typeface="Cambria Math"/>
+              </a:rPr>
+              <a:t>-g</a:t>
+            </a:r>
+            <a:r>
+              <a:rPr sz="1000" baseline="-25000">
+                <a:solidFill>
+                  <a:srgbClr val="1E2733"/>
+                </a:solidFill>
+                <a:latin typeface="Cambria Math"/>
+              </a:rPr>
+              <a:t>m</a:t>
+            </a:r>
+            <a:r>
+              <a:rPr sz="1400" b="0">
+                <a:solidFill>
+                  <a:srgbClr val="1E2733"/>
+                </a:solidFill>
+                <a:latin typeface="Cambria Math"/>
+              </a:rPr>
+              <a:t>|-δ</a:t>
+            </a:r>
+            <a:r>
+              <a:rPr sz="1000" baseline="-25000">
+                <a:solidFill>
+                  <a:srgbClr val="1E2733"/>
+                </a:solidFill>
+                <a:latin typeface="Cambria Math"/>
+              </a:rPr>
+              <a:t>m</a:t>
+            </a:r>
+            <a:r>
+              <a:rPr sz="1400" b="0">
+                <a:solidFill>
+                  <a:srgbClr val="1E2733"/>
+                </a:solidFill>
+                <a:latin typeface="Cambria Math"/>
+              </a:rPr>
+              <a:t>)/δ</a:t>
+            </a:r>
+            <a:r>
+              <a:rPr sz="1000" baseline="-25000">
+                <a:solidFill>
+                  <a:srgbClr val="1E2733"/>
+                </a:solidFill>
+                <a:latin typeface="Cambria Math"/>
+              </a:rPr>
+              <a:t>m</a:t>
+            </a:r>
+            <a:r>
+              <a:rPr sz="1400" b="0">
+                <a:solidFill>
+                  <a:srgbClr val="1E2733"/>
+                </a:solidFill>
+                <a:latin typeface="Cambria Math"/>
+              </a:rPr>
+              <a:t>)</a:t>
+            </a:r>
+          </a:p>
+          <a:p>
+            <a:pPr>
+              <a:lnSpc>
+                <a:spcPct val="108000"/>
+              </a:lnSpc>
+              <a:spcAft>
+                <a:spcPts val="200"/>
+              </a:spcAft>
+              <a:defRPr sz="1400">
+                <a:solidFill>
+                  <a:srgbClr val="1E2733"/>
+                </a:solidFill>
+                <a:latin typeface="Cambria Math"/>
+              </a:defRPr>
+            </a:pPr>
+            <a:r>
+              <a:rPr sz="1400" b="0">
+                <a:solidFill>
+                  <a:srgbClr val="1E2733"/>
+                </a:solidFill>
+                <a:latin typeface="Cambria Math"/>
+              </a:rPr>
+              <a:t>Score(a)=P(q</a:t>
+            </a:r>
+            <a:r>
+              <a:rPr sz="1000" baseline="-25000">
+                <a:solidFill>
+                  <a:srgbClr val="1E2733"/>
+                </a:solidFill>
+                <a:latin typeface="Cambria Math"/>
+              </a:rPr>
+              <a:t>base</a:t>
+            </a:r>
+            <a:r>
+              <a:rPr sz="1400" b="0">
+                <a:solidFill>
+                  <a:srgbClr val="1E2733"/>
+                </a:solidFill>
+                <a:latin typeface="Cambria Math"/>
+              </a:rPr>
+              <a:t>)-P(q</a:t>
+            </a:r>
+            <a:r>
+              <a:rPr sz="1000" baseline="-25000">
+                <a:solidFill>
+                  <a:srgbClr val="1E2733"/>
+                </a:solidFill>
+                <a:latin typeface="Cambria Math"/>
+              </a:rPr>
+              <a:t>a</a:t>
+            </a:r>
+            <a:r>
+              <a:rPr sz="1400" b="0">
+                <a:solidFill>
+                  <a:srgbClr val="1E2733"/>
+                </a:solidFill>
+                <a:latin typeface="Cambria Math"/>
+              </a:rPr>
+              <a:t>)</a:t>
+            </a:r>
+          </a:p>
+          <a:p>
+            <a:pPr>
+              <a:lnSpc>
+                <a:spcPct val="108000"/>
+              </a:lnSpc>
+              <a:spcAft>
+                <a:spcPts val="200"/>
+              </a:spcAft>
+              <a:defRPr sz="1400">
+                <a:solidFill>
+                  <a:srgbClr val="1E2733"/>
+                </a:solidFill>
+                <a:latin typeface="Cambria Math"/>
+              </a:defRPr>
+            </a:pPr>
+            <a:r>
+              <a:rPr sz="1400" b="0">
+                <a:solidFill>
+                  <a:srgbClr val="1E2733"/>
+                </a:solidFill>
+                <a:latin typeface="Cambria Math"/>
+              </a:rPr>
+              <a:t>m ∈ {T,H,L}</a:t>
             </a:r>
           </a:p>
           <a:p>
@@ -45066,7 +49103,7 @@
                 </a:solidFill>
                 <a:latin typeface="Noto Sans TC"/>
               </a:rPr>
-              <a:t>必須說清楚的限制</a:t>
+              <a:t>驗證限制</a:t>
             </a:r>
           </a:p>
         </p:txBody>
@@ -45100,15 +49137,101 @@
               <a:spcAft>
                 <a:spcPts val="400"/>
               </a:spcAft>
-              <a:defRPr sz="1200">
-                <a:solidFill>
-                  <a:srgbClr val="1E2733"/>
-                </a:solidFill>
-                <a:latin typeface="Noto Sans TC"/>
-              </a:defRPr>
-            </a:pPr>
-            <a:r>
-              <a:rPr sz="1200" b="0">
+              <a:defRPr sz="1100">
+                <a:solidFill>
+                  <a:srgbClr val="1E2733"/>
+                </a:solidFill>
+                <a:latin typeface="Noto Sans TC"/>
+              </a:defRPr>
+            </a:pPr>
+            <a:r>
+              <a:rPr sz="1100" b="0">
+                <a:solidFill>
+                  <a:srgbClr val="1E2733"/>
+                </a:solidFill>
+                <a:latin typeface="Noto Sans TC"/>
+              </a:rPr>
+              <a:t>• S 是推薦評估的 sample scope 或目標區域</a:t>
+            </a:r>
+          </a:p>
+          <a:p>
+            <a:pPr>
+              <a:lnSpc>
+                <a:spcPct val="114000"/>
+              </a:lnSpc>
+              <a:spcAft>
+                <a:spcPts val="400"/>
+              </a:spcAft>
+              <a:defRPr sz="1100">
+                <a:solidFill>
+                  <a:srgbClr val="1E2733"/>
+                </a:solidFill>
+                <a:latin typeface="Noto Sans TC"/>
+              </a:defRPr>
+            </a:pPr>
+            <a:r>
+              <a:rPr sz="1100" b="0">
+                <a:solidFill>
+                  <a:srgbClr val="1E2733"/>
+                </a:solidFill>
+                <a:latin typeface="Noto Sans TC"/>
+              </a:rPr>
+              <a:t>• g</a:t>
+            </a:r>
+            <a:r>
+              <a:rPr sz="800" baseline="-25000">
+                <a:solidFill>
+                  <a:srgbClr val="1E2733"/>
+                </a:solidFill>
+                <a:latin typeface="Noto Sans TC"/>
+              </a:rPr>
+              <a:t>m</a:t>
+            </a:r>
+            <a:r>
+              <a:rPr sz="1100" b="0">
+                <a:solidFill>
+                  <a:srgbClr val="1E2733"/>
+                </a:solidFill>
+                <a:latin typeface="Noto Sans TC"/>
+              </a:rPr>
+              <a:t> 是目標值，δ</a:t>
+            </a:r>
+            <a:r>
+              <a:rPr sz="800" baseline="-25000">
+                <a:solidFill>
+                  <a:srgbClr val="1E2733"/>
+                </a:solidFill>
+                <a:latin typeface="Noto Sans TC"/>
+              </a:rPr>
+              <a:t>m</a:t>
+            </a:r>
+            <a:r>
+              <a:rPr sz="1100" b="0">
+                <a:solidFill>
+                  <a:srgbClr val="1E2733"/>
+                </a:solidFill>
+                <a:latin typeface="Noto Sans TC"/>
+              </a:rPr>
+              <a:t> 是容許範圍</a:t>
+            </a:r>
+          </a:p>
+          <a:p>
+            <a:pPr>
+              <a:lnSpc>
+                <a:spcPct val="114000"/>
+              </a:lnSpc>
+              <a:spcAft>
+                <a:spcPts val="400"/>
+              </a:spcAft>
+              <a:defRPr sz="1100">
+                <a:solidFill>
+                  <a:srgbClr val="1E2733"/>
+                </a:solidFill>
+                <a:latin typeface="Noto Sans TC"/>
+              </a:defRPr>
+            </a:pPr>
+            <a:r>
+              <a:rPr sz="1100" b="0">
                 <a:solidFill>
                   <a:srgbClr val="1E2733"/>
                 </a:solidFill>
@@ -45125,21 +49248,21 @@
               <a:spcAft>
                 <a:spcPts val="400"/>
               </a:spcAft>
-              <a:defRPr sz="1200">
-                <a:solidFill>
-                  <a:srgbClr val="1E2733"/>
-                </a:solidFill>
-                <a:latin typeface="Noto Sans TC"/>
-              </a:defRPr>
-            </a:pPr>
-            <a:r>
-              <a:rPr sz="1200" b="0">
-                <a:solidFill>
-                  <a:srgbClr val="1E2733"/>
-                </a:solidFill>
-                <a:latin typeface="Noto Sans TC"/>
-              </a:rPr>
-              <a:t>• 它是模型預測下的改善，不等於已證明因果效果</a:t>
+              <a:defRPr sz="1100">
+                <a:solidFill>
+                  <a:srgbClr val="1E2733"/>
+                </a:solidFill>
+                <a:latin typeface="Noto Sans TC"/>
+              </a:defRPr>
+            </a:pPr>
+            <a:r>
+              <a:rPr sz="1100" b="0">
+                <a:solidFill>
+                  <a:srgbClr val="1E2733"/>
+                </a:solidFill>
+                <a:latin typeface="Noto Sans TC"/>
+              </a:rPr>
+              <a:t>• 真正驗證需做 before/after intervention</a:t>
             </a:r>
           </a:p>
           <a:p>
@@ -45150,21 +49273,21 @@
               <a:spcAft>
                 <a:spcPts val="400"/>
               </a:spcAft>
-              <a:defRPr sz="1200">
-                <a:solidFill>
-                  <a:srgbClr val="1E2733"/>
-                </a:solidFill>
-                <a:latin typeface="Noto Sans TC"/>
-              </a:defRPr>
-            </a:pPr>
-            <a:r>
-              <a:rPr sz="1200" b="0">
-                <a:solidFill>
-                  <a:srgbClr val="1E2733"/>
-                </a:solidFill>
-                <a:latin typeface="Noto Sans TC"/>
-              </a:rPr>
-              <a:t>• 真正驗證需做 before/after intervention</a:t>
+              <a:defRPr sz="1100">
+                <a:solidFill>
+                  <a:srgbClr val="1E2733"/>
+                </a:solidFill>
+                <a:latin typeface="Noto Sans TC"/>
+              </a:defRPr>
+            </a:pPr>
+            <a:r>
+              <a:rPr sz="1100" b="0">
+                <a:solidFill>
+                  <a:srgbClr val="1E2733"/>
+                </a:solidFill>
+                <a:latin typeface="Noto Sans TC"/>
+              </a:rPr>
+              <a:t>• 比較實際 comfort penalty reduction 與預測改善是否一致</a:t>
             </a:r>
           </a:p>
           <a:p>
@@ -45175,46 +49298,57 @@
               <a:spcAft>
                 <a:spcPts val="400"/>
               </a:spcAft>
-              <a:defRPr sz="1200">
-                <a:solidFill>
-                  <a:srgbClr val="1E2733"/>
-                </a:solidFill>
-                <a:latin typeface="Noto Sans TC"/>
-              </a:defRPr>
-            </a:pPr>
-            <a:r>
-              <a:rPr sz="1200" b="0">
-                <a:solidFill>
-                  <a:srgbClr val="1E2733"/>
-                </a:solidFill>
-                <a:latin typeface="Noto Sans TC"/>
-              </a:rPr>
-              <a:t>• 比較實際 comfort penalty reduction 與預測改善是否一致</a:t>
-            </a:r>
-          </a:p>
-          <a:p>
-            <a:pPr>
-              <a:lnSpc>
-                <a:spcPct val="114000"/>
-              </a:lnSpc>
-              <a:spcAft>
-                <a:spcPts val="400"/>
-              </a:spcAft>
-              <a:defRPr sz="1200">
-                <a:solidFill>
-                  <a:srgbClr val="1E2733"/>
-                </a:solidFill>
-                <a:latin typeface="Noto Sans TC"/>
-              </a:defRPr>
-            </a:pPr>
-            <a:r>
-              <a:rPr sz="1200" b="0">
-                <a:solidFill>
-                  <a:srgbClr val="1E2733"/>
-                </a:solidFill>
-                <a:latin typeface="Noto Sans TC"/>
-              </a:rPr>
-              <a:t>• demo 可以呈現比較流程，但不能替代實測介入驗證</a:t>
+              <a:defRPr sz="1100">
+                <a:solidFill>
+                  <a:srgbClr val="1E2733"/>
+                </a:solidFill>
+                <a:latin typeface="Noto Sans TC"/>
+              </a:defRPr>
+            </a:pPr>
+            <a:r>
+              <a:rPr sz="1100" b="0">
+                <a:solidFill>
+                  <a:srgbClr val="1E2733"/>
+                </a:solidFill>
+                <a:latin typeface="Noto Sans TC"/>
+              </a:rPr>
+              <a:t>• 數值例：q</a:t>
+            </a:r>
+            <a:r>
+              <a:rPr sz="800" baseline="-25000">
+                <a:solidFill>
+                  <a:srgbClr val="1E2733"/>
+                </a:solidFill>
+                <a:latin typeface="Noto Sans TC"/>
+              </a:rPr>
+              <a:t>base</a:t>
+            </a:r>
+            <a:r>
+              <a:rPr sz="1100" b="0">
+                <a:solidFill>
+                  <a:srgbClr val="1E2733"/>
+                </a:solidFill>
+                <a:latin typeface="Noto Sans TC"/>
+              </a:rPr>
+              <a:t>=30,g=26,δ=2 → P=1；q</a:t>
+            </a:r>
+            <a:r>
+              <a:rPr sz="800" baseline="-25000">
+                <a:solidFill>
+                  <a:srgbClr val="1E2733"/>
+                </a:solidFill>
+                <a:latin typeface="Noto Sans TC"/>
+              </a:rPr>
+              <a:t>a</a:t>
+            </a:r>
+            <a:r>
+              <a:rPr sz="1100" b="0">
+                <a:solidFill>
+                  <a:srgbClr val="1E2733"/>
+                </a:solidFill>
+                <a:latin typeface="Noto Sans TC"/>
+              </a:rPr>
+              <a:t>=27 → P=0；Score=1</a:t>
             </a:r>
           </a:p>
         </p:txBody>

--- a/docs/papers/thesis/thesis_presentation_zh_30min.pptx
+++ b/docs/papers/thesis/thesis_presentation_zh_30min.pptx
@@ -3446,8 +3446,8 @@
         </p:blipFill>
         <p:spPr>
           <a:xfrm>
-            <a:off x="6126480" y="2080618"/>
-            <a:ext cx="5120640" cy="2971083"/>
+            <a:off x="6126480" y="2132561"/>
+            <a:ext cx="5120640" cy="2867197"/>
           </a:xfrm>
           <a:prstGeom prst="rect">
             <a:avLst/>
@@ -50664,8 +50664,8 @@
         </p:blipFill>
         <p:spPr>
           <a:xfrm>
-            <a:off x="731520" y="2012893"/>
-            <a:ext cx="5669280" cy="3289413"/>
+            <a:off x="731520" y="2070401"/>
+            <a:ext cx="5669280" cy="3174397"/>
           </a:xfrm>
           <a:prstGeom prst="rect">
             <a:avLst/>
@@ -50699,23 +50699,23 @@
                 <a:spcPct val="112000"/>
               </a:lnSpc>
               <a:spcAft>
-                <a:spcPts val="765"/>
-              </a:spcAft>
-              <a:defRPr sz="1700">
-                <a:solidFill>
-                  <a:srgbClr val="1E2733"/>
-                </a:solidFill>
-                <a:latin typeface="Noto Sans TC"/>
-              </a:defRPr>
-            </a:pPr>
-            <a:r>
-              <a:rPr sz="1700" b="0">
-                <a:solidFill>
-                  <a:srgbClr val="1E2733"/>
-                </a:solidFill>
-                <a:latin typeface="Noto Sans TC"/>
-              </a:rPr>
-              <a:t>• 入口區分為人機互動層與 AI 工具呼叫層</a:t>
+                <a:spcPts val="720"/>
+              </a:spcAft>
+              <a:defRPr sz="1600">
+                <a:solidFill>
+                  <a:srgbClr val="1E2733"/>
+                </a:solidFill>
+                <a:latin typeface="Noto Sans TC"/>
+              </a:defRPr>
+            </a:pPr>
+            <a:r>
+              <a:rPr sz="1600" b="0">
+                <a:solidFill>
+                  <a:srgbClr val="1E2733"/>
+                </a:solidFill>
+                <a:latin typeface="Noto Sans TC"/>
+              </a:rPr>
+              <a:t>• 圖 3-1 以 top-down tree 呈現系統責任邊界</a:t>
             </a:r>
           </a:p>
           <a:p>
@@ -50724,23 +50724,23 @@
                 <a:spcPct val="112000"/>
               </a:lnSpc>
               <a:spcAft>
-                <a:spcPts val="765"/>
-              </a:spcAft>
-              <a:defRPr sz="1700">
-                <a:solidFill>
-                  <a:srgbClr val="1E2733"/>
-                </a:solidFill>
-                <a:latin typeface="Noto Sans TC"/>
-              </a:defRPr>
-            </a:pPr>
-            <a:r>
-              <a:rPr sz="1700" b="0">
-                <a:solidFill>
-                  <a:srgbClr val="1E2733"/>
-                </a:solidFill>
-                <a:latin typeface="Noto Sans TC"/>
-              </a:rPr>
-              <a:t>• 所有請求經服務編排後進入環境數位孿生核心</a:t>
+                <a:spcPts val="720"/>
+              </a:spcAft>
+              <a:defRPr sz="1600">
+                <a:solidFill>
+                  <a:srgbClr val="1E2733"/>
+                </a:solidFill>
+                <a:latin typeface="Noto Sans TC"/>
+              </a:defRPr>
+            </a:pPr>
+            <a:r>
+              <a:rPr sz="1600" b="0">
+                <a:solidFill>
+                  <a:srgbClr val="1E2733"/>
+                </a:solidFill>
+                <a:latin typeface="Noto Sans TC"/>
+              </a:rPr>
+              <a:t>• 情境與觀測層提供 room schema、8 點感測、外部邊界與時間</a:t>
             </a:r>
           </a:p>
           <a:p>
@@ -50749,23 +50749,23 @@
                 <a:spcPct val="112000"/>
               </a:lnSpc>
               <a:spcAft>
-                <a:spcPts val="765"/>
-              </a:spcAft>
-              <a:defRPr sz="1700">
-                <a:solidFill>
-                  <a:srgbClr val="1E2733"/>
-                </a:solidFill>
-                <a:latin typeface="Noto Sans TC"/>
-              </a:defRPr>
-            </a:pPr>
-            <a:r>
-              <a:rPr sz="1700" b="0">
-                <a:solidFill>
-                  <a:srgbClr val="1E2733"/>
-                </a:solidFill>
-                <a:latin typeface="Noto Sans TC"/>
-              </a:rPr>
-              <a:t>• 校正與影響學習層負責修正稀疏感測誤差</a:t>
+                <a:spcPts val="720"/>
+              </a:spcAft>
+              <a:defRPr sz="1600">
+                <a:solidFill>
+                  <a:srgbClr val="1E2733"/>
+                </a:solidFill>
+                <a:latin typeface="Noto Sans TC"/>
+              </a:defRPr>
+            </a:pPr>
+            <a:r>
+              <a:rPr sz="1600" b="0">
+                <a:solidFill>
+                  <a:srgbClr val="1E2733"/>
+                </a:solidFill>
+                <a:latin typeface="Noto Sans TC"/>
+              </a:rPr>
+              <a:t>• 估測與學習層負責三因子場模型、校正、影響學習與 hybrid residual</a:t>
             </a:r>
           </a:p>
           <a:p>
@@ -50774,23 +50774,23 @@
                 <a:spcPct val="112000"/>
               </a:lnSpc>
               <a:spcAft>
-                <a:spcPts val="765"/>
-              </a:spcAft>
-              <a:defRPr sz="1700">
-                <a:solidFill>
-                  <a:srgbClr val="1E2733"/>
-                </a:solidFill>
-                <a:latin typeface="Noto Sans TC"/>
-              </a:defRPr>
-            </a:pPr>
-            <a:r>
-              <a:rPr sz="1700" b="0">
-                <a:solidFill>
-                  <a:srgbClr val="1E2733"/>
-                </a:solidFill>
-                <a:latin typeface="Noto Sans TC"/>
-              </a:rPr>
-              <a:t>• 輸出為空間場估測、區域估測、動作排序與 3D 視覺化</a:t>
+                <a:spcPts val="720"/>
+              </a:spcAft>
+              <a:defRPr sz="1600">
+                <a:solidFill>
+                  <a:srgbClr val="1E2733"/>
+                </a:solidFill>
+                <a:latin typeface="Noto Sans TC"/>
+              </a:defRPr>
+            </a:pPr>
+            <a:r>
+              <a:rPr sz="1600" b="0">
+                <a:solidFill>
+                  <a:srgbClr val="1E2733"/>
+                </a:solidFill>
+                <a:latin typeface="Noto Sans TC"/>
+              </a:rPr>
+              <a:t>• 服務與決策層暴露 scripts、Web、MCP/Gemma 與 point/zone/action 輸出</a:t>
             </a:r>
           </a:p>
         </p:txBody>
